--- a/PPT/Review-2.pptx
+++ b/PPT/Review-2.pptx
@@ -5,10 +5,10 @@
     <p:sldMasterId id="2147483932" r:id="rId1"/>
   </p:sldMasterIdLst>
   <p:notesMasterIdLst>
-    <p:notesMasterId r:id="rId18"/>
+    <p:notesMasterId r:id="rId16"/>
   </p:notesMasterIdLst>
   <p:handoutMasterIdLst>
-    <p:handoutMasterId r:id="rId19"/>
+    <p:handoutMasterId r:id="rId17"/>
   </p:handoutMasterIdLst>
   <p:sldIdLst>
     <p:sldId id="491" r:id="rId2"/>
@@ -20,22 +20,20 @@
     <p:sldId id="549" r:id="rId8"/>
     <p:sldId id="550" r:id="rId9"/>
     <p:sldId id="548" r:id="rId10"/>
-    <p:sldId id="552" r:id="rId11"/>
-    <p:sldId id="551" r:id="rId12"/>
-    <p:sldId id="541" r:id="rId13"/>
-    <p:sldId id="542" r:id="rId14"/>
-    <p:sldId id="504" r:id="rId15"/>
-    <p:sldId id="547" r:id="rId16"/>
-    <p:sldId id="514" r:id="rId17"/>
+    <p:sldId id="541" r:id="rId11"/>
+    <p:sldId id="542" r:id="rId12"/>
+    <p:sldId id="504" r:id="rId13"/>
+    <p:sldId id="547" r:id="rId14"/>
+    <p:sldId id="514" r:id="rId15"/>
   </p:sldIdLst>
   <p:sldSz cx="9144000" cy="5143500" type="screen16x9"/>
   <p:notesSz cx="6858000" cy="9296400"/>
   <p:embeddedFontLst>
     <p:embeddedFont>
       <p:font typeface="Garamond" panose="02020404030301010803" pitchFamily="18" charset="0"/>
-      <p:regular r:id="rId20"/>
-      <p:bold r:id="rId21"/>
-      <p:italic r:id="rId22"/>
+      <p:regular r:id="rId18"/>
+      <p:bold r:id="rId19"/>
+      <p:italic r:id="rId20"/>
     </p:embeddedFont>
   </p:embeddedFontLst>
   <p:defaultTextStyle>
@@ -216,6 +214,14 @@
 </p:presentation>
 </file>
 
+<file path=ppt/revisionInfo.xml><?xml version="1.0" encoding="utf-8"?>
+<p1510:revInfo xmlns:a="http://schemas.openxmlformats.org/drawingml/2006/main" xmlns:r="http://schemas.openxmlformats.org/officeDocument/2006/relationships" xmlns:p1510="http://schemas.microsoft.com/office/powerpoint/2015/10/main">
+  <p1510:revLst>
+    <p1510:client id="{73A4B93D-47A1-4BD8-991C-7405B63A3A83}" v="1" dt="2026-01-18T11:59:34.490"/>
+  </p1510:revLst>
+</p1510:revInfo>
+</file>
+
 <file path=ppt/handoutMasters/handoutMaster1.xml><?xml version="1.0" encoding="utf-8"?>
 <p:handoutMaster xmlns:a="http://schemas.openxmlformats.org/drawingml/2006/main" xmlns:r="http://schemas.openxmlformats.org/officeDocument/2006/relationships" xmlns:p="http://schemas.openxmlformats.org/presentationml/2006/main">
   <p:cSld>
@@ -572,13 +578,7 @@
   <p:cSld>
     <p:spTree>
       <p:nvGrpSpPr>
-        <p:cNvPr id="1" name="">
-          <a:extLst>
-            <a:ext uri="{FF2B5EF4-FFF2-40B4-BE49-F238E27FC236}">
-              <a16:creationId xmlns:a16="http://schemas.microsoft.com/office/drawing/2014/main" id="{CB35B6A9-DDB9-CE0F-BE0F-B302DFA7225D}"/>
-            </a:ext>
-          </a:extLst>
-        </p:cNvPr>
+        <p:cNvPr id="1" name=""/>
         <p:cNvGrpSpPr/>
         <p:nvPr/>
       </p:nvGrpSpPr>
@@ -592,13 +592,7 @@
       </p:grpSpPr>
       <p:sp>
         <p:nvSpPr>
-          <p:cNvPr id="2" name="Slide Image Placeholder 1">
-            <a:extLst>
-              <a:ext uri="{FF2B5EF4-FFF2-40B4-BE49-F238E27FC236}">
-                <a16:creationId xmlns:a16="http://schemas.microsoft.com/office/drawing/2014/main" id="{A4C2256B-5BDD-57A8-790A-1E08EDCF322E}"/>
-              </a:ext>
-            </a:extLst>
-          </p:cNvPr>
+          <p:cNvPr id="2" name="Slide Image Placeholder 1"/>
           <p:cNvSpPr>
             <a:spLocks noGrp="1" noRot="1" noChangeAspect="1"/>
           </p:cNvSpPr>
@@ -617,13 +611,7 @@
       </p:sp>
       <p:sp>
         <p:nvSpPr>
-          <p:cNvPr id="3" name="Notes Placeholder 2">
-            <a:extLst>
-              <a:ext uri="{FF2B5EF4-FFF2-40B4-BE49-F238E27FC236}">
-                <a16:creationId xmlns:a16="http://schemas.microsoft.com/office/drawing/2014/main" id="{E3788390-9122-0804-CCF0-9920FA0BA2B9}"/>
-              </a:ext>
-            </a:extLst>
-          </p:cNvPr>
+          <p:cNvPr id="3" name="Notes Placeholder 2"/>
           <p:cNvSpPr>
             <a:spLocks noGrp="1"/>
           </p:cNvSpPr>
@@ -643,7 +631,7 @@
     </p:spTree>
     <p:extLst>
       <p:ext uri="{BB962C8B-B14F-4D97-AF65-F5344CB8AC3E}">
-        <p14:creationId xmlns:p14="http://schemas.microsoft.com/office/powerpoint/2010/main" val="250059992"/>
+        <p14:creationId xmlns:p14="http://schemas.microsoft.com/office/powerpoint/2010/main" val="1784845763"/>
       </p:ext>
     </p:extLst>
   </p:cSld>
@@ -658,13 +646,7 @@
   <p:cSld>
     <p:spTree>
       <p:nvGrpSpPr>
-        <p:cNvPr id="1" name="">
-          <a:extLst>
-            <a:ext uri="{FF2B5EF4-FFF2-40B4-BE49-F238E27FC236}">
-              <a16:creationId xmlns:a16="http://schemas.microsoft.com/office/drawing/2014/main" id="{41690BA2-5A86-6655-BEFF-57CA621BB2FA}"/>
-            </a:ext>
-          </a:extLst>
-        </p:cNvPr>
+        <p:cNvPr id="1" name=""/>
         <p:cNvGrpSpPr/>
         <p:nvPr/>
       </p:nvGrpSpPr>
@@ -678,13 +660,7 @@
       </p:grpSpPr>
       <p:sp>
         <p:nvSpPr>
-          <p:cNvPr id="2" name="Slide Image Placeholder 1">
-            <a:extLst>
-              <a:ext uri="{FF2B5EF4-FFF2-40B4-BE49-F238E27FC236}">
-                <a16:creationId xmlns:a16="http://schemas.microsoft.com/office/drawing/2014/main" id="{DF94CEF2-570F-6DC7-4D96-DFB13F3E0E2B}"/>
-              </a:ext>
-            </a:extLst>
-          </p:cNvPr>
+          <p:cNvPr id="2" name="Slide Image Placeholder 1"/>
           <p:cNvSpPr>
             <a:spLocks noGrp="1" noRot="1" noChangeAspect="1"/>
           </p:cNvSpPr>
@@ -703,13 +679,7 @@
       </p:sp>
       <p:sp>
         <p:nvSpPr>
-          <p:cNvPr id="3" name="Notes Placeholder 2">
-            <a:extLst>
-              <a:ext uri="{FF2B5EF4-FFF2-40B4-BE49-F238E27FC236}">
-                <a16:creationId xmlns:a16="http://schemas.microsoft.com/office/drawing/2014/main" id="{3920AA58-8BF2-B266-D343-A5EC79DB7EB3}"/>
-              </a:ext>
-            </a:extLst>
-          </p:cNvPr>
+          <p:cNvPr id="3" name="Notes Placeholder 2"/>
           <p:cNvSpPr>
             <a:spLocks noGrp="1"/>
           </p:cNvSpPr>
@@ -729,7 +699,7 @@
     </p:spTree>
     <p:extLst>
       <p:ext uri="{BB962C8B-B14F-4D97-AF65-F5344CB8AC3E}">
-        <p14:creationId xmlns:p14="http://schemas.microsoft.com/office/powerpoint/2010/main" val="437698538"/>
+        <p14:creationId xmlns:p14="http://schemas.microsoft.com/office/powerpoint/2010/main" val="1171470766"/>
       </p:ext>
     </p:extLst>
   </p:cSld>
@@ -797,7 +767,7 @@
     </p:spTree>
     <p:extLst>
       <p:ext uri="{BB962C8B-B14F-4D97-AF65-F5344CB8AC3E}">
-        <p14:creationId xmlns:p14="http://schemas.microsoft.com/office/powerpoint/2010/main" val="1784845763"/>
+        <p14:creationId xmlns:p14="http://schemas.microsoft.com/office/powerpoint/2010/main" val="3781308169"/>
       </p:ext>
     </p:extLst>
   </p:cSld>
@@ -808,142 +778,6 @@
 </file>
 
 <file path=ppt/notesSlides/notesSlide13.xml><?xml version="1.0" encoding="utf-8"?>
-<p:notes xmlns:a="http://schemas.openxmlformats.org/drawingml/2006/main" xmlns:r="http://schemas.openxmlformats.org/officeDocument/2006/relationships" xmlns:p="http://schemas.openxmlformats.org/presentationml/2006/main">
-  <p:cSld>
-    <p:spTree>
-      <p:nvGrpSpPr>
-        <p:cNvPr id="1" name=""/>
-        <p:cNvGrpSpPr/>
-        <p:nvPr/>
-      </p:nvGrpSpPr>
-      <p:grpSpPr>
-        <a:xfrm>
-          <a:off x="0" y="0"/>
-          <a:ext cx="0" cy="0"/>
-          <a:chOff x="0" y="0"/>
-          <a:chExt cx="0" cy="0"/>
-        </a:xfrm>
-      </p:grpSpPr>
-      <p:sp>
-        <p:nvSpPr>
-          <p:cNvPr id="2" name="Slide Image Placeholder 1"/>
-          <p:cNvSpPr>
-            <a:spLocks noGrp="1" noRot="1" noChangeAspect="1"/>
-          </p:cNvSpPr>
-          <p:nvPr>
-            <p:ph type="sldImg"/>
-          </p:nvPr>
-        </p:nvSpPr>
-        <p:spPr/>
-        <p:txBody>
-          <a:bodyPr/>
-          <a:lstStyle/>
-          <a:p>
-            <a:endParaRPr lang="en-IN"/>
-          </a:p>
-        </p:txBody>
-      </p:sp>
-      <p:sp>
-        <p:nvSpPr>
-          <p:cNvPr id="3" name="Notes Placeholder 2"/>
-          <p:cNvSpPr>
-            <a:spLocks noGrp="1"/>
-          </p:cNvSpPr>
-          <p:nvPr>
-            <p:ph type="body" idx="1"/>
-          </p:nvPr>
-        </p:nvSpPr>
-        <p:spPr/>
-        <p:txBody>
-          <a:bodyPr/>
-          <a:lstStyle/>
-          <a:p>
-            <a:endParaRPr lang="en-IN" dirty="0"/>
-          </a:p>
-        </p:txBody>
-      </p:sp>
-    </p:spTree>
-    <p:extLst>
-      <p:ext uri="{BB962C8B-B14F-4D97-AF65-F5344CB8AC3E}">
-        <p14:creationId xmlns:p14="http://schemas.microsoft.com/office/powerpoint/2010/main" val="1171470766"/>
-      </p:ext>
-    </p:extLst>
-  </p:cSld>
-  <p:clrMapOvr>
-    <a:masterClrMapping/>
-  </p:clrMapOvr>
-</p:notes>
-</file>
-
-<file path=ppt/notesSlides/notesSlide14.xml><?xml version="1.0" encoding="utf-8"?>
-<p:notes xmlns:a="http://schemas.openxmlformats.org/drawingml/2006/main" xmlns:r="http://schemas.openxmlformats.org/officeDocument/2006/relationships" xmlns:p="http://schemas.openxmlformats.org/presentationml/2006/main">
-  <p:cSld>
-    <p:spTree>
-      <p:nvGrpSpPr>
-        <p:cNvPr id="1" name=""/>
-        <p:cNvGrpSpPr/>
-        <p:nvPr/>
-      </p:nvGrpSpPr>
-      <p:grpSpPr>
-        <a:xfrm>
-          <a:off x="0" y="0"/>
-          <a:ext cx="0" cy="0"/>
-          <a:chOff x="0" y="0"/>
-          <a:chExt cx="0" cy="0"/>
-        </a:xfrm>
-      </p:grpSpPr>
-      <p:sp>
-        <p:nvSpPr>
-          <p:cNvPr id="2" name="Slide Image Placeholder 1"/>
-          <p:cNvSpPr>
-            <a:spLocks noGrp="1" noRot="1" noChangeAspect="1"/>
-          </p:cNvSpPr>
-          <p:nvPr>
-            <p:ph type="sldImg"/>
-          </p:nvPr>
-        </p:nvSpPr>
-        <p:spPr/>
-        <p:txBody>
-          <a:bodyPr/>
-          <a:lstStyle/>
-          <a:p>
-            <a:endParaRPr lang="en-IN"/>
-          </a:p>
-        </p:txBody>
-      </p:sp>
-      <p:sp>
-        <p:nvSpPr>
-          <p:cNvPr id="3" name="Notes Placeholder 2"/>
-          <p:cNvSpPr>
-            <a:spLocks noGrp="1"/>
-          </p:cNvSpPr>
-          <p:nvPr>
-            <p:ph type="body" idx="1"/>
-          </p:nvPr>
-        </p:nvSpPr>
-        <p:spPr/>
-        <p:txBody>
-          <a:bodyPr/>
-          <a:lstStyle/>
-          <a:p>
-            <a:endParaRPr lang="en-IN" dirty="0"/>
-          </a:p>
-        </p:txBody>
-      </p:sp>
-    </p:spTree>
-    <p:extLst>
-      <p:ext uri="{BB962C8B-B14F-4D97-AF65-F5344CB8AC3E}">
-        <p14:creationId xmlns:p14="http://schemas.microsoft.com/office/powerpoint/2010/main" val="3781308169"/>
-      </p:ext>
-    </p:extLst>
-  </p:cSld>
-  <p:clrMapOvr>
-    <a:masterClrMapping/>
-  </p:clrMapOvr>
-</p:notes>
-</file>
-
-<file path=ppt/notesSlides/notesSlide15.xml><?xml version="1.0" encoding="utf-8"?>
 <p:notes xmlns:a="http://schemas.openxmlformats.org/drawingml/2006/main" xmlns:r="http://schemas.openxmlformats.org/officeDocument/2006/relationships" xmlns:p="http://schemas.openxmlformats.org/presentationml/2006/main">
   <p:cSld>
     <p:spTree>
@@ -2831,7 +2665,7 @@
           <a:p>
             <a:fld id="{1D8BD707-D9CF-40AE-B4C6-C98DA3205C09}" type="datetimeFigureOut">
               <a:rPr lang="en-US"/>
-              <a:t>12/19/2025</a:t>
+              <a:t>1/18/2026</a:t>
             </a:fld>
             <a:endParaRPr lang="en-US"/>
           </a:p>
@@ -6412,13 +6246,7 @@
   <p:cSld>
     <p:spTree>
       <p:nvGrpSpPr>
-        <p:cNvPr id="1" name="">
-          <a:extLst>
-            <a:ext uri="{FF2B5EF4-FFF2-40B4-BE49-F238E27FC236}">
-              <a16:creationId xmlns:a16="http://schemas.microsoft.com/office/drawing/2014/main" id="{1A3558B3-2D10-31CF-0EB1-E2C197409697}"/>
-            </a:ext>
-          </a:extLst>
-        </p:cNvPr>
+        <p:cNvPr id="1" name=""/>
         <p:cNvGrpSpPr/>
         <p:nvPr/>
       </p:nvGrpSpPr>
@@ -6435,7 +6263,7 @@
           <p:cNvPr id="2" name="Slide Number Placeholder 1">
             <a:extLst>
               <a:ext uri="{FF2B5EF4-FFF2-40B4-BE49-F238E27FC236}">
-                <a16:creationId xmlns:a16="http://schemas.microsoft.com/office/drawing/2014/main" id="{B9236845-9612-8C92-C822-1997E9811C17}"/>
+                <a16:creationId xmlns:a16="http://schemas.microsoft.com/office/drawing/2014/main" id="{CD925B32-5762-0AB2-E08A-461E4C8B7014}"/>
               </a:ext>
             </a:extLst>
           </p:cNvPr>
@@ -6470,1145 +6298,7 @@
           <p:cNvPr id="3" name="object 2">
             <a:extLst>
               <a:ext uri="{FF2B5EF4-FFF2-40B4-BE49-F238E27FC236}">
-                <a16:creationId xmlns:a16="http://schemas.microsoft.com/office/drawing/2014/main" id="{1CB8312D-97A6-233D-5A38-D540516E8B83}"/>
-              </a:ext>
-            </a:extLst>
-          </p:cNvPr>
-          <p:cNvSpPr txBox="1">
-            <a:spLocks noGrp="1"/>
-          </p:cNvSpPr>
-          <p:nvPr>
-            <p:ph type="title"/>
-          </p:nvPr>
-        </p:nvSpPr>
-        <p:spPr>
-          <a:xfrm>
-            <a:off x="79513" y="240190"/>
-            <a:ext cx="7432040" cy="534120"/>
-          </a:xfrm>
-          <a:prstGeom prst="rect">
-            <a:avLst/>
-          </a:prstGeom>
-        </p:spPr>
-        <p:txBody>
-          <a:bodyPr vert="horz" wrap="square" lIns="0" tIns="71754" rIns="0" bIns="0" rtlCol="0" anchor="t">
-            <a:spAutoFit/>
-          </a:bodyPr>
-          <a:lstStyle/>
-          <a:p>
-            <a:pPr marL="45085">
-              <a:lnSpc>
-                <a:spcPct val="100000"/>
-              </a:lnSpc>
-              <a:spcBef>
-                <a:spcPts val="105"/>
-              </a:spcBef>
-            </a:pPr>
-            <a:r>
-              <a:rPr lang="en-US" spc="-30" dirty="0">
-                <a:latin typeface="Times New Roman" panose="02020603050405020304" pitchFamily="18" charset="0"/>
-                <a:cs typeface="Times New Roman" panose="02020603050405020304" pitchFamily="18" charset="0"/>
-              </a:rPr>
-              <a:t>Literature Review: Paper 7</a:t>
-            </a:r>
-          </a:p>
-        </p:txBody>
-      </p:sp>
-      <p:graphicFrame>
-        <p:nvGraphicFramePr>
-          <p:cNvPr id="4" name="Table 3">
-            <a:extLst>
-              <a:ext uri="{FF2B5EF4-FFF2-40B4-BE49-F238E27FC236}">
-                <a16:creationId xmlns:a16="http://schemas.microsoft.com/office/drawing/2014/main" id="{49D5416D-5F4B-12BD-F4CE-BCD125BB9C5A}"/>
-              </a:ext>
-            </a:extLst>
-          </p:cNvPr>
-          <p:cNvGraphicFramePr>
-            <a:graphicFrameLocks noGrp="1"/>
-          </p:cNvGraphicFramePr>
-          <p:nvPr>
-            <p:extLst>
-              <p:ext uri="{D42A27DB-BD31-4B8C-83A1-F6EECF244321}">
-                <p14:modId xmlns:p14="http://schemas.microsoft.com/office/powerpoint/2010/main" val="629830194"/>
-              </p:ext>
-            </p:extLst>
-          </p:nvPr>
-        </p:nvGraphicFramePr>
-        <p:xfrm>
-          <a:off x="228600" y="1313553"/>
-          <a:ext cx="8209722" cy="3322697"/>
-        </p:xfrm>
-        <a:graphic>
-          <a:graphicData uri="http://schemas.openxmlformats.org/drawingml/2006/table">
-            <a:tbl>
-              <a:tblPr/>
-              <a:tblGrid>
-                <a:gridCol w="2414624">
-                  <a:extLst>
-                    <a:ext uri="{9D8B030D-6E8A-4147-A177-3AD203B41FA5}">
-                      <a16:colId xmlns:a16="http://schemas.microsoft.com/office/drawing/2014/main" val="4105648266"/>
-                    </a:ext>
-                  </a:extLst>
-                </a:gridCol>
-                <a:gridCol w="5795098">
-                  <a:extLst>
-                    <a:ext uri="{9D8B030D-6E8A-4147-A177-3AD203B41FA5}">
-                      <a16:colId xmlns:a16="http://schemas.microsoft.com/office/drawing/2014/main" val="310446479"/>
-                    </a:ext>
-                  </a:extLst>
-                </a:gridCol>
-              </a:tblGrid>
-              <a:tr h="256161">
-                <a:tc>
-                  <a:txBody>
-                    <a:bodyPr/>
-                    <a:lstStyle/>
-                    <a:p>
-                      <a:pPr rtl="0">
-                        <a:buNone/>
-                      </a:pPr>
-                      <a:r>
-                        <a:rPr lang="en-GB" sz="1400" b="1">
-                          <a:solidFill>
-                            <a:srgbClr val="1F1F1F"/>
-                          </a:solidFill>
-                          <a:effectLst/>
-                          <a:latin typeface="Times New Roman" panose="02020603050405020304" pitchFamily="18" charset="0"/>
-                          <a:cs typeface="Times New Roman" panose="02020603050405020304" pitchFamily="18" charset="0"/>
-                        </a:rPr>
-                        <a:t>Aspect</a:t>
-                      </a:r>
-                      <a:endParaRPr lang="en-GB" sz="1400">
-                        <a:solidFill>
-                          <a:srgbClr val="1F1F1F"/>
-                        </a:solidFill>
-                        <a:effectLst/>
-                        <a:latin typeface="Times New Roman" panose="02020603050405020304" pitchFamily="18" charset="0"/>
-                        <a:cs typeface="Times New Roman" panose="02020603050405020304" pitchFamily="18" charset="0"/>
-                      </a:endParaRPr>
-                    </a:p>
-                  </a:txBody>
-                  <a:tcPr marL="42785" marR="42785" marT="28524" marB="28524" anchor="ctr">
-                    <a:lnL w="12700" cap="flat" cmpd="sng" algn="ctr">
-                      <a:solidFill>
-                        <a:schemeClr val="tx1"/>
-                      </a:solidFill>
-                      <a:prstDash val="solid"/>
-                      <a:round/>
-                      <a:headEnd type="none" w="med" len="med"/>
-                      <a:tailEnd type="none" w="med" len="med"/>
-                    </a:lnL>
-                    <a:lnR w="12700" cap="flat" cmpd="sng" algn="ctr">
-                      <a:solidFill>
-                        <a:schemeClr val="tx1"/>
-                      </a:solidFill>
-                      <a:prstDash val="solid"/>
-                      <a:round/>
-                      <a:headEnd type="none" w="med" len="med"/>
-                      <a:tailEnd type="none" w="med" len="med"/>
-                    </a:lnR>
-                    <a:lnT w="12700" cap="flat" cmpd="sng" algn="ctr">
-                      <a:solidFill>
-                        <a:schemeClr val="tx1"/>
-                      </a:solidFill>
-                      <a:prstDash val="solid"/>
-                      <a:round/>
-                      <a:headEnd type="none" w="med" len="med"/>
-                      <a:tailEnd type="none" w="med" len="med"/>
-                    </a:lnT>
-                    <a:lnB w="12700" cap="flat" cmpd="sng" algn="ctr">
-                      <a:solidFill>
-                        <a:schemeClr val="tx1"/>
-                      </a:solidFill>
-                      <a:prstDash val="solid"/>
-                      <a:round/>
-                      <a:headEnd type="none" w="med" len="med"/>
-                      <a:tailEnd type="none" w="med" len="med"/>
-                    </a:lnB>
-                    <a:noFill/>
-                  </a:tcPr>
-                </a:tc>
-                <a:tc>
-                  <a:txBody>
-                    <a:bodyPr/>
-                    <a:lstStyle/>
-                    <a:p>
-                      <a:pPr rtl="0">
-                        <a:buNone/>
-                      </a:pPr>
-                      <a:r>
-                        <a:rPr lang="en-GB" sz="1400" b="1">
-                          <a:solidFill>
-                            <a:srgbClr val="1F1F1F"/>
-                          </a:solidFill>
-                          <a:effectLst/>
-                          <a:latin typeface="Times New Roman" panose="02020603050405020304" pitchFamily="18" charset="0"/>
-                          <a:cs typeface="Times New Roman" panose="02020603050405020304" pitchFamily="18" charset="0"/>
-                        </a:rPr>
-                        <a:t>Details</a:t>
-                      </a:r>
-                      <a:endParaRPr lang="en-GB" sz="1400">
-                        <a:solidFill>
-                          <a:srgbClr val="1F1F1F"/>
-                        </a:solidFill>
-                        <a:effectLst/>
-                        <a:latin typeface="Times New Roman" panose="02020603050405020304" pitchFamily="18" charset="0"/>
-                        <a:cs typeface="Times New Roman" panose="02020603050405020304" pitchFamily="18" charset="0"/>
-                      </a:endParaRPr>
-                    </a:p>
-                  </a:txBody>
-                  <a:tcPr marL="42785" marR="42785" marT="28524" marB="28524" anchor="ctr">
-                    <a:lnL w="12700" cap="flat" cmpd="sng" algn="ctr">
-                      <a:solidFill>
-                        <a:schemeClr val="tx1"/>
-                      </a:solidFill>
-                      <a:prstDash val="solid"/>
-                      <a:round/>
-                      <a:headEnd type="none" w="med" len="med"/>
-                      <a:tailEnd type="none" w="med" len="med"/>
-                    </a:lnL>
-                    <a:lnR w="12700" cap="flat" cmpd="sng" algn="ctr">
-                      <a:solidFill>
-                        <a:schemeClr val="tx1"/>
-                      </a:solidFill>
-                      <a:prstDash val="solid"/>
-                      <a:round/>
-                      <a:headEnd type="none" w="med" len="med"/>
-                      <a:tailEnd type="none" w="med" len="med"/>
-                    </a:lnR>
-                    <a:lnT w="12700" cap="flat" cmpd="sng" algn="ctr">
-                      <a:solidFill>
-                        <a:schemeClr val="tx1"/>
-                      </a:solidFill>
-                      <a:prstDash val="solid"/>
-                      <a:round/>
-                      <a:headEnd type="none" w="med" len="med"/>
-                      <a:tailEnd type="none" w="med" len="med"/>
-                    </a:lnT>
-                    <a:lnB w="12700" cap="flat" cmpd="sng" algn="ctr">
-                      <a:solidFill>
-                        <a:schemeClr val="tx1"/>
-                      </a:solidFill>
-                      <a:prstDash val="solid"/>
-                      <a:round/>
-                      <a:headEnd type="none" w="med" len="med"/>
-                      <a:tailEnd type="none" w="med" len="med"/>
-                    </a:lnB>
-                    <a:noFill/>
-                  </a:tcPr>
-                </a:tc>
-                <a:extLst>
-                  <a:ext uri="{0D108BD9-81ED-4DB2-BD59-A6C34878D82A}">
-                    <a16:rowId xmlns:a16="http://schemas.microsoft.com/office/drawing/2014/main" val="2537463465"/>
-                  </a:ext>
-                </a:extLst>
-              </a:tr>
-              <a:tr h="458279">
-                <a:tc>
-                  <a:txBody>
-                    <a:bodyPr/>
-                    <a:lstStyle/>
-                    <a:p>
-                      <a:pPr rtl="0">
-                        <a:buNone/>
-                      </a:pPr>
-                      <a:r>
-                        <a:rPr lang="en-GB" sz="1400" b="1">
-                          <a:solidFill>
-                            <a:srgbClr val="1F1F1F"/>
-                          </a:solidFill>
-                          <a:effectLst/>
-                          <a:latin typeface="Times New Roman" panose="02020603050405020304" pitchFamily="18" charset="0"/>
-                          <a:cs typeface="Times New Roman" panose="02020603050405020304" pitchFamily="18" charset="0"/>
-                        </a:rPr>
-                        <a:t>Title</a:t>
-                      </a:r>
-                      <a:endParaRPr lang="en-GB" sz="1400">
-                        <a:solidFill>
-                          <a:srgbClr val="1F1F1F"/>
-                        </a:solidFill>
-                        <a:effectLst/>
-                        <a:latin typeface="Times New Roman" panose="02020603050405020304" pitchFamily="18" charset="0"/>
-                        <a:cs typeface="Times New Roman" panose="02020603050405020304" pitchFamily="18" charset="0"/>
-                      </a:endParaRPr>
-                    </a:p>
-                  </a:txBody>
-                  <a:tcPr marL="42785" marR="42785" marT="28524" marB="28524" anchor="ctr">
-                    <a:lnL w="12700" cap="flat" cmpd="sng" algn="ctr">
-                      <a:solidFill>
-                        <a:schemeClr val="tx1"/>
-                      </a:solidFill>
-                      <a:prstDash val="solid"/>
-                      <a:round/>
-                      <a:headEnd type="none" w="med" len="med"/>
-                      <a:tailEnd type="none" w="med" len="med"/>
-                    </a:lnL>
-                    <a:lnR w="12700" cap="flat" cmpd="sng" algn="ctr">
-                      <a:solidFill>
-                        <a:schemeClr val="tx1"/>
-                      </a:solidFill>
-                      <a:prstDash val="solid"/>
-                      <a:round/>
-                      <a:headEnd type="none" w="med" len="med"/>
-                      <a:tailEnd type="none" w="med" len="med"/>
-                    </a:lnR>
-                    <a:lnT w="12700" cap="flat" cmpd="sng" algn="ctr">
-                      <a:solidFill>
-                        <a:schemeClr val="tx1"/>
-                      </a:solidFill>
-                      <a:prstDash val="solid"/>
-                      <a:round/>
-                      <a:headEnd type="none" w="med" len="med"/>
-                      <a:tailEnd type="none" w="med" len="med"/>
-                    </a:lnT>
-                    <a:lnB w="12700" cap="flat" cmpd="sng" algn="ctr">
-                      <a:solidFill>
-                        <a:schemeClr val="tx1"/>
-                      </a:solidFill>
-                      <a:prstDash val="solid"/>
-                      <a:round/>
-                      <a:headEnd type="none" w="med" len="med"/>
-                      <a:tailEnd type="none" w="med" len="med"/>
-                    </a:lnB>
-                    <a:noFill/>
-                  </a:tcPr>
-                </a:tc>
-                <a:tc>
-                  <a:txBody>
-                    <a:bodyPr/>
-                    <a:lstStyle/>
-                    <a:p>
-                      <a:pPr rtl="0">
-                        <a:buNone/>
-                      </a:pPr>
-                      <a:r>
-                        <a:rPr lang="en-GB" sz="1400">
-                          <a:solidFill>
-                            <a:srgbClr val="1F1F1F"/>
-                          </a:solidFill>
-                          <a:effectLst/>
-                          <a:latin typeface="Times New Roman" panose="02020603050405020304" pitchFamily="18" charset="0"/>
-                          <a:cs typeface="Times New Roman" panose="02020603050405020304" pitchFamily="18" charset="0"/>
-                        </a:rPr>
-                        <a:t>Development of an AI-Powered Faculty Support Chatbot</a:t>
-                      </a:r>
-                    </a:p>
-                  </a:txBody>
-                  <a:tcPr marL="42785" marR="42785" marT="28524" marB="28524" anchor="ctr">
-                    <a:lnL w="12700" cap="flat" cmpd="sng" algn="ctr">
-                      <a:solidFill>
-                        <a:schemeClr val="tx1"/>
-                      </a:solidFill>
-                      <a:prstDash val="solid"/>
-                      <a:round/>
-                      <a:headEnd type="none" w="med" len="med"/>
-                      <a:tailEnd type="none" w="med" len="med"/>
-                    </a:lnL>
-                    <a:lnR w="12700" cap="flat" cmpd="sng" algn="ctr">
-                      <a:solidFill>
-                        <a:schemeClr val="tx1"/>
-                      </a:solidFill>
-                      <a:prstDash val="solid"/>
-                      <a:round/>
-                      <a:headEnd type="none" w="med" len="med"/>
-                      <a:tailEnd type="none" w="med" len="med"/>
-                    </a:lnR>
-                    <a:lnT w="12700" cap="flat" cmpd="sng" algn="ctr">
-                      <a:solidFill>
-                        <a:schemeClr val="tx1"/>
-                      </a:solidFill>
-                      <a:prstDash val="solid"/>
-                      <a:round/>
-                      <a:headEnd type="none" w="med" len="med"/>
-                      <a:tailEnd type="none" w="med" len="med"/>
-                    </a:lnT>
-                    <a:lnB w="12700" cap="flat" cmpd="sng" algn="ctr">
-                      <a:solidFill>
-                        <a:schemeClr val="tx1"/>
-                      </a:solidFill>
-                      <a:prstDash val="solid"/>
-                      <a:round/>
-                      <a:headEnd type="none" w="med" len="med"/>
-                      <a:tailEnd type="none" w="med" len="med"/>
-                    </a:lnB>
-                    <a:noFill/>
-                  </a:tcPr>
-                </a:tc>
-                <a:extLst>
-                  <a:ext uri="{0D108BD9-81ED-4DB2-BD59-A6C34878D82A}">
-                    <a16:rowId xmlns:a16="http://schemas.microsoft.com/office/drawing/2014/main" val="2331604274"/>
-                  </a:ext>
-                </a:extLst>
-              </a:tr>
-              <a:tr h="491778">
-                <a:tc>
-                  <a:txBody>
-                    <a:bodyPr/>
-                    <a:lstStyle/>
-                    <a:p>
-                      <a:pPr rtl="0">
-                        <a:buNone/>
-                      </a:pPr>
-                      <a:r>
-                        <a:rPr lang="en-GB" sz="1400" b="1">
-                          <a:solidFill>
-                            <a:srgbClr val="1F1F1F"/>
-                          </a:solidFill>
-                          <a:effectLst/>
-                          <a:latin typeface="Times New Roman" panose="02020603050405020304" pitchFamily="18" charset="0"/>
-                          <a:cs typeface="Times New Roman" panose="02020603050405020304" pitchFamily="18" charset="0"/>
-                        </a:rPr>
-                        <a:t>Objective</a:t>
-                      </a:r>
-                      <a:endParaRPr lang="en-GB" sz="1400">
-                        <a:solidFill>
-                          <a:srgbClr val="1F1F1F"/>
-                        </a:solidFill>
-                        <a:effectLst/>
-                        <a:latin typeface="Times New Roman" panose="02020603050405020304" pitchFamily="18" charset="0"/>
-                        <a:cs typeface="Times New Roman" panose="02020603050405020304" pitchFamily="18" charset="0"/>
-                      </a:endParaRPr>
-                    </a:p>
-                  </a:txBody>
-                  <a:tcPr marL="42785" marR="42785" marT="28524" marB="28524" anchor="ctr">
-                    <a:lnL w="12700" cap="flat" cmpd="sng" algn="ctr">
-                      <a:solidFill>
-                        <a:schemeClr val="tx1"/>
-                      </a:solidFill>
-                      <a:prstDash val="solid"/>
-                      <a:round/>
-                      <a:headEnd type="none" w="med" len="med"/>
-                      <a:tailEnd type="none" w="med" len="med"/>
-                    </a:lnL>
-                    <a:lnR w="12700" cap="flat" cmpd="sng" algn="ctr">
-                      <a:solidFill>
-                        <a:schemeClr val="tx1"/>
-                      </a:solidFill>
-                      <a:prstDash val="solid"/>
-                      <a:round/>
-                      <a:headEnd type="none" w="med" len="med"/>
-                      <a:tailEnd type="none" w="med" len="med"/>
-                    </a:lnR>
-                    <a:lnT w="12700" cap="flat" cmpd="sng" algn="ctr">
-                      <a:solidFill>
-                        <a:schemeClr val="tx1"/>
-                      </a:solidFill>
-                      <a:prstDash val="solid"/>
-                      <a:round/>
-                      <a:headEnd type="none" w="med" len="med"/>
-                      <a:tailEnd type="none" w="med" len="med"/>
-                    </a:lnT>
-                    <a:lnB w="12700" cap="flat" cmpd="sng" algn="ctr">
-                      <a:solidFill>
-                        <a:schemeClr val="tx1"/>
-                      </a:solidFill>
-                      <a:prstDash val="solid"/>
-                      <a:round/>
-                      <a:headEnd type="none" w="med" len="med"/>
-                      <a:tailEnd type="none" w="med" len="med"/>
-                    </a:lnB>
-                    <a:noFill/>
-                  </a:tcPr>
-                </a:tc>
-                <a:tc>
-                  <a:txBody>
-                    <a:bodyPr/>
-                    <a:lstStyle/>
-                    <a:p>
-                      <a:pPr rtl="0">
-                        <a:buNone/>
-                      </a:pPr>
-                      <a:r>
-                        <a:rPr lang="en-GB" sz="1400" dirty="0">
-                          <a:solidFill>
-                            <a:srgbClr val="1F1F1F"/>
-                          </a:solidFill>
-                          <a:effectLst/>
-                          <a:latin typeface="Times New Roman" panose="02020603050405020304" pitchFamily="18" charset="0"/>
-                          <a:cs typeface="Times New Roman" panose="02020603050405020304" pitchFamily="18" charset="0"/>
-                        </a:rPr>
-                        <a:t>To automate routine faculty tasks like attendance posting and record retrieval using natural language.</a:t>
-                      </a:r>
-                    </a:p>
-                  </a:txBody>
-                  <a:tcPr marL="42785" marR="42785" marT="28524" marB="28524" anchor="ctr">
-                    <a:lnL w="12700" cap="flat" cmpd="sng" algn="ctr">
-                      <a:solidFill>
-                        <a:schemeClr val="tx1"/>
-                      </a:solidFill>
-                      <a:prstDash val="solid"/>
-                      <a:round/>
-                      <a:headEnd type="none" w="med" len="med"/>
-                      <a:tailEnd type="none" w="med" len="med"/>
-                    </a:lnL>
-                    <a:lnR w="12700" cap="flat" cmpd="sng" algn="ctr">
-                      <a:solidFill>
-                        <a:schemeClr val="tx1"/>
-                      </a:solidFill>
-                      <a:prstDash val="solid"/>
-                      <a:round/>
-                      <a:headEnd type="none" w="med" len="med"/>
-                      <a:tailEnd type="none" w="med" len="med"/>
-                    </a:lnR>
-                    <a:lnT w="12700" cap="flat" cmpd="sng" algn="ctr">
-                      <a:solidFill>
-                        <a:schemeClr val="tx1"/>
-                      </a:solidFill>
-                      <a:prstDash val="solid"/>
-                      <a:round/>
-                      <a:headEnd type="none" w="med" len="med"/>
-                      <a:tailEnd type="none" w="med" len="med"/>
-                    </a:lnT>
-                    <a:lnB w="12700" cap="flat" cmpd="sng" algn="ctr">
-                      <a:solidFill>
-                        <a:schemeClr val="tx1"/>
-                      </a:solidFill>
-                      <a:prstDash val="solid"/>
-                      <a:round/>
-                      <a:headEnd type="none" w="med" len="med"/>
-                      <a:tailEnd type="none" w="med" len="med"/>
-                    </a:lnB>
-                    <a:noFill/>
-                  </a:tcPr>
-                </a:tc>
-                <a:extLst>
-                  <a:ext uri="{0D108BD9-81ED-4DB2-BD59-A6C34878D82A}">
-                    <a16:rowId xmlns:a16="http://schemas.microsoft.com/office/drawing/2014/main" val="405147820"/>
-                  </a:ext>
-                </a:extLst>
-              </a:tr>
-              <a:tr h="491778">
-                <a:tc>
-                  <a:txBody>
-                    <a:bodyPr/>
-                    <a:lstStyle/>
-                    <a:p>
-                      <a:pPr rtl="0">
-                        <a:buNone/>
-                      </a:pPr>
-                      <a:r>
-                        <a:rPr lang="en-GB" sz="1400" b="1" dirty="0">
-                          <a:solidFill>
-                            <a:srgbClr val="1F1F1F"/>
-                          </a:solidFill>
-                          <a:effectLst/>
-                          <a:latin typeface="Times New Roman" panose="02020603050405020304" pitchFamily="18" charset="0"/>
-                          <a:cs typeface="Times New Roman" panose="02020603050405020304" pitchFamily="18" charset="0"/>
-                        </a:rPr>
-                        <a:t>Methodology</a:t>
-                      </a:r>
-                      <a:endParaRPr lang="en-GB" sz="1400" dirty="0">
-                        <a:solidFill>
-                          <a:srgbClr val="1F1F1F"/>
-                        </a:solidFill>
-                        <a:effectLst/>
-                        <a:latin typeface="Times New Roman" panose="02020603050405020304" pitchFamily="18" charset="0"/>
-                        <a:cs typeface="Times New Roman" panose="02020603050405020304" pitchFamily="18" charset="0"/>
-                      </a:endParaRPr>
-                    </a:p>
-                  </a:txBody>
-                  <a:tcPr marL="42785" marR="42785" marT="28524" marB="28524" anchor="ctr">
-                    <a:lnL w="12700" cap="flat" cmpd="sng" algn="ctr">
-                      <a:solidFill>
-                        <a:schemeClr val="tx1"/>
-                      </a:solidFill>
-                      <a:prstDash val="solid"/>
-                      <a:round/>
-                      <a:headEnd type="none" w="med" len="med"/>
-                      <a:tailEnd type="none" w="med" len="med"/>
-                    </a:lnL>
-                    <a:lnR w="12700" cap="flat" cmpd="sng" algn="ctr">
-                      <a:solidFill>
-                        <a:schemeClr val="tx1"/>
-                      </a:solidFill>
-                      <a:prstDash val="solid"/>
-                      <a:round/>
-                      <a:headEnd type="none" w="med" len="med"/>
-                      <a:tailEnd type="none" w="med" len="med"/>
-                    </a:lnR>
-                    <a:lnT w="12700" cap="flat" cmpd="sng" algn="ctr">
-                      <a:solidFill>
-                        <a:schemeClr val="tx1"/>
-                      </a:solidFill>
-                      <a:prstDash val="solid"/>
-                      <a:round/>
-                      <a:headEnd type="none" w="med" len="med"/>
-                      <a:tailEnd type="none" w="med" len="med"/>
-                    </a:lnT>
-                    <a:lnB w="12700" cap="flat" cmpd="sng" algn="ctr">
-                      <a:solidFill>
-                        <a:schemeClr val="tx1"/>
-                      </a:solidFill>
-                      <a:prstDash val="solid"/>
-                      <a:round/>
-                      <a:headEnd type="none" w="med" len="med"/>
-                      <a:tailEnd type="none" w="med" len="med"/>
-                    </a:lnB>
-                    <a:noFill/>
-                  </a:tcPr>
-                </a:tc>
-                <a:tc>
-                  <a:txBody>
-                    <a:bodyPr/>
-                    <a:lstStyle/>
-                    <a:p>
-                      <a:pPr rtl="0">
-                        <a:buNone/>
-                      </a:pPr>
-                      <a:r>
-                        <a:rPr lang="en-GB" sz="1400">
-                          <a:solidFill>
-                            <a:srgbClr val="1F1F1F"/>
-                          </a:solidFill>
-                          <a:effectLst/>
-                          <a:latin typeface="Times New Roman" panose="02020603050405020304" pitchFamily="18" charset="0"/>
-                          <a:cs typeface="Times New Roman" panose="02020603050405020304" pitchFamily="18" charset="0"/>
-                        </a:rPr>
-                        <a:t>Implementation of an NLP engine to parse text commands and update back-end database records.</a:t>
-                      </a:r>
-                    </a:p>
-                  </a:txBody>
-                  <a:tcPr marL="42785" marR="42785" marT="28524" marB="28524" anchor="ctr">
-                    <a:lnL w="12700" cap="flat" cmpd="sng" algn="ctr">
-                      <a:solidFill>
-                        <a:schemeClr val="tx1"/>
-                      </a:solidFill>
-                      <a:prstDash val="solid"/>
-                      <a:round/>
-                      <a:headEnd type="none" w="med" len="med"/>
-                      <a:tailEnd type="none" w="med" len="med"/>
-                    </a:lnL>
-                    <a:lnR w="12700" cap="flat" cmpd="sng" algn="ctr">
-                      <a:solidFill>
-                        <a:schemeClr val="tx1"/>
-                      </a:solidFill>
-                      <a:prstDash val="solid"/>
-                      <a:round/>
-                      <a:headEnd type="none" w="med" len="med"/>
-                      <a:tailEnd type="none" w="med" len="med"/>
-                    </a:lnR>
-                    <a:lnT w="12700" cap="flat" cmpd="sng" algn="ctr">
-                      <a:solidFill>
-                        <a:schemeClr val="tx1"/>
-                      </a:solidFill>
-                      <a:prstDash val="solid"/>
-                      <a:round/>
-                      <a:headEnd type="none" w="med" len="med"/>
-                      <a:tailEnd type="none" w="med" len="med"/>
-                    </a:lnT>
-                    <a:lnB w="12700" cap="flat" cmpd="sng" algn="ctr">
-                      <a:solidFill>
-                        <a:schemeClr val="tx1"/>
-                      </a:solidFill>
-                      <a:prstDash val="solid"/>
-                      <a:round/>
-                      <a:headEnd type="none" w="med" len="med"/>
-                      <a:tailEnd type="none" w="med" len="med"/>
-                    </a:lnB>
-                    <a:noFill/>
-                  </a:tcPr>
-                </a:tc>
-                <a:extLst>
-                  <a:ext uri="{0D108BD9-81ED-4DB2-BD59-A6C34878D82A}">
-                    <a16:rowId xmlns:a16="http://schemas.microsoft.com/office/drawing/2014/main" val="1554748664"/>
-                  </a:ext>
-                </a:extLst>
-              </a:tr>
-              <a:tr h="660397">
-                <a:tc>
-                  <a:txBody>
-                    <a:bodyPr/>
-                    <a:lstStyle/>
-                    <a:p>
-                      <a:pPr rtl="0">
-                        <a:buNone/>
-                      </a:pPr>
-                      <a:r>
-                        <a:rPr lang="en-GB" sz="1400" b="1">
-                          <a:solidFill>
-                            <a:srgbClr val="1F1F1F"/>
-                          </a:solidFill>
-                          <a:effectLst/>
-                          <a:latin typeface="Times New Roman" panose="02020603050405020304" pitchFamily="18" charset="0"/>
-                          <a:cs typeface="Times New Roman" panose="02020603050405020304" pitchFamily="18" charset="0"/>
-                        </a:rPr>
-                        <a:t>Key Findings</a:t>
-                      </a:r>
-                      <a:endParaRPr lang="en-GB" sz="1400">
-                        <a:solidFill>
-                          <a:srgbClr val="1F1F1F"/>
-                        </a:solidFill>
-                        <a:effectLst/>
-                        <a:latin typeface="Times New Roman" panose="02020603050405020304" pitchFamily="18" charset="0"/>
-                        <a:cs typeface="Times New Roman" panose="02020603050405020304" pitchFamily="18" charset="0"/>
-                      </a:endParaRPr>
-                    </a:p>
-                  </a:txBody>
-                  <a:tcPr marL="42785" marR="42785" marT="28524" marB="28524" anchor="ctr">
-                    <a:lnL w="12700" cap="flat" cmpd="sng" algn="ctr">
-                      <a:solidFill>
-                        <a:schemeClr val="tx1"/>
-                      </a:solidFill>
-                      <a:prstDash val="solid"/>
-                      <a:round/>
-                      <a:headEnd type="none" w="med" len="med"/>
-                      <a:tailEnd type="none" w="med" len="med"/>
-                    </a:lnL>
-                    <a:lnR w="12700" cap="flat" cmpd="sng" algn="ctr">
-                      <a:solidFill>
-                        <a:schemeClr val="tx1"/>
-                      </a:solidFill>
-                      <a:prstDash val="solid"/>
-                      <a:round/>
-                      <a:headEnd type="none" w="med" len="med"/>
-                      <a:tailEnd type="none" w="med" len="med"/>
-                    </a:lnR>
-                    <a:lnT w="12700" cap="flat" cmpd="sng" algn="ctr">
-                      <a:solidFill>
-                        <a:schemeClr val="tx1"/>
-                      </a:solidFill>
-                      <a:prstDash val="solid"/>
-                      <a:round/>
-                      <a:headEnd type="none" w="med" len="med"/>
-                      <a:tailEnd type="none" w="med" len="med"/>
-                    </a:lnT>
-                    <a:lnB w="12700" cap="flat" cmpd="sng" algn="ctr">
-                      <a:solidFill>
-                        <a:schemeClr val="tx1"/>
-                      </a:solidFill>
-                      <a:prstDash val="solid"/>
-                      <a:round/>
-                      <a:headEnd type="none" w="med" len="med"/>
-                      <a:tailEnd type="none" w="med" len="med"/>
-                    </a:lnB>
-                    <a:noFill/>
-                  </a:tcPr>
-                </a:tc>
-                <a:tc>
-                  <a:txBody>
-                    <a:bodyPr/>
-                    <a:lstStyle/>
-                    <a:p>
-                      <a:pPr rtl="0">
-                        <a:buNone/>
-                      </a:pPr>
-                      <a:r>
-                        <a:rPr lang="en-GB" sz="1400">
-                          <a:solidFill>
-                            <a:srgbClr val="1F1F1F"/>
-                          </a:solidFill>
-                          <a:effectLst/>
-                          <a:latin typeface="Times New Roman" panose="02020603050405020304" pitchFamily="18" charset="0"/>
-                          <a:cs typeface="Times New Roman" panose="02020603050405020304" pitchFamily="18" charset="0"/>
-                        </a:rPr>
-                        <a:t>Transactional chatbots significantly reduce the administrative workload for teachers compared to manual UI clicks.</a:t>
-                      </a:r>
-                    </a:p>
-                  </a:txBody>
-                  <a:tcPr marL="42785" marR="42785" marT="28524" marB="28524" anchor="ctr">
-                    <a:lnL w="12700" cap="flat" cmpd="sng" algn="ctr">
-                      <a:solidFill>
-                        <a:schemeClr val="tx1"/>
-                      </a:solidFill>
-                      <a:prstDash val="solid"/>
-                      <a:round/>
-                      <a:headEnd type="none" w="med" len="med"/>
-                      <a:tailEnd type="none" w="med" len="med"/>
-                    </a:lnL>
-                    <a:lnR w="12700" cap="flat" cmpd="sng" algn="ctr">
-                      <a:solidFill>
-                        <a:schemeClr val="tx1"/>
-                      </a:solidFill>
-                      <a:prstDash val="solid"/>
-                      <a:round/>
-                      <a:headEnd type="none" w="med" len="med"/>
-                      <a:tailEnd type="none" w="med" len="med"/>
-                    </a:lnR>
-                    <a:lnT w="12700" cap="flat" cmpd="sng" algn="ctr">
-                      <a:solidFill>
-                        <a:schemeClr val="tx1"/>
-                      </a:solidFill>
-                      <a:prstDash val="solid"/>
-                      <a:round/>
-                      <a:headEnd type="none" w="med" len="med"/>
-                      <a:tailEnd type="none" w="med" len="med"/>
-                    </a:lnT>
-                    <a:lnB w="12700" cap="flat" cmpd="sng" algn="ctr">
-                      <a:solidFill>
-                        <a:schemeClr val="tx1"/>
-                      </a:solidFill>
-                      <a:prstDash val="solid"/>
-                      <a:round/>
-                      <a:headEnd type="none" w="med" len="med"/>
-                      <a:tailEnd type="none" w="med" len="med"/>
-                    </a:lnB>
-                    <a:noFill/>
-                  </a:tcPr>
-                </a:tc>
-                <a:extLst>
-                  <a:ext uri="{0D108BD9-81ED-4DB2-BD59-A6C34878D82A}">
-                    <a16:rowId xmlns:a16="http://schemas.microsoft.com/office/drawing/2014/main" val="2794648615"/>
-                  </a:ext>
-                </a:extLst>
-              </a:tr>
-              <a:tr h="458279">
-                <a:tc>
-                  <a:txBody>
-                    <a:bodyPr/>
-                    <a:lstStyle/>
-                    <a:p>
-                      <a:pPr rtl="0">
-                        <a:buNone/>
-                      </a:pPr>
-                      <a:r>
-                        <a:rPr lang="en-GB" sz="1400" b="1">
-                          <a:solidFill>
-                            <a:srgbClr val="1F1F1F"/>
-                          </a:solidFill>
-                          <a:effectLst/>
-                          <a:latin typeface="Times New Roman" panose="02020603050405020304" pitchFamily="18" charset="0"/>
-                          <a:cs typeface="Times New Roman" panose="02020603050405020304" pitchFamily="18" charset="0"/>
-                        </a:rPr>
-                        <a:t>Strengths</a:t>
-                      </a:r>
-                      <a:endParaRPr lang="en-GB" sz="1400">
-                        <a:solidFill>
-                          <a:srgbClr val="1F1F1F"/>
-                        </a:solidFill>
-                        <a:effectLst/>
-                        <a:latin typeface="Times New Roman" panose="02020603050405020304" pitchFamily="18" charset="0"/>
-                        <a:cs typeface="Times New Roman" panose="02020603050405020304" pitchFamily="18" charset="0"/>
-                      </a:endParaRPr>
-                    </a:p>
-                  </a:txBody>
-                  <a:tcPr marL="42785" marR="42785" marT="28524" marB="28524" anchor="ctr">
-                    <a:lnL w="12700" cap="flat" cmpd="sng" algn="ctr">
-                      <a:solidFill>
-                        <a:schemeClr val="tx1"/>
-                      </a:solidFill>
-                      <a:prstDash val="solid"/>
-                      <a:round/>
-                      <a:headEnd type="none" w="med" len="med"/>
-                      <a:tailEnd type="none" w="med" len="med"/>
-                    </a:lnL>
-                    <a:lnR w="12700" cap="flat" cmpd="sng" algn="ctr">
-                      <a:solidFill>
-                        <a:schemeClr val="tx1"/>
-                      </a:solidFill>
-                      <a:prstDash val="solid"/>
-                      <a:round/>
-                      <a:headEnd type="none" w="med" len="med"/>
-                      <a:tailEnd type="none" w="med" len="med"/>
-                    </a:lnR>
-                    <a:lnT w="12700" cap="flat" cmpd="sng" algn="ctr">
-                      <a:solidFill>
-                        <a:schemeClr val="tx1"/>
-                      </a:solidFill>
-                      <a:prstDash val="solid"/>
-                      <a:round/>
-                      <a:headEnd type="none" w="med" len="med"/>
-                      <a:tailEnd type="none" w="med" len="med"/>
-                    </a:lnT>
-                    <a:lnB w="12700" cap="flat" cmpd="sng" algn="ctr">
-                      <a:solidFill>
-                        <a:schemeClr val="tx1"/>
-                      </a:solidFill>
-                      <a:prstDash val="solid"/>
-                      <a:round/>
-                      <a:headEnd type="none" w="med" len="med"/>
-                      <a:tailEnd type="none" w="med" len="med"/>
-                    </a:lnB>
-                    <a:noFill/>
-                  </a:tcPr>
-                </a:tc>
-                <a:tc>
-                  <a:txBody>
-                    <a:bodyPr/>
-                    <a:lstStyle/>
-                    <a:p>
-                      <a:pPr rtl="0">
-                        <a:buNone/>
-                      </a:pPr>
-                      <a:r>
-                        <a:rPr lang="en-GB" sz="1400">
-                          <a:solidFill>
-                            <a:srgbClr val="1F1F1F"/>
-                          </a:solidFill>
-                          <a:effectLst/>
-                          <a:latin typeface="Times New Roman" panose="02020603050405020304" pitchFamily="18" charset="0"/>
-                          <a:cs typeface="Times New Roman" panose="02020603050405020304" pitchFamily="18" charset="0"/>
-                        </a:rPr>
-                        <a:t>Allows for hands-free or text-based updates to institutional records.</a:t>
-                      </a:r>
-                    </a:p>
-                  </a:txBody>
-                  <a:tcPr marL="42785" marR="42785" marT="28524" marB="28524" anchor="ctr">
-                    <a:lnL w="12700" cap="flat" cmpd="sng" algn="ctr">
-                      <a:solidFill>
-                        <a:schemeClr val="tx1"/>
-                      </a:solidFill>
-                      <a:prstDash val="solid"/>
-                      <a:round/>
-                      <a:headEnd type="none" w="med" len="med"/>
-                      <a:tailEnd type="none" w="med" len="med"/>
-                    </a:lnL>
-                    <a:lnR w="12700" cap="flat" cmpd="sng" algn="ctr">
-                      <a:solidFill>
-                        <a:schemeClr val="tx1"/>
-                      </a:solidFill>
-                      <a:prstDash val="solid"/>
-                      <a:round/>
-                      <a:headEnd type="none" w="med" len="med"/>
-                      <a:tailEnd type="none" w="med" len="med"/>
-                    </a:lnR>
-                    <a:lnT w="12700" cap="flat" cmpd="sng" algn="ctr">
-                      <a:solidFill>
-                        <a:schemeClr val="tx1"/>
-                      </a:solidFill>
-                      <a:prstDash val="solid"/>
-                      <a:round/>
-                      <a:headEnd type="none" w="med" len="med"/>
-                      <a:tailEnd type="none" w="med" len="med"/>
-                    </a:lnT>
-                    <a:lnB w="12700" cap="flat" cmpd="sng" algn="ctr">
-                      <a:solidFill>
-                        <a:schemeClr val="tx1"/>
-                      </a:solidFill>
-                      <a:prstDash val="solid"/>
-                      <a:round/>
-                      <a:headEnd type="none" w="med" len="med"/>
-                      <a:tailEnd type="none" w="med" len="med"/>
-                    </a:lnB>
-                    <a:noFill/>
-                  </a:tcPr>
-                </a:tc>
-                <a:extLst>
-                  <a:ext uri="{0D108BD9-81ED-4DB2-BD59-A6C34878D82A}">
-                    <a16:rowId xmlns:a16="http://schemas.microsoft.com/office/drawing/2014/main" val="1528966512"/>
-                  </a:ext>
-                </a:extLst>
-              </a:tr>
-              <a:tr h="491778">
-                <a:tc>
-                  <a:txBody>
-                    <a:bodyPr/>
-                    <a:lstStyle/>
-                    <a:p>
-                      <a:pPr rtl="0">
-                        <a:buNone/>
-                      </a:pPr>
-                      <a:r>
-                        <a:rPr lang="en-GB" sz="1400" b="1">
-                          <a:solidFill>
-                            <a:srgbClr val="1F1F1F"/>
-                          </a:solidFill>
-                          <a:effectLst/>
-                          <a:latin typeface="Times New Roman" panose="02020603050405020304" pitchFamily="18" charset="0"/>
-                          <a:cs typeface="Times New Roman" panose="02020603050405020304" pitchFamily="18" charset="0"/>
-                        </a:rPr>
-                        <a:t>Limitations / Gaps</a:t>
-                      </a:r>
-                      <a:endParaRPr lang="en-GB" sz="1400">
-                        <a:solidFill>
-                          <a:srgbClr val="1F1F1F"/>
-                        </a:solidFill>
-                        <a:effectLst/>
-                        <a:latin typeface="Times New Roman" panose="02020603050405020304" pitchFamily="18" charset="0"/>
-                        <a:cs typeface="Times New Roman" panose="02020603050405020304" pitchFamily="18" charset="0"/>
-                      </a:endParaRPr>
-                    </a:p>
-                  </a:txBody>
-                  <a:tcPr marL="42785" marR="42785" marT="28524" marB="28524" anchor="ctr">
-                    <a:lnL w="12700" cap="flat" cmpd="sng" algn="ctr">
-                      <a:solidFill>
-                        <a:schemeClr val="tx1"/>
-                      </a:solidFill>
-                      <a:prstDash val="solid"/>
-                      <a:round/>
-                      <a:headEnd type="none" w="med" len="med"/>
-                      <a:tailEnd type="none" w="med" len="med"/>
-                    </a:lnL>
-                    <a:lnR w="12700" cap="flat" cmpd="sng" algn="ctr">
-                      <a:solidFill>
-                        <a:schemeClr val="tx1"/>
-                      </a:solidFill>
-                      <a:prstDash val="solid"/>
-                      <a:round/>
-                      <a:headEnd type="none" w="med" len="med"/>
-                      <a:tailEnd type="none" w="med" len="med"/>
-                    </a:lnR>
-                    <a:lnT w="12700" cap="flat" cmpd="sng" algn="ctr">
-                      <a:solidFill>
-                        <a:schemeClr val="tx1"/>
-                      </a:solidFill>
-                      <a:prstDash val="solid"/>
-                      <a:round/>
-                      <a:headEnd type="none" w="med" len="med"/>
-                      <a:tailEnd type="none" w="med" len="med"/>
-                    </a:lnT>
-                    <a:lnB w="12700" cap="flat" cmpd="sng" algn="ctr">
-                      <a:solidFill>
-                        <a:schemeClr val="tx1"/>
-                      </a:solidFill>
-                      <a:prstDash val="solid"/>
-                      <a:round/>
-                      <a:headEnd type="none" w="med" len="med"/>
-                      <a:tailEnd type="none" w="med" len="med"/>
-                    </a:lnB>
-                    <a:noFill/>
-                  </a:tcPr>
-                </a:tc>
-                <a:tc>
-                  <a:txBody>
-                    <a:bodyPr/>
-                    <a:lstStyle/>
-                    <a:p>
-                      <a:pPr rtl="0">
-                        <a:buNone/>
-                      </a:pPr>
-                      <a:r>
-                        <a:rPr lang="en-GB" sz="1400" dirty="0">
-                          <a:solidFill>
-                            <a:srgbClr val="1F1F1F"/>
-                          </a:solidFill>
-                          <a:effectLst/>
-                          <a:latin typeface="Times New Roman" panose="02020603050405020304" pitchFamily="18" charset="0"/>
-                          <a:cs typeface="Times New Roman" panose="02020603050405020304" pitchFamily="18" charset="0"/>
-                        </a:rPr>
-                        <a:t>Often lacks integration with gamification elements or broader student performance metrics.</a:t>
-                      </a:r>
-                    </a:p>
-                  </a:txBody>
-                  <a:tcPr marL="42785" marR="42785" marT="28524" marB="28524" anchor="ctr">
-                    <a:lnL w="12700" cap="flat" cmpd="sng" algn="ctr">
-                      <a:solidFill>
-                        <a:schemeClr val="tx1"/>
-                      </a:solidFill>
-                      <a:prstDash val="solid"/>
-                      <a:round/>
-                      <a:headEnd type="none" w="med" len="med"/>
-                      <a:tailEnd type="none" w="med" len="med"/>
-                    </a:lnL>
-                    <a:lnR w="12700" cap="flat" cmpd="sng" algn="ctr">
-                      <a:solidFill>
-                        <a:schemeClr val="tx1"/>
-                      </a:solidFill>
-                      <a:prstDash val="solid"/>
-                      <a:round/>
-                      <a:headEnd type="none" w="med" len="med"/>
-                      <a:tailEnd type="none" w="med" len="med"/>
-                    </a:lnR>
-                    <a:lnT w="12700" cap="flat" cmpd="sng" algn="ctr">
-                      <a:solidFill>
-                        <a:schemeClr val="tx1"/>
-                      </a:solidFill>
-                      <a:prstDash val="solid"/>
-                      <a:round/>
-                      <a:headEnd type="none" w="med" len="med"/>
-                      <a:tailEnd type="none" w="med" len="med"/>
-                    </a:lnT>
-                    <a:lnB w="12700" cap="flat" cmpd="sng" algn="ctr">
-                      <a:solidFill>
-                        <a:schemeClr val="tx1"/>
-                      </a:solidFill>
-                      <a:prstDash val="solid"/>
-                      <a:round/>
-                      <a:headEnd type="none" w="med" len="med"/>
-                      <a:tailEnd type="none" w="med" len="med"/>
-                    </a:lnB>
-                    <a:noFill/>
-                  </a:tcPr>
-                </a:tc>
-                <a:extLst>
-                  <a:ext uri="{0D108BD9-81ED-4DB2-BD59-A6C34878D82A}">
-                    <a16:rowId xmlns:a16="http://schemas.microsoft.com/office/drawing/2014/main" val="1152483679"/>
-                  </a:ext>
-                </a:extLst>
-              </a:tr>
-            </a:tbl>
-          </a:graphicData>
-        </a:graphic>
-      </p:graphicFrame>
-    </p:spTree>
-    <p:extLst>
-      <p:ext uri="{BB962C8B-B14F-4D97-AF65-F5344CB8AC3E}">
-        <p14:creationId xmlns:p14="http://schemas.microsoft.com/office/powerpoint/2010/main" val="4259835638"/>
-      </p:ext>
-    </p:extLst>
-  </p:cSld>
-  <p:clrMapOvr>
-    <a:masterClrMapping/>
-  </p:clrMapOvr>
-  <p:transition>
-    <p:fade/>
-  </p:transition>
-</p:sld>
-</file>
-
-<file path=ppt/slides/slide11.xml><?xml version="1.0" encoding="utf-8"?>
-<p:sld xmlns:a="http://schemas.openxmlformats.org/drawingml/2006/main" xmlns:r="http://schemas.openxmlformats.org/officeDocument/2006/relationships" xmlns:p="http://schemas.openxmlformats.org/presentationml/2006/main">
-  <p:cSld>
-    <p:spTree>
-      <p:nvGrpSpPr>
-        <p:cNvPr id="1" name="">
-          <a:extLst>
-            <a:ext uri="{FF2B5EF4-FFF2-40B4-BE49-F238E27FC236}">
-              <a16:creationId xmlns:a16="http://schemas.microsoft.com/office/drawing/2014/main" id="{8D60386E-2981-D846-891F-47753E9B1B50}"/>
-            </a:ext>
-          </a:extLst>
-        </p:cNvPr>
-        <p:cNvGrpSpPr/>
-        <p:nvPr/>
-      </p:nvGrpSpPr>
-      <p:grpSpPr>
-        <a:xfrm>
-          <a:off x="0" y="0"/>
-          <a:ext cx="0" cy="0"/>
-          <a:chOff x="0" y="0"/>
-          <a:chExt cx="0" cy="0"/>
-        </a:xfrm>
-      </p:grpSpPr>
-      <p:sp>
-        <p:nvSpPr>
-          <p:cNvPr id="2" name="Slide Number Placeholder 1">
-            <a:extLst>
-              <a:ext uri="{FF2B5EF4-FFF2-40B4-BE49-F238E27FC236}">
-                <a16:creationId xmlns:a16="http://schemas.microsoft.com/office/drawing/2014/main" id="{EFE9990F-A393-E243-8750-136F2C509384}"/>
-              </a:ext>
-            </a:extLst>
-          </p:cNvPr>
-          <p:cNvSpPr>
-            <a:spLocks noGrp="1"/>
-          </p:cNvSpPr>
-          <p:nvPr>
-            <p:ph type="sldNum" sz="quarter" idx="4"/>
-          </p:nvPr>
-        </p:nvSpPr>
-        <p:spPr>
-          <a:xfrm>
-            <a:off x="8629650" y="4817444"/>
-            <a:ext cx="514350" cy="326056"/>
-          </a:xfrm>
-        </p:spPr>
-        <p:txBody>
-          <a:bodyPr/>
-          <a:lstStyle/>
-          <a:p>
-            <a:fld id="{4B327F5A-7D8F-4012-9A1A-2197D74A174F}" type="slidenum">
-              <a:rPr lang="en-IN" smtClean="0"/>
-              <a:pPr/>
-              <a:t>11</a:t>
-            </a:fld>
-            <a:endParaRPr lang="en-IN" dirty="0"/>
-          </a:p>
-        </p:txBody>
-      </p:sp>
-      <p:sp>
-        <p:nvSpPr>
-          <p:cNvPr id="3" name="object 2">
-            <a:extLst>
-              <a:ext uri="{FF2B5EF4-FFF2-40B4-BE49-F238E27FC236}">
-                <a16:creationId xmlns:a16="http://schemas.microsoft.com/office/drawing/2014/main" id="{41766BEC-53CD-27A7-3543-90C220B1EA88}"/>
+                <a16:creationId xmlns:a16="http://schemas.microsoft.com/office/drawing/2014/main" id="{A94F5027-CBF8-4E1C-A503-4C50C325358D}"/>
               </a:ext>
             </a:extLst>
           </p:cNvPr>
@@ -7647,7 +6337,21 @@
                 <a:latin typeface="Times New Roman" panose="02020603050405020304" pitchFamily="18" charset="0"/>
                 <a:cs typeface="Times New Roman" panose="02020603050405020304" pitchFamily="18" charset="0"/>
               </a:rPr>
-              <a:t>Literature Review: Paper 8</a:t>
+              <a:t>Literature Review: </a:t>
+            </a:r>
+            <a:r>
+              <a:rPr lang="en-US" spc="-30" dirty="0" err="1">
+                <a:latin typeface="Times New Roman" panose="02020603050405020304" pitchFamily="18" charset="0"/>
+                <a:cs typeface="Times New Roman" panose="02020603050405020304" pitchFamily="18" charset="0"/>
+              </a:rPr>
+              <a:t>Comparitive</a:t>
+            </a:r>
+            <a:r>
+              <a:rPr lang="en-US" spc="-30" dirty="0">
+                <a:latin typeface="Times New Roman" panose="02020603050405020304" pitchFamily="18" charset="0"/>
+                <a:cs typeface="Times New Roman" panose="02020603050405020304" pitchFamily="18" charset="0"/>
+              </a:rPr>
+              <a:t> Analysis</a:t>
             </a:r>
           </a:p>
         </p:txBody>
@@ -7657,7 +6361,7 @@
           <p:cNvPr id="4" name="Table 3">
             <a:extLst>
               <a:ext uri="{FF2B5EF4-FFF2-40B4-BE49-F238E27FC236}">
-                <a16:creationId xmlns:a16="http://schemas.microsoft.com/office/drawing/2014/main" id="{243093AE-00BA-88B6-D63B-9AA09754533F}"/>
+                <a16:creationId xmlns:a16="http://schemas.microsoft.com/office/drawing/2014/main" id="{38153D6D-D442-ABF6-B547-77945D4FAC4A}"/>
               </a:ext>
             </a:extLst>
           </p:cNvPr>
@@ -7667,36 +6371,43 @@
           <p:nvPr>
             <p:extLst>
               <p:ext uri="{D42A27DB-BD31-4B8C-83A1-F6EECF244321}">
-                <p14:modId xmlns:p14="http://schemas.microsoft.com/office/powerpoint/2010/main" val="2292833705"/>
+                <p14:modId xmlns:p14="http://schemas.microsoft.com/office/powerpoint/2010/main" val="2422652013"/>
               </p:ext>
             </p:extLst>
           </p:nvPr>
         </p:nvGraphicFramePr>
         <p:xfrm>
-          <a:off x="181388" y="1300457"/>
-          <a:ext cx="8058151" cy="3296975"/>
+          <a:off x="178903" y="1277039"/>
+          <a:ext cx="8150087" cy="3288350"/>
         </p:xfrm>
         <a:graphic>
           <a:graphicData uri="http://schemas.openxmlformats.org/drawingml/2006/table">
             <a:tbl>
-              <a:tblPr/>
+              <a:tblPr lastCol="1"/>
               <a:tblGrid>
-                <a:gridCol w="2215992">
+                <a:gridCol w="1788830">
                   <a:extLst>
                     <a:ext uri="{9D8B030D-6E8A-4147-A177-3AD203B41FA5}">
-                      <a16:colId xmlns:a16="http://schemas.microsoft.com/office/drawing/2014/main" val="3866648498"/>
+                      <a16:colId xmlns:a16="http://schemas.microsoft.com/office/drawing/2014/main" val="660374795"/>
                     </a:ext>
                   </a:extLst>
                 </a:gridCol>
-                <a:gridCol w="5842159">
+                <a:gridCol w="3492454">
                   <a:extLst>
                     <a:ext uri="{9D8B030D-6E8A-4147-A177-3AD203B41FA5}">
-                      <a16:colId xmlns:a16="http://schemas.microsoft.com/office/drawing/2014/main" val="3691921731"/>
+                      <a16:colId xmlns:a16="http://schemas.microsoft.com/office/drawing/2014/main" val="2499190507"/>
+                    </a:ext>
+                  </a:extLst>
+                </a:gridCol>
+                <a:gridCol w="2868803">
+                  <a:extLst>
+                    <a:ext uri="{9D8B030D-6E8A-4147-A177-3AD203B41FA5}">
+                      <a16:colId xmlns:a16="http://schemas.microsoft.com/office/drawing/2014/main" val="654812552"/>
                     </a:ext>
                   </a:extLst>
                 </a:gridCol>
               </a:tblGrid>
-              <a:tr h="251616">
+              <a:tr h="243430">
                 <a:tc>
                   <a:txBody>
                     <a:bodyPr/>
@@ -7706,7 +6417,7 @@
                         <a:buNone/>
                       </a:pPr>
                       <a:r>
-                        <a:rPr lang="en-GB" sz="1400" b="1">
+                        <a:rPr lang="en-GB" sz="1200" b="1">
                           <a:solidFill>
                             <a:srgbClr val="1F1F1F"/>
                           </a:solidFill>
@@ -7714,9 +6425,9 @@
                           <a:latin typeface="Times New Roman" panose="02020603050405020304" pitchFamily="18" charset="0"/>
                           <a:cs typeface="Times New Roman" panose="02020603050405020304" pitchFamily="18" charset="0"/>
                         </a:rPr>
-                        <a:t>Aspect</a:t>
+                        <a:t>Research Paper</a:t>
                       </a:r>
-                      <a:endParaRPr lang="en-GB" sz="1400">
+                      <a:endParaRPr lang="en-GB" sz="1200">
                         <a:solidFill>
                           <a:srgbClr val="1F1F1F"/>
                         </a:solidFill>
@@ -7726,7 +6437,7 @@
                       </a:endParaRPr>
                     </a:p>
                   </a:txBody>
-                  <a:tcPr marL="40804" marR="40804" marT="27203" marB="27203" anchor="ctr">
+                  <a:tcPr marL="22047" marR="22047" marT="14698" marB="14698" anchor="ctr">
                     <a:lnL w="12700" cap="flat" cmpd="sng" algn="ctr">
                       <a:solidFill>
                         <a:schemeClr val="tx1"/>
@@ -7775,7 +6486,7 @@
                         <a:buNone/>
                       </a:pPr>
                       <a:r>
-                        <a:rPr lang="en-GB" sz="1400" b="1">
+                        <a:rPr lang="en-GB" sz="1200" b="1" dirty="0">
                           <a:solidFill>
                             <a:srgbClr val="1F1F1F"/>
                           </a:solidFill>
@@ -7783,9 +6494,9 @@
                           <a:latin typeface="Times New Roman" panose="02020603050405020304" pitchFamily="18" charset="0"/>
                           <a:cs typeface="Times New Roman" panose="02020603050405020304" pitchFamily="18" charset="0"/>
                         </a:rPr>
-                        <a:t>Details</a:t>
+                        <a:t>Identified Gap</a:t>
                       </a:r>
-                      <a:endParaRPr lang="en-GB" sz="1400">
+                      <a:endParaRPr lang="en-GB" sz="1200" dirty="0">
                         <a:solidFill>
                           <a:srgbClr val="1F1F1F"/>
                         </a:solidFill>
@@ -7795,83 +6506,7 @@
                       </a:endParaRPr>
                     </a:p>
                   </a:txBody>
-                  <a:tcPr marL="40804" marR="40804" marT="27203" marB="27203" anchor="ctr">
-                    <a:lnL w="12700" cap="flat" cmpd="sng" algn="ctr">
-                      <a:solidFill>
-                        <a:schemeClr val="tx1"/>
-                      </a:solidFill>
-                      <a:prstDash val="solid"/>
-                      <a:round/>
-                      <a:headEnd type="none" w="med" len="med"/>
-                      <a:tailEnd type="none" w="med" len="med"/>
-                    </a:lnL>
-                    <a:lnR w="12700" cap="flat" cmpd="sng" algn="ctr">
-                      <a:solidFill>
-                        <a:schemeClr val="tx1"/>
-                      </a:solidFill>
-                      <a:prstDash val="solid"/>
-                      <a:round/>
-                      <a:headEnd type="none" w="med" len="med"/>
-                      <a:tailEnd type="none" w="med" len="med"/>
-                    </a:lnR>
-                    <a:lnT w="12700" cap="flat" cmpd="sng" algn="ctr">
-                      <a:solidFill>
-                        <a:schemeClr val="tx1"/>
-                      </a:solidFill>
-                      <a:prstDash val="solid"/>
-                      <a:round/>
-                      <a:headEnd type="none" w="med" len="med"/>
-                      <a:tailEnd type="none" w="med" len="med"/>
-                    </a:lnT>
-                    <a:lnB w="12700" cap="flat" cmpd="sng" algn="ctr">
-                      <a:solidFill>
-                        <a:schemeClr val="tx1"/>
-                      </a:solidFill>
-                      <a:prstDash val="solid"/>
-                      <a:round/>
-                      <a:headEnd type="none" w="med" len="med"/>
-                      <a:tailEnd type="none" w="med" len="med"/>
-                    </a:lnB>
-                    <a:noFill/>
-                  </a:tcPr>
-                </a:tc>
-                <a:extLst>
-                  <a:ext uri="{0D108BD9-81ED-4DB2-BD59-A6C34878D82A}">
-                    <a16:rowId xmlns:a16="http://schemas.microsoft.com/office/drawing/2014/main" val="2105178078"/>
-                  </a:ext>
-                </a:extLst>
-              </a:tr>
-              <a:tr h="452107">
-                <a:tc>
-                  <a:txBody>
-                    <a:bodyPr/>
-                    <a:lstStyle/>
-                    <a:p>
-                      <a:pPr rtl="0">
-                        <a:buNone/>
-                      </a:pPr>
-                      <a:r>
-                        <a:rPr lang="en-GB" sz="1400" b="1">
-                          <a:solidFill>
-                            <a:srgbClr val="1F1F1F"/>
-                          </a:solidFill>
-                          <a:effectLst/>
-                          <a:latin typeface="Times New Roman" panose="02020603050405020304" pitchFamily="18" charset="0"/>
-                          <a:cs typeface="Times New Roman" panose="02020603050405020304" pitchFamily="18" charset="0"/>
-                        </a:rPr>
-                        <a:t>Title</a:t>
-                      </a:r>
-                      <a:endParaRPr lang="en-GB" sz="1400">
-                        <a:solidFill>
-                          <a:srgbClr val="1F1F1F"/>
-                        </a:solidFill>
-                        <a:effectLst/>
-                        <a:latin typeface="Times New Roman" panose="02020603050405020304" pitchFamily="18" charset="0"/>
-                        <a:cs typeface="Times New Roman" panose="02020603050405020304" pitchFamily="18" charset="0"/>
-                      </a:endParaRPr>
-                    </a:p>
-                  </a:txBody>
-                  <a:tcPr marL="40804" marR="40804" marT="27203" marB="27203" anchor="ctr">
+                  <a:tcPr marL="22047" marR="22047" marT="14698" marB="14698" anchor="ctr">
                     <a:lnL w="12700" cap="flat" cmpd="sng" algn="ctr">
                       <a:solidFill>
                         <a:schemeClr val="tx1"/>
@@ -7920,7 +6555,7 @@
                         <a:buNone/>
                       </a:pPr>
                       <a:r>
-                        <a:rPr lang="en-GB" sz="1400">
+                        <a:rPr lang="en-GB" sz="1200" b="1">
                           <a:solidFill>
                             <a:srgbClr val="1F1F1F"/>
                           </a:solidFill>
@@ -7928,11 +6563,19 @@
                           <a:latin typeface="Times New Roman" panose="02020603050405020304" pitchFamily="18" charset="0"/>
                           <a:cs typeface="Times New Roman" panose="02020603050405020304" pitchFamily="18" charset="0"/>
                         </a:rPr>
-                        <a:t>A Cloud-Based Chatbot for Student Records and Academic Assistance</a:t>
+                        <a:t>How Your Project Overcomes It</a:t>
                       </a:r>
+                      <a:endParaRPr lang="en-GB" sz="1200">
+                        <a:solidFill>
+                          <a:srgbClr val="1F1F1F"/>
+                        </a:solidFill>
+                        <a:effectLst/>
+                        <a:latin typeface="Times New Roman" panose="02020603050405020304" pitchFamily="18" charset="0"/>
+                        <a:cs typeface="Times New Roman" panose="02020603050405020304" pitchFamily="18" charset="0"/>
+                      </a:endParaRPr>
                     </a:p>
                   </a:txBody>
-                  <a:tcPr marL="40804" marR="40804" marT="27203" marB="27203" anchor="ctr">
+                  <a:tcPr marL="22047" marR="22047" marT="14698" marB="14698" anchor="ctr">
                     <a:lnL w="12700" cap="flat" cmpd="sng" algn="ctr">
                       <a:solidFill>
                         <a:schemeClr val="tx1"/>
@@ -7974,11 +6617,11 @@
                 </a:tc>
                 <a:extLst>
                   <a:ext uri="{0D108BD9-81ED-4DB2-BD59-A6C34878D82A}">
-                    <a16:rowId xmlns:a16="http://schemas.microsoft.com/office/drawing/2014/main" val="875562681"/>
+                    <a16:rowId xmlns:a16="http://schemas.microsoft.com/office/drawing/2014/main" val="2958437566"/>
                   </a:ext>
                 </a:extLst>
               </a:tr>
-              <a:tr h="465227">
+              <a:tr h="551523">
                 <a:tc>
                   <a:txBody>
                     <a:bodyPr/>
@@ -7988,7 +6631,7 @@
                         <a:buNone/>
                       </a:pPr>
                       <a:r>
-                        <a:rPr lang="en-GB" sz="1400" b="1">
+                        <a:rPr lang="fr-FR" sz="1200" b="1" dirty="0">
                           <a:solidFill>
                             <a:srgbClr val="1F1F1F"/>
                           </a:solidFill>
@@ -7996,9 +6639,9 @@
                           <a:latin typeface="Times New Roman" panose="02020603050405020304" pitchFamily="18" charset="0"/>
                           <a:cs typeface="Times New Roman" panose="02020603050405020304" pitchFamily="18" charset="0"/>
                         </a:rPr>
-                        <a:t>Objective</a:t>
+                        <a:t>Paper 1 &amp; 4 (QR Attendance)</a:t>
                       </a:r>
-                      <a:endParaRPr lang="en-GB" sz="1400">
+                      <a:endParaRPr lang="fr-FR" sz="1200" dirty="0">
                         <a:solidFill>
                           <a:srgbClr val="1F1F1F"/>
                         </a:solidFill>
@@ -8008,7 +6651,7 @@
                       </a:endParaRPr>
                     </a:p>
                   </a:txBody>
-                  <a:tcPr marL="40804" marR="40804" marT="27203" marB="27203" anchor="ctr">
+                  <a:tcPr marL="22047" marR="22047" marT="14698" marB="14698" anchor="ctr">
                     <a:lnL w="12700" cap="flat" cmpd="sng" algn="ctr">
                       <a:solidFill>
                         <a:schemeClr val="tx1"/>
@@ -8057,7 +6700,7 @@
                         <a:buNone/>
                       </a:pPr>
                       <a:r>
-                        <a:rPr lang="en-GB" sz="1400">
+                        <a:rPr lang="en-GB" sz="1200" b="1" dirty="0">
                           <a:solidFill>
                             <a:srgbClr val="1F1F1F"/>
                           </a:solidFill>
@@ -8065,67 +6708,10 @@
                           <a:latin typeface="Times New Roman" panose="02020603050405020304" pitchFamily="18" charset="0"/>
                           <a:cs typeface="Times New Roman" panose="02020603050405020304" pitchFamily="18" charset="0"/>
                         </a:rPr>
-                        <a:t>To provide students with a 24/7 assistant for checking schedules, grades, and taking mock quizzes.</a:t>
+                        <a:t>Single-Mode Reliance:</a:t>
                       </a:r>
-                    </a:p>
-                  </a:txBody>
-                  <a:tcPr marL="40804" marR="40804" marT="27203" marB="27203" anchor="ctr">
-                    <a:lnL w="12700" cap="flat" cmpd="sng" algn="ctr">
-                      <a:solidFill>
-                        <a:schemeClr val="tx1"/>
-                      </a:solidFill>
-                      <a:prstDash val="solid"/>
-                      <a:round/>
-                      <a:headEnd type="none" w="med" len="med"/>
-                      <a:tailEnd type="none" w="med" len="med"/>
-                    </a:lnL>
-                    <a:lnR w="12700" cap="flat" cmpd="sng" algn="ctr">
-                      <a:solidFill>
-                        <a:schemeClr val="tx1"/>
-                      </a:solidFill>
-                      <a:prstDash val="solid"/>
-                      <a:round/>
-                      <a:headEnd type="none" w="med" len="med"/>
-                      <a:tailEnd type="none" w="med" len="med"/>
-                    </a:lnR>
-                    <a:lnT w="12700" cap="flat" cmpd="sng" algn="ctr">
-                      <a:solidFill>
-                        <a:schemeClr val="tx1"/>
-                      </a:solidFill>
-                      <a:prstDash val="solid"/>
-                      <a:round/>
-                      <a:headEnd type="none" w="med" len="med"/>
-                      <a:tailEnd type="none" w="med" len="med"/>
-                    </a:lnT>
-                    <a:lnB w="12700" cap="flat" cmpd="sng" algn="ctr">
-                      <a:solidFill>
-                        <a:schemeClr val="tx1"/>
-                      </a:solidFill>
-                      <a:prstDash val="solid"/>
-                      <a:round/>
-                      <a:headEnd type="none" w="med" len="med"/>
-                      <a:tailEnd type="none" w="med" len="med"/>
-                    </a:lnB>
-                    <a:noFill/>
-                  </a:tcPr>
-                </a:tc>
-                <a:extLst>
-                  <a:ext uri="{0D108BD9-81ED-4DB2-BD59-A6C34878D82A}">
-                    <a16:rowId xmlns:a16="http://schemas.microsoft.com/office/drawing/2014/main" val="811008070"/>
-                  </a:ext>
-                </a:extLst>
-              </a:tr>
-              <a:tr h="652598">
-                <a:tc>
-                  <a:txBody>
-                    <a:bodyPr/>
-                    <a:lstStyle/>
-                    <a:p>
-                      <a:pPr rtl="0">
-                        <a:buNone/>
-                      </a:pPr>
                       <a:r>
-                        <a:rPr lang="en-GB" sz="1400" b="1">
+                        <a:rPr lang="en-GB" sz="1200" dirty="0">
                           <a:solidFill>
                             <a:srgbClr val="1F1F1F"/>
                           </a:solidFill>
@@ -8133,19 +6719,11 @@
                           <a:latin typeface="Times New Roman" panose="02020603050405020304" pitchFamily="18" charset="0"/>
                           <a:cs typeface="Times New Roman" panose="02020603050405020304" pitchFamily="18" charset="0"/>
                         </a:rPr>
-                        <a:t>Methodology</a:t>
+                        <a:t> Systems fail if a student’s camera breaks or QR fails to load.</a:t>
                       </a:r>
-                      <a:endParaRPr lang="en-GB" sz="1400">
-                        <a:solidFill>
-                          <a:srgbClr val="1F1F1F"/>
-                        </a:solidFill>
-                        <a:effectLst/>
-                        <a:latin typeface="Times New Roman" panose="02020603050405020304" pitchFamily="18" charset="0"/>
-                        <a:cs typeface="Times New Roman" panose="02020603050405020304" pitchFamily="18" charset="0"/>
-                      </a:endParaRPr>
                     </a:p>
                   </a:txBody>
-                  <a:tcPr marL="40804" marR="40804" marT="27203" marB="27203" anchor="ctr">
+                  <a:tcPr marL="22047" marR="22047" marT="14698" marB="14698" anchor="ctr">
                     <a:lnL w="12700" cap="flat" cmpd="sng" algn="ctr">
                       <a:solidFill>
                         <a:schemeClr val="tx1"/>
@@ -8194,7 +6772,7 @@
                         <a:buNone/>
                       </a:pPr>
                       <a:r>
-                        <a:rPr lang="en-GB" sz="1400" dirty="0">
+                        <a:rPr lang="en-GB" sz="1200" b="1">
                           <a:solidFill>
                             <a:srgbClr val="1F1F1F"/>
                           </a:solidFill>
@@ -8202,11 +6780,22 @@
                           <a:latin typeface="Times New Roman" panose="02020603050405020304" pitchFamily="18" charset="0"/>
                           <a:cs typeface="Times New Roman" panose="02020603050405020304" pitchFamily="18" charset="0"/>
                         </a:rPr>
-                        <a:t>Using NLP and K-NN algorithms to categorize student queries and provide automated responses or mock test evaluations.</a:t>
+                        <a:t>Dual-Mode System:</a:t>
+                      </a:r>
+                      <a:r>
+                        <a:rPr lang="en-GB" sz="1200">
+                          <a:solidFill>
+                            <a:srgbClr val="1F1F1F"/>
+                          </a:solidFill>
+                          <a:effectLst/>
+                          <a:latin typeface="Times New Roman" panose="02020603050405020304" pitchFamily="18" charset="0"/>
+                          <a:cs typeface="Times New Roman" panose="02020603050405020304" pitchFamily="18" charset="0"/>
+                        </a:rPr>
+                        <a:t> You provide QR scanning AND manual roll-call backup for Faculty.</a:t>
                       </a:r>
                     </a:p>
                   </a:txBody>
-                  <a:tcPr marL="40804" marR="40804" marT="27203" marB="27203" anchor="ctr">
+                  <a:tcPr marL="22047" marR="22047" marT="14698" marB="14698" anchor="ctr">
                     <a:lnL w="12700" cap="flat" cmpd="sng" algn="ctr">
                       <a:solidFill>
                         <a:schemeClr val="tx1"/>
@@ -8248,11 +6837,11 @@
                 </a:tc>
                 <a:extLst>
                   <a:ext uri="{0D108BD9-81ED-4DB2-BD59-A6C34878D82A}">
-                    <a16:rowId xmlns:a16="http://schemas.microsoft.com/office/drawing/2014/main" val="445487336"/>
+                    <a16:rowId xmlns:a16="http://schemas.microsoft.com/office/drawing/2014/main" val="4230164439"/>
                   </a:ext>
                 </a:extLst>
               </a:tr>
-              <a:tr h="465227">
+              <a:tr h="551523">
                 <a:tc>
                   <a:txBody>
                     <a:bodyPr/>
@@ -8262,7 +6851,7 @@
                         <a:buNone/>
                       </a:pPr>
                       <a:r>
-                        <a:rPr lang="en-GB" sz="1400" b="1">
+                        <a:rPr lang="en-GB" sz="1200" b="1">
                           <a:solidFill>
                             <a:srgbClr val="1F1F1F"/>
                           </a:solidFill>
@@ -8270,9 +6859,9 @@
                           <a:latin typeface="Times New Roman" panose="02020603050405020304" pitchFamily="18" charset="0"/>
                           <a:cs typeface="Times New Roman" panose="02020603050405020304" pitchFamily="18" charset="0"/>
                         </a:rPr>
-                        <a:t>Key Findings</a:t>
+                        <a:t>Paper 2 (User Roles)</a:t>
                       </a:r>
-                      <a:endParaRPr lang="en-GB" sz="1400">
+                      <a:endParaRPr lang="en-GB" sz="1200">
                         <a:solidFill>
                           <a:srgbClr val="1F1F1F"/>
                         </a:solidFill>
@@ -8282,7 +6871,7 @@
                       </a:endParaRPr>
                     </a:p>
                   </a:txBody>
-                  <a:tcPr marL="40804" marR="40804" marT="27203" marB="27203" anchor="ctr">
+                  <a:tcPr marL="22047" marR="22047" marT="14698" marB="14698" anchor="ctr">
                     <a:lnL w="12700" cap="flat" cmpd="sng" algn="ctr">
                       <a:solidFill>
                         <a:schemeClr val="tx1"/>
@@ -8331,7 +6920,7 @@
                         <a:buNone/>
                       </a:pPr>
                       <a:r>
-                        <a:rPr lang="en-GB" sz="1400">
+                        <a:rPr lang="en-GB" sz="1200" b="1">
                           <a:solidFill>
                             <a:srgbClr val="1F1F1F"/>
                           </a:solidFill>
@@ -8339,67 +6928,10 @@
                           <a:latin typeface="Times New Roman" panose="02020603050405020304" pitchFamily="18" charset="0"/>
                           <a:cs typeface="Times New Roman" panose="02020603050405020304" pitchFamily="18" charset="0"/>
                         </a:rPr>
-                        <a:t>Continuous assistance improves student satisfaction and provides a safe environment for mock testing.</a:t>
+                        <a:t>Passive Management:</a:t>
                       </a:r>
-                    </a:p>
-                  </a:txBody>
-                  <a:tcPr marL="40804" marR="40804" marT="27203" marB="27203" anchor="ctr">
-                    <a:lnL w="12700" cap="flat" cmpd="sng" algn="ctr">
-                      <a:solidFill>
-                        <a:schemeClr val="tx1"/>
-                      </a:solidFill>
-                      <a:prstDash val="solid"/>
-                      <a:round/>
-                      <a:headEnd type="none" w="med" len="med"/>
-                      <a:tailEnd type="none" w="med" len="med"/>
-                    </a:lnL>
-                    <a:lnR w="12700" cap="flat" cmpd="sng" algn="ctr">
-                      <a:solidFill>
-                        <a:schemeClr val="tx1"/>
-                      </a:solidFill>
-                      <a:prstDash val="solid"/>
-                      <a:round/>
-                      <a:headEnd type="none" w="med" len="med"/>
-                      <a:tailEnd type="none" w="med" len="med"/>
-                    </a:lnR>
-                    <a:lnT w="12700" cap="flat" cmpd="sng" algn="ctr">
-                      <a:solidFill>
-                        <a:schemeClr val="tx1"/>
-                      </a:solidFill>
-                      <a:prstDash val="solid"/>
-                      <a:round/>
-                      <a:headEnd type="none" w="med" len="med"/>
-                      <a:tailEnd type="none" w="med" len="med"/>
-                    </a:lnT>
-                    <a:lnB w="12700" cap="flat" cmpd="sng" algn="ctr">
-                      <a:solidFill>
-                        <a:schemeClr val="tx1"/>
-                      </a:solidFill>
-                      <a:prstDash val="solid"/>
-                      <a:round/>
-                      <a:headEnd type="none" w="med" len="med"/>
-                      <a:tailEnd type="none" w="med" len="med"/>
-                    </a:lnB>
-                    <a:noFill/>
-                  </a:tcPr>
-                </a:tc>
-                <a:extLst>
-                  <a:ext uri="{0D108BD9-81ED-4DB2-BD59-A6C34878D82A}">
-                    <a16:rowId xmlns:a16="http://schemas.microsoft.com/office/drawing/2014/main" val="1968370203"/>
-                  </a:ext>
-                </a:extLst>
-              </a:tr>
-              <a:tr h="465227">
-                <a:tc>
-                  <a:txBody>
-                    <a:bodyPr/>
-                    <a:lstStyle/>
-                    <a:p>
-                      <a:pPr rtl="0">
-                        <a:buNone/>
-                      </a:pPr>
                       <a:r>
-                        <a:rPr lang="en-GB" sz="1400" b="1">
+                        <a:rPr lang="en-GB" sz="1200">
                           <a:solidFill>
                             <a:srgbClr val="1F1F1F"/>
                           </a:solidFill>
@@ -8407,19 +6939,11 @@
                           <a:latin typeface="Times New Roman" panose="02020603050405020304" pitchFamily="18" charset="0"/>
                           <a:cs typeface="Times New Roman" panose="02020603050405020304" pitchFamily="18" charset="0"/>
                         </a:rPr>
-                        <a:t>Strengths</a:t>
+                        <a:t> Systems store data but don't provide tools for active support.</a:t>
                       </a:r>
-                      <a:endParaRPr lang="en-GB" sz="1400">
-                        <a:solidFill>
-                          <a:srgbClr val="1F1F1F"/>
-                        </a:solidFill>
-                        <a:effectLst/>
-                        <a:latin typeface="Times New Roman" panose="02020603050405020304" pitchFamily="18" charset="0"/>
-                        <a:cs typeface="Times New Roman" panose="02020603050405020304" pitchFamily="18" charset="0"/>
-                      </a:endParaRPr>
                     </a:p>
                   </a:txBody>
-                  <a:tcPr marL="40804" marR="40804" marT="27203" marB="27203" anchor="ctr">
+                  <a:tcPr marL="22047" marR="22047" marT="14698" marB="14698" anchor="ctr">
                     <a:lnL w="12700" cap="flat" cmpd="sng" algn="ctr">
                       <a:solidFill>
                         <a:schemeClr val="tx1"/>
@@ -8468,7 +6992,7 @@
                         <a:buNone/>
                       </a:pPr>
                       <a:r>
-                        <a:rPr lang="en-GB" sz="1400">
+                        <a:rPr lang="en-GB" sz="1200" b="1">
                           <a:solidFill>
                             <a:srgbClr val="1F1F1F"/>
                           </a:solidFill>
@@ -8476,11 +7000,66 @@
                           <a:latin typeface="Times New Roman" panose="02020603050405020304" pitchFamily="18" charset="0"/>
                           <a:cs typeface="Times New Roman" panose="02020603050405020304" pitchFamily="18" charset="0"/>
                         </a:rPr>
-                        <a:t>Improves accessibility to institutional data for students in a conversational format.</a:t>
+                        <a:t>Active Support:</a:t>
+                      </a:r>
+                      <a:r>
+                        <a:rPr lang="en-GB" sz="1200">
+                          <a:solidFill>
+                            <a:srgbClr val="1F1F1F"/>
+                          </a:solidFill>
+                          <a:effectLst/>
+                          <a:latin typeface="Times New Roman" panose="02020603050405020304" pitchFamily="18" charset="0"/>
+                          <a:cs typeface="Times New Roman" panose="02020603050405020304" pitchFamily="18" charset="0"/>
+                        </a:rPr>
+                        <a:t> Faculty can directly </a:t>
+                      </a:r>
+                      <a:r>
+                        <a:rPr lang="en-GB" sz="1200" b="1">
+                          <a:solidFill>
+                            <a:srgbClr val="1F1F1F"/>
+                          </a:solidFill>
+                          <a:effectLst/>
+                          <a:latin typeface="Times New Roman" panose="02020603050405020304" pitchFamily="18" charset="0"/>
+                          <a:cs typeface="Times New Roman" panose="02020603050405020304" pitchFamily="18" charset="0"/>
+                        </a:rPr>
+                        <a:t>reset student credentials</a:t>
+                      </a:r>
+                      <a:r>
+                        <a:rPr lang="en-GB" sz="1200">
+                          <a:solidFill>
+                            <a:srgbClr val="1F1F1F"/>
+                          </a:solidFill>
+                          <a:effectLst/>
+                          <a:latin typeface="Times New Roman" panose="02020603050405020304" pitchFamily="18" charset="0"/>
+                          <a:cs typeface="Times New Roman" panose="02020603050405020304" pitchFamily="18" charset="0"/>
+                        </a:rPr>
+                        <a:t> and Admin can </a:t>
+                      </a:r>
+                      <a:r>
+                        <a:rPr lang="en-GB" sz="1200" b="1">
+                          <a:solidFill>
+                            <a:srgbClr val="1F1F1F"/>
+                          </a:solidFill>
+                          <a:effectLst/>
+                          <a:latin typeface="Times New Roman" panose="02020603050405020304" pitchFamily="18" charset="0"/>
+                          <a:cs typeface="Times New Roman" panose="02020603050405020304" pitchFamily="18" charset="0"/>
+                        </a:rPr>
+                        <a:t>modify records</a:t>
+                      </a:r>
+                      <a:r>
+                        <a:rPr lang="en-GB" sz="1200">
+                          <a:solidFill>
+                            <a:srgbClr val="1F1F1F"/>
+                          </a:solidFill>
+                          <a:effectLst/>
+                          <a:latin typeface="Times New Roman" panose="02020603050405020304" pitchFamily="18" charset="0"/>
+                          <a:cs typeface="Times New Roman" panose="02020603050405020304" pitchFamily="18" charset="0"/>
+                        </a:rPr>
+                        <a:t>.</a:t>
                       </a:r>
                     </a:p>
                   </a:txBody>
-                  <a:tcPr marL="40804" marR="40804" marT="27203" marB="27203" anchor="ctr">
+                  <a:tcPr marL="22047" marR="22047" marT="14698" marB="14698" anchor="ctr">
                     <a:lnL w="12700" cap="flat" cmpd="sng" algn="ctr">
                       <a:solidFill>
                         <a:schemeClr val="tx1"/>
@@ -8522,11 +7101,11 @@
                 </a:tc>
                 <a:extLst>
                   <a:ext uri="{0D108BD9-81ED-4DB2-BD59-A6C34878D82A}">
-                    <a16:rowId xmlns:a16="http://schemas.microsoft.com/office/drawing/2014/main" val="1495137201"/>
+                    <a16:rowId xmlns:a16="http://schemas.microsoft.com/office/drawing/2014/main" val="3639273390"/>
                   </a:ext>
                 </a:extLst>
               </a:tr>
-              <a:tr h="465227">
+              <a:tr h="629616">
                 <a:tc>
                   <a:txBody>
                     <a:bodyPr/>
@@ -8536,7 +7115,7 @@
                         <a:buNone/>
                       </a:pPr>
                       <a:r>
-                        <a:rPr lang="en-GB" sz="1400" b="1">
+                        <a:rPr lang="en-GB" sz="1200" b="1">
                           <a:solidFill>
                             <a:srgbClr val="1F1F1F"/>
                           </a:solidFill>
@@ -8544,9 +7123,9 @@
                           <a:latin typeface="Times New Roman" panose="02020603050405020304" pitchFamily="18" charset="0"/>
                           <a:cs typeface="Times New Roman" panose="02020603050405020304" pitchFamily="18" charset="0"/>
                         </a:rPr>
-                        <a:t>Limitations / Gaps</a:t>
+                        <a:t>Paper 3 (Gamification)</a:t>
                       </a:r>
-                      <a:endParaRPr lang="en-GB" sz="1400">
+                      <a:endParaRPr lang="en-GB" sz="1200">
                         <a:solidFill>
                           <a:srgbClr val="1F1F1F"/>
                         </a:solidFill>
@@ -8556,7 +7135,7 @@
                       </a:endParaRPr>
                     </a:p>
                   </a:txBody>
-                  <a:tcPr marL="40804" marR="40804" marT="27203" marB="27203" anchor="ctr">
+                  <a:tcPr marL="22047" marR="22047" marT="14698" marB="14698" anchor="ctr">
                     <a:lnL w="12700" cap="flat" cmpd="sng" algn="ctr">
                       <a:solidFill>
                         <a:schemeClr val="tx1"/>
@@ -8605,7 +7184,7 @@
                         <a:buNone/>
                       </a:pPr>
                       <a:r>
-                        <a:rPr lang="en-GB" sz="1400" dirty="0">
+                        <a:rPr lang="en-GB" sz="1200" b="1" dirty="0">
                           <a:solidFill>
                             <a:srgbClr val="1F1F1F"/>
                           </a:solidFill>
@@ -8613,11 +7192,94 @@
                           <a:latin typeface="Times New Roman" panose="02020603050405020304" pitchFamily="18" charset="0"/>
                           <a:cs typeface="Times New Roman" panose="02020603050405020304" pitchFamily="18" charset="0"/>
                         </a:rPr>
-                        <a:t>Most assistant bots are "read-only" and don't allow for real-time schedule modifications by admins.</a:t>
+                        <a:t>Disconnected Engagement:</a:t>
+                      </a:r>
+                      <a:r>
+                        <a:rPr lang="en-GB" sz="1200" dirty="0">
+                          <a:solidFill>
+                            <a:srgbClr val="1F1F1F"/>
+                          </a:solidFill>
+                          <a:effectLst/>
+                          <a:latin typeface="Times New Roman" panose="02020603050405020304" pitchFamily="18" charset="0"/>
+                          <a:cs typeface="Times New Roman" panose="02020603050405020304" pitchFamily="18" charset="0"/>
+                        </a:rPr>
+                        <a:t> Leaderboards are separate from daily admin tasks.</a:t>
                       </a:r>
                     </a:p>
                   </a:txBody>
-                  <a:tcPr marL="40804" marR="40804" marT="27203" marB="27203" anchor="ctr">
+                  <a:tcPr marL="22047" marR="22047" marT="14698" marB="14698" anchor="ctr">
+                    <a:lnL w="12700" cap="flat" cmpd="sng" algn="ctr">
+                      <a:solidFill>
+                        <a:schemeClr val="tx1"/>
+                      </a:solidFill>
+                      <a:prstDash val="solid"/>
+                      <a:round/>
+                      <a:headEnd type="none" w="med" len="med"/>
+                      <a:tailEnd type="none" w="med" len="med"/>
+                    </a:lnL>
+                    <a:lnR w="12700" cap="flat" cmpd="sng" algn="ctr">
+                      <a:solidFill>
+                        <a:schemeClr val="tx1"/>
+                      </a:solidFill>
+                      <a:prstDash val="solid"/>
+                      <a:round/>
+                      <a:headEnd type="none" w="med" len="med"/>
+                      <a:tailEnd type="none" w="med" len="med"/>
+                    </a:lnR>
+                    <a:lnT w="12700" cap="flat" cmpd="sng" algn="ctr">
+                      <a:solidFill>
+                        <a:schemeClr val="tx1"/>
+                      </a:solidFill>
+                      <a:prstDash val="solid"/>
+                      <a:round/>
+                      <a:headEnd type="none" w="med" len="med"/>
+                      <a:tailEnd type="none" w="med" len="med"/>
+                    </a:lnT>
+                    <a:lnB w="12700" cap="flat" cmpd="sng" algn="ctr">
+                      <a:solidFill>
+                        <a:schemeClr val="tx1"/>
+                      </a:solidFill>
+                      <a:prstDash val="solid"/>
+                      <a:round/>
+                      <a:headEnd type="none" w="med" len="med"/>
+                      <a:tailEnd type="none" w="med" len="med"/>
+                    </a:lnB>
+                    <a:noFill/>
+                  </a:tcPr>
+                </a:tc>
+                <a:tc>
+                  <a:txBody>
+                    <a:bodyPr/>
+                    <a:lstStyle/>
+                    <a:p>
+                      <a:pPr rtl="0">
+                        <a:buNone/>
+                      </a:pPr>
+                      <a:r>
+                        <a:rPr lang="en-GB" sz="1200" b="1">
+                          <a:solidFill>
+                            <a:srgbClr val="1F1F1F"/>
+                          </a:solidFill>
+                          <a:effectLst/>
+                          <a:latin typeface="Times New Roman" panose="02020603050405020304" pitchFamily="18" charset="0"/>
+                          <a:cs typeface="Times New Roman" panose="02020603050405020304" pitchFamily="18" charset="0"/>
+                        </a:rPr>
+                        <a:t>Integrated Dashboard:</a:t>
+                      </a:r>
+                      <a:r>
+                        <a:rPr lang="en-GB" sz="1200">
+                          <a:solidFill>
+                            <a:srgbClr val="1F1F1F"/>
+                          </a:solidFill>
+                          <a:effectLst/>
+                          <a:latin typeface="Times New Roman" panose="02020603050405020304" pitchFamily="18" charset="0"/>
+                          <a:cs typeface="Times New Roman" panose="02020603050405020304" pitchFamily="18" charset="0"/>
+                        </a:rPr>
+                        <a:t> Coding scores and leaderboards are part of the daily Student/Faculty view.</a:t>
+                      </a:r>
+                    </a:p>
+                  </a:txBody>
+                  <a:tcPr marL="22047" marR="22047" marT="14698" marB="14698" anchor="ctr">
                     <a:lnL w="12700" cap="flat" cmpd="sng" algn="ctr">
                       <a:solidFill>
                         <a:schemeClr val="tx1"/>
@@ -8659,7 +7321,469 @@
                 </a:tc>
                 <a:extLst>
                   <a:ext uri="{0D108BD9-81ED-4DB2-BD59-A6C34878D82A}">
-                    <a16:rowId xmlns:a16="http://schemas.microsoft.com/office/drawing/2014/main" val="3052591469"/>
+                    <a16:rowId xmlns:a16="http://schemas.microsoft.com/office/drawing/2014/main" val="2148458217"/>
+                  </a:ext>
+                </a:extLst>
+              </a:tr>
+              <a:tr h="629616">
+                <a:tc>
+                  <a:txBody>
+                    <a:bodyPr/>
+                    <a:lstStyle/>
+                    <a:p>
+                      <a:pPr rtl="0">
+                        <a:buNone/>
+                      </a:pPr>
+                      <a:r>
+                        <a:rPr lang="en-GB" sz="1200" b="1">
+                          <a:solidFill>
+                            <a:srgbClr val="1F1F1F"/>
+                          </a:solidFill>
+                          <a:effectLst/>
+                          <a:latin typeface="Times New Roman" panose="02020603050405020304" pitchFamily="18" charset="0"/>
+                          <a:cs typeface="Times New Roman" panose="02020603050405020304" pitchFamily="18" charset="0"/>
+                        </a:rPr>
+                        <a:t>Paper 6 (Coding Analytics)</a:t>
+                      </a:r>
+                      <a:endParaRPr lang="en-GB" sz="1200">
+                        <a:solidFill>
+                          <a:srgbClr val="1F1F1F"/>
+                        </a:solidFill>
+                        <a:effectLst/>
+                        <a:latin typeface="Times New Roman" panose="02020603050405020304" pitchFamily="18" charset="0"/>
+                        <a:cs typeface="Times New Roman" panose="02020603050405020304" pitchFamily="18" charset="0"/>
+                      </a:endParaRPr>
+                    </a:p>
+                  </a:txBody>
+                  <a:tcPr marL="22047" marR="22047" marT="14698" marB="14698" anchor="ctr">
+                    <a:lnL w="12700" cap="flat" cmpd="sng" algn="ctr">
+                      <a:solidFill>
+                        <a:schemeClr val="tx1"/>
+                      </a:solidFill>
+                      <a:prstDash val="solid"/>
+                      <a:round/>
+                      <a:headEnd type="none" w="med" len="med"/>
+                      <a:tailEnd type="none" w="med" len="med"/>
+                    </a:lnL>
+                    <a:lnR w="12700" cap="flat" cmpd="sng" algn="ctr">
+                      <a:solidFill>
+                        <a:schemeClr val="tx1"/>
+                      </a:solidFill>
+                      <a:prstDash val="solid"/>
+                      <a:round/>
+                      <a:headEnd type="none" w="med" len="med"/>
+                      <a:tailEnd type="none" w="med" len="med"/>
+                    </a:lnR>
+                    <a:lnT w="12700" cap="flat" cmpd="sng" algn="ctr">
+                      <a:solidFill>
+                        <a:schemeClr val="tx1"/>
+                      </a:solidFill>
+                      <a:prstDash val="solid"/>
+                      <a:round/>
+                      <a:headEnd type="none" w="med" len="med"/>
+                      <a:tailEnd type="none" w="med" len="med"/>
+                    </a:lnT>
+                    <a:lnB w="12700" cap="flat" cmpd="sng" algn="ctr">
+                      <a:solidFill>
+                        <a:schemeClr val="tx1"/>
+                      </a:solidFill>
+                      <a:prstDash val="solid"/>
+                      <a:round/>
+                      <a:headEnd type="none" w="med" len="med"/>
+                      <a:tailEnd type="none" w="med" len="med"/>
+                    </a:lnB>
+                    <a:noFill/>
+                  </a:tcPr>
+                </a:tc>
+                <a:tc>
+                  <a:txBody>
+                    <a:bodyPr/>
+                    <a:lstStyle/>
+                    <a:p>
+                      <a:pPr rtl="0">
+                        <a:buNone/>
+                      </a:pPr>
+                      <a:r>
+                        <a:rPr lang="en-GB" sz="1200" b="1" dirty="0">
+                          <a:solidFill>
+                            <a:srgbClr val="1F1F1F"/>
+                          </a:solidFill>
+                          <a:effectLst/>
+                          <a:latin typeface="Times New Roman" panose="02020603050405020304" pitchFamily="18" charset="0"/>
+                          <a:cs typeface="Times New Roman" panose="02020603050405020304" pitchFamily="18" charset="0"/>
+                        </a:rPr>
+                        <a:t>Data Silos:</a:t>
+                      </a:r>
+                      <a:r>
+                        <a:rPr lang="en-GB" sz="1200" dirty="0">
+                          <a:solidFill>
+                            <a:srgbClr val="1F1F1F"/>
+                          </a:solidFill>
+                          <a:effectLst/>
+                          <a:latin typeface="Times New Roman" panose="02020603050405020304" pitchFamily="18" charset="0"/>
+                          <a:cs typeface="Times New Roman" panose="02020603050405020304" pitchFamily="18" charset="0"/>
+                        </a:rPr>
+                        <a:t> Attendance and coding performance are not </a:t>
+                      </a:r>
+                      <a:r>
+                        <a:rPr lang="en-GB" sz="1200" dirty="0" err="1">
+                          <a:solidFill>
+                            <a:srgbClr val="1F1F1F"/>
+                          </a:solidFill>
+                          <a:effectLst/>
+                          <a:latin typeface="Times New Roman" panose="02020603050405020304" pitchFamily="18" charset="0"/>
+                          <a:cs typeface="Times New Roman" panose="02020603050405020304" pitchFamily="18" charset="0"/>
+                        </a:rPr>
+                        <a:t>analyzed</a:t>
+                      </a:r>
+                      <a:r>
+                        <a:rPr lang="en-GB" sz="1200" dirty="0">
+                          <a:solidFill>
+                            <a:srgbClr val="1F1F1F"/>
+                          </a:solidFill>
+                          <a:effectLst/>
+                          <a:latin typeface="Times New Roman" panose="02020603050405020304" pitchFamily="18" charset="0"/>
+                          <a:cs typeface="Times New Roman" panose="02020603050405020304" pitchFamily="18" charset="0"/>
+                        </a:rPr>
+                        <a:t> together.</a:t>
+                      </a:r>
+                    </a:p>
+                  </a:txBody>
+                  <a:tcPr marL="22047" marR="22047" marT="14698" marB="14698" anchor="ctr">
+                    <a:lnL w="12700" cap="flat" cmpd="sng" algn="ctr">
+                      <a:solidFill>
+                        <a:schemeClr val="tx1"/>
+                      </a:solidFill>
+                      <a:prstDash val="solid"/>
+                      <a:round/>
+                      <a:headEnd type="none" w="med" len="med"/>
+                      <a:tailEnd type="none" w="med" len="med"/>
+                    </a:lnL>
+                    <a:lnR w="12700" cap="flat" cmpd="sng" algn="ctr">
+                      <a:solidFill>
+                        <a:schemeClr val="tx1"/>
+                      </a:solidFill>
+                      <a:prstDash val="solid"/>
+                      <a:round/>
+                      <a:headEnd type="none" w="med" len="med"/>
+                      <a:tailEnd type="none" w="med" len="med"/>
+                    </a:lnR>
+                    <a:lnT w="12700" cap="flat" cmpd="sng" algn="ctr">
+                      <a:solidFill>
+                        <a:schemeClr val="tx1"/>
+                      </a:solidFill>
+                      <a:prstDash val="solid"/>
+                      <a:round/>
+                      <a:headEnd type="none" w="med" len="med"/>
+                      <a:tailEnd type="none" w="med" len="med"/>
+                    </a:lnT>
+                    <a:lnB w="12700" cap="flat" cmpd="sng" algn="ctr">
+                      <a:solidFill>
+                        <a:schemeClr val="tx1"/>
+                      </a:solidFill>
+                      <a:prstDash val="solid"/>
+                      <a:round/>
+                      <a:headEnd type="none" w="med" len="med"/>
+                      <a:tailEnd type="none" w="med" len="med"/>
+                    </a:lnB>
+                    <a:noFill/>
+                  </a:tcPr>
+                </a:tc>
+                <a:tc>
+                  <a:txBody>
+                    <a:bodyPr/>
+                    <a:lstStyle/>
+                    <a:p>
+                      <a:pPr rtl="0">
+                        <a:buNone/>
+                      </a:pPr>
+                      <a:r>
+                        <a:rPr lang="en-GB" sz="1200" b="1" dirty="0">
+                          <a:solidFill>
+                            <a:srgbClr val="1F1F1F"/>
+                          </a:solidFill>
+                          <a:effectLst/>
+                          <a:latin typeface="Times New Roman" panose="02020603050405020304" pitchFamily="18" charset="0"/>
+                          <a:cs typeface="Times New Roman" panose="02020603050405020304" pitchFamily="18" charset="0"/>
+                        </a:rPr>
+                        <a:t>Unified Analytics:</a:t>
+                      </a:r>
+                      <a:r>
+                        <a:rPr lang="en-GB" sz="1200" dirty="0">
+                          <a:solidFill>
+                            <a:srgbClr val="1F1F1F"/>
+                          </a:solidFill>
+                          <a:effectLst/>
+                          <a:latin typeface="Times New Roman" panose="02020603050405020304" pitchFamily="18" charset="0"/>
+                          <a:cs typeface="Times New Roman" panose="02020603050405020304" pitchFamily="18" charset="0"/>
+                        </a:rPr>
+                        <a:t> Faculty/Admin can see "Complete Attendance Analysis" alongside "Coding Scores."</a:t>
+                      </a:r>
+                    </a:p>
+                  </a:txBody>
+                  <a:tcPr marL="22047" marR="22047" marT="14698" marB="14698" anchor="ctr">
+                    <a:lnL w="12700" cap="flat" cmpd="sng" algn="ctr">
+                      <a:solidFill>
+                        <a:schemeClr val="tx1"/>
+                      </a:solidFill>
+                      <a:prstDash val="solid"/>
+                      <a:round/>
+                      <a:headEnd type="none" w="med" len="med"/>
+                      <a:tailEnd type="none" w="med" len="med"/>
+                    </a:lnL>
+                    <a:lnR w="12700" cap="flat" cmpd="sng" algn="ctr">
+                      <a:solidFill>
+                        <a:schemeClr val="tx1"/>
+                      </a:solidFill>
+                      <a:prstDash val="solid"/>
+                      <a:round/>
+                      <a:headEnd type="none" w="med" len="med"/>
+                      <a:tailEnd type="none" w="med" len="med"/>
+                    </a:lnR>
+                    <a:lnT w="12700" cap="flat" cmpd="sng" algn="ctr">
+                      <a:solidFill>
+                        <a:schemeClr val="tx1"/>
+                      </a:solidFill>
+                      <a:prstDash val="solid"/>
+                      <a:round/>
+                      <a:headEnd type="none" w="med" len="med"/>
+                      <a:tailEnd type="none" w="med" len="med"/>
+                    </a:lnT>
+                    <a:lnB w="12700" cap="flat" cmpd="sng" algn="ctr">
+                      <a:solidFill>
+                        <a:schemeClr val="tx1"/>
+                      </a:solidFill>
+                      <a:prstDash val="solid"/>
+                      <a:round/>
+                      <a:headEnd type="none" w="med" len="med"/>
+                      <a:tailEnd type="none" w="med" len="med"/>
+                    </a:lnB>
+                    <a:noFill/>
+                  </a:tcPr>
+                </a:tc>
+                <a:extLst>
+                  <a:ext uri="{0D108BD9-81ED-4DB2-BD59-A6C34878D82A}">
+                    <a16:rowId xmlns:a16="http://schemas.microsoft.com/office/drawing/2014/main" val="3884932407"/>
+                  </a:ext>
+                </a:extLst>
+              </a:tr>
+              <a:tr h="629616">
+                <a:tc>
+                  <a:txBody>
+                    <a:bodyPr/>
+                    <a:lstStyle/>
+                    <a:p>
+                      <a:pPr rtl="0">
+                        <a:buNone/>
+                      </a:pPr>
+                      <a:r>
+                        <a:rPr lang="en-GB" sz="1200" b="1" dirty="0">
+                          <a:solidFill>
+                            <a:srgbClr val="1F1F1F"/>
+                          </a:solidFill>
+                          <a:effectLst/>
+                          <a:latin typeface="Times New Roman" panose="02020603050405020304" pitchFamily="18" charset="0"/>
+                          <a:cs typeface="Times New Roman" panose="02020603050405020304" pitchFamily="18" charset="0"/>
+                        </a:rPr>
+                        <a:t>Paper 7 (NLP Attendance)</a:t>
+                      </a:r>
+                      <a:endParaRPr lang="en-GB" sz="1200" dirty="0">
+                        <a:solidFill>
+                          <a:srgbClr val="1F1F1F"/>
+                        </a:solidFill>
+                        <a:effectLst/>
+                        <a:latin typeface="Times New Roman" panose="02020603050405020304" pitchFamily="18" charset="0"/>
+                        <a:cs typeface="Times New Roman" panose="02020603050405020304" pitchFamily="18" charset="0"/>
+                      </a:endParaRPr>
+                    </a:p>
+                  </a:txBody>
+                  <a:tcPr marL="22047" marR="22047" marT="14698" marB="14698" anchor="ctr">
+                    <a:lnL w="12700" cap="flat" cmpd="sng" algn="ctr">
+                      <a:solidFill>
+                        <a:schemeClr val="tx1"/>
+                      </a:solidFill>
+                      <a:prstDash val="solid"/>
+                      <a:round/>
+                      <a:headEnd type="none" w="med" len="med"/>
+                      <a:tailEnd type="none" w="med" len="med"/>
+                    </a:lnL>
+                    <a:lnR w="12700" cap="flat" cmpd="sng" algn="ctr">
+                      <a:solidFill>
+                        <a:schemeClr val="tx1"/>
+                      </a:solidFill>
+                      <a:prstDash val="solid"/>
+                      <a:round/>
+                      <a:headEnd type="none" w="med" len="med"/>
+                      <a:tailEnd type="none" w="med" len="med"/>
+                    </a:lnR>
+                    <a:lnT w="12700" cap="flat" cmpd="sng" algn="ctr">
+                      <a:solidFill>
+                        <a:schemeClr val="tx1"/>
+                      </a:solidFill>
+                      <a:prstDash val="solid"/>
+                      <a:round/>
+                      <a:headEnd type="none" w="med" len="med"/>
+                      <a:tailEnd type="none" w="med" len="med"/>
+                    </a:lnT>
+                    <a:lnB w="12700" cap="flat" cmpd="sng" algn="ctr">
+                      <a:solidFill>
+                        <a:schemeClr val="tx1"/>
+                      </a:solidFill>
+                      <a:prstDash val="solid"/>
+                      <a:round/>
+                      <a:headEnd type="none" w="med" len="med"/>
+                      <a:tailEnd type="none" w="med" len="med"/>
+                    </a:lnB>
+                    <a:noFill/>
+                  </a:tcPr>
+                </a:tc>
+                <a:tc>
+                  <a:txBody>
+                    <a:bodyPr/>
+                    <a:lstStyle/>
+                    <a:p>
+                      <a:pPr rtl="0">
+                        <a:buNone/>
+                      </a:pPr>
+                      <a:r>
+                        <a:rPr lang="en-GB" sz="1200" b="1" dirty="0">
+                          <a:solidFill>
+                            <a:srgbClr val="1F1F1F"/>
+                          </a:solidFill>
+                          <a:effectLst/>
+                          <a:latin typeface="Times New Roman" panose="02020603050405020304" pitchFamily="18" charset="0"/>
+                          <a:cs typeface="Times New Roman" panose="02020603050405020304" pitchFamily="18" charset="0"/>
+                        </a:rPr>
+                        <a:t>High Interaction Effort:</a:t>
+                      </a:r>
+                      <a:r>
+                        <a:rPr lang="en-GB" sz="1200" dirty="0">
+                          <a:solidFill>
+                            <a:srgbClr val="1F1F1F"/>
+                          </a:solidFill>
+                          <a:effectLst/>
+                          <a:latin typeface="Times New Roman" panose="02020603050405020304" pitchFamily="18" charset="0"/>
+                          <a:cs typeface="Times New Roman" panose="02020603050405020304" pitchFamily="18" charset="0"/>
+                        </a:rPr>
+                        <a:t> Traditional apps require too many clicks for bulk attendance posting.</a:t>
+                      </a:r>
+                    </a:p>
+                  </a:txBody>
+                  <a:tcPr marL="22047" marR="22047" marT="14698" marB="14698" anchor="ctr">
+                    <a:lnL w="12700" cap="flat" cmpd="sng" algn="ctr">
+                      <a:solidFill>
+                        <a:schemeClr val="tx1"/>
+                      </a:solidFill>
+                      <a:prstDash val="solid"/>
+                      <a:round/>
+                      <a:headEnd type="none" w="med" len="med"/>
+                      <a:tailEnd type="none" w="med" len="med"/>
+                    </a:lnL>
+                    <a:lnR w="12700" cap="flat" cmpd="sng" algn="ctr">
+                      <a:solidFill>
+                        <a:schemeClr val="tx1"/>
+                      </a:solidFill>
+                      <a:prstDash val="solid"/>
+                      <a:round/>
+                      <a:headEnd type="none" w="med" len="med"/>
+                      <a:tailEnd type="none" w="med" len="med"/>
+                    </a:lnR>
+                    <a:lnT w="12700" cap="flat" cmpd="sng" algn="ctr">
+                      <a:solidFill>
+                        <a:schemeClr val="tx1"/>
+                      </a:solidFill>
+                      <a:prstDash val="solid"/>
+                      <a:round/>
+                      <a:headEnd type="none" w="med" len="med"/>
+                      <a:tailEnd type="none" w="med" len="med"/>
+                    </a:lnT>
+                    <a:lnB w="12700" cap="flat" cmpd="sng" algn="ctr">
+                      <a:solidFill>
+                        <a:schemeClr val="tx1"/>
+                      </a:solidFill>
+                      <a:prstDash val="solid"/>
+                      <a:round/>
+                      <a:headEnd type="none" w="med" len="med"/>
+                      <a:tailEnd type="none" w="med" len="med"/>
+                    </a:lnB>
+                    <a:noFill/>
+                  </a:tcPr>
+                </a:tc>
+                <a:tc>
+                  <a:txBody>
+                    <a:bodyPr/>
+                    <a:lstStyle/>
+                    <a:p>
+                      <a:pPr rtl="0">
+                        <a:buNone/>
+                      </a:pPr>
+                      <a:r>
+                        <a:rPr lang="en-GB" sz="1200" b="1" dirty="0">
+                          <a:solidFill>
+                            <a:srgbClr val="1F1F1F"/>
+                          </a:solidFill>
+                          <a:effectLst/>
+                          <a:latin typeface="Times New Roman" panose="02020603050405020304" pitchFamily="18" charset="0"/>
+                          <a:cs typeface="Times New Roman" panose="02020603050405020304" pitchFamily="18" charset="0"/>
+                        </a:rPr>
+                        <a:t>Transactional NLP:</a:t>
+                      </a:r>
+                      <a:r>
+                        <a:rPr lang="en-GB" sz="1200" dirty="0">
+                          <a:solidFill>
+                            <a:srgbClr val="1F1F1F"/>
+                          </a:solidFill>
+                          <a:effectLst/>
+                          <a:latin typeface="Times New Roman" panose="02020603050405020304" pitchFamily="18" charset="0"/>
+                          <a:cs typeface="Times New Roman" panose="02020603050405020304" pitchFamily="18" charset="0"/>
+                        </a:rPr>
+                        <a:t> Faculty can post bulk attendance via text (e.g., "Roll X absent, others present").</a:t>
+                      </a:r>
+                    </a:p>
+                  </a:txBody>
+                  <a:tcPr marL="22047" marR="22047" marT="14698" marB="14698" anchor="ctr">
+                    <a:lnL w="12700" cap="flat" cmpd="sng" algn="ctr">
+                      <a:solidFill>
+                        <a:schemeClr val="tx1"/>
+                      </a:solidFill>
+                      <a:prstDash val="solid"/>
+                      <a:round/>
+                      <a:headEnd type="none" w="med" len="med"/>
+                      <a:tailEnd type="none" w="med" len="med"/>
+                    </a:lnL>
+                    <a:lnR w="12700" cap="flat" cmpd="sng" algn="ctr">
+                      <a:solidFill>
+                        <a:schemeClr val="tx1"/>
+                      </a:solidFill>
+                      <a:prstDash val="solid"/>
+                      <a:round/>
+                      <a:headEnd type="none" w="med" len="med"/>
+                      <a:tailEnd type="none" w="med" len="med"/>
+                    </a:lnR>
+                    <a:lnT w="12700" cap="flat" cmpd="sng" algn="ctr">
+                      <a:solidFill>
+                        <a:schemeClr val="tx1"/>
+                      </a:solidFill>
+                      <a:prstDash val="solid"/>
+                      <a:round/>
+                      <a:headEnd type="none" w="med" len="med"/>
+                      <a:tailEnd type="none" w="med" len="med"/>
+                    </a:lnT>
+                    <a:lnB w="12700" cap="flat" cmpd="sng" algn="ctr">
+                      <a:solidFill>
+                        <a:schemeClr val="tx1"/>
+                      </a:solidFill>
+                      <a:prstDash val="solid"/>
+                      <a:round/>
+                      <a:headEnd type="none" w="med" len="med"/>
+                      <a:tailEnd type="none" w="med" len="med"/>
+                    </a:lnB>
+                    <a:noFill/>
+                  </a:tcPr>
+                </a:tc>
+                <a:extLst>
+                  <a:ext uri="{0D108BD9-81ED-4DB2-BD59-A6C34878D82A}">
+                    <a16:rowId xmlns:a16="http://schemas.microsoft.com/office/drawing/2014/main" val="3629967437"/>
                   </a:ext>
                 </a:extLst>
               </a:tr>
@@ -8670,7 +7794,7 @@
     </p:spTree>
     <p:extLst>
       <p:ext uri="{BB962C8B-B14F-4D97-AF65-F5344CB8AC3E}">
-        <p14:creationId xmlns:p14="http://schemas.microsoft.com/office/powerpoint/2010/main" val="885870583"/>
+        <p14:creationId xmlns:p14="http://schemas.microsoft.com/office/powerpoint/2010/main" val="3032003584"/>
       </p:ext>
     </p:extLst>
   </p:cSld>
@@ -8683,7 +7807,7 @@
 </p:sld>
 </file>
 
-<file path=ppt/slides/slide12.xml><?xml version="1.0" encoding="utf-8"?>
+<file path=ppt/slides/slide11.xml><?xml version="1.0" encoding="utf-8"?>
 <p:sld xmlns:a="http://schemas.openxmlformats.org/drawingml/2006/main" xmlns:r="http://schemas.openxmlformats.org/officeDocument/2006/relationships" xmlns:p="http://schemas.openxmlformats.org/presentationml/2006/main">
   <p:cSld>
     <p:spTree>
@@ -8729,1991 +7853,7 @@
             <a:fld id="{4B327F5A-7D8F-4012-9A1A-2197D74A174F}" type="slidenum">
               <a:rPr lang="en-IN" smtClean="0"/>
               <a:pPr/>
-              <a:t>12</a:t>
-            </a:fld>
-            <a:endParaRPr lang="en-IN" dirty="0"/>
-          </a:p>
-        </p:txBody>
-      </p:sp>
-      <p:sp>
-        <p:nvSpPr>
-          <p:cNvPr id="3" name="object 2">
-            <a:extLst>
-              <a:ext uri="{FF2B5EF4-FFF2-40B4-BE49-F238E27FC236}">
-                <a16:creationId xmlns:a16="http://schemas.microsoft.com/office/drawing/2014/main" id="{A94F5027-CBF8-4E1C-A503-4C50C325358D}"/>
-              </a:ext>
-            </a:extLst>
-          </p:cNvPr>
-          <p:cNvSpPr txBox="1">
-            <a:spLocks noGrp="1"/>
-          </p:cNvSpPr>
-          <p:nvPr>
-            <p:ph type="title"/>
-          </p:nvPr>
-        </p:nvSpPr>
-        <p:spPr>
-          <a:xfrm>
-            <a:off x="66039" y="188849"/>
-            <a:ext cx="7432040" cy="534120"/>
-          </a:xfrm>
-          <a:prstGeom prst="rect">
-            <a:avLst/>
-          </a:prstGeom>
-        </p:spPr>
-        <p:txBody>
-          <a:bodyPr vert="horz" wrap="square" lIns="0" tIns="71754" rIns="0" bIns="0" rtlCol="0" anchor="t">
-            <a:spAutoFit/>
-          </a:bodyPr>
-          <a:lstStyle/>
-          <a:p>
-            <a:pPr marL="45085">
-              <a:lnSpc>
-                <a:spcPct val="100000"/>
-              </a:lnSpc>
-              <a:spcBef>
-                <a:spcPts val="105"/>
-              </a:spcBef>
-            </a:pPr>
-            <a:r>
-              <a:rPr lang="en-US" spc="-30" dirty="0">
-                <a:latin typeface="Times New Roman" panose="02020603050405020304" pitchFamily="18" charset="0"/>
-                <a:cs typeface="Times New Roman" panose="02020603050405020304" pitchFamily="18" charset="0"/>
-              </a:rPr>
-              <a:t>Literature Review: </a:t>
-            </a:r>
-            <a:r>
-              <a:rPr lang="en-US" spc="-30" dirty="0" err="1">
-                <a:latin typeface="Times New Roman" panose="02020603050405020304" pitchFamily="18" charset="0"/>
-                <a:cs typeface="Times New Roman" panose="02020603050405020304" pitchFamily="18" charset="0"/>
-              </a:rPr>
-              <a:t>Comparitive</a:t>
-            </a:r>
-            <a:r>
-              <a:rPr lang="en-US" spc="-30" dirty="0">
-                <a:latin typeface="Times New Roman" panose="02020603050405020304" pitchFamily="18" charset="0"/>
-                <a:cs typeface="Times New Roman" panose="02020603050405020304" pitchFamily="18" charset="0"/>
-              </a:rPr>
-              <a:t> Analysis</a:t>
-            </a:r>
-          </a:p>
-        </p:txBody>
-      </p:sp>
-      <p:graphicFrame>
-        <p:nvGraphicFramePr>
-          <p:cNvPr id="4" name="Table 3">
-            <a:extLst>
-              <a:ext uri="{FF2B5EF4-FFF2-40B4-BE49-F238E27FC236}">
-                <a16:creationId xmlns:a16="http://schemas.microsoft.com/office/drawing/2014/main" id="{38153D6D-D442-ABF6-B547-77945D4FAC4A}"/>
-              </a:ext>
-            </a:extLst>
-          </p:cNvPr>
-          <p:cNvGraphicFramePr>
-            <a:graphicFrameLocks noGrp="1"/>
-          </p:cNvGraphicFramePr>
-          <p:nvPr>
-            <p:extLst>
-              <p:ext uri="{D42A27DB-BD31-4B8C-83A1-F6EECF244321}">
-                <p14:modId xmlns:p14="http://schemas.microsoft.com/office/powerpoint/2010/main" val="1691882777"/>
-              </p:ext>
-            </p:extLst>
-          </p:nvPr>
-        </p:nvGraphicFramePr>
-        <p:xfrm>
-          <a:off x="178904" y="1277040"/>
-          <a:ext cx="8140148" cy="3413244"/>
-        </p:xfrm>
-        <a:graphic>
-          <a:graphicData uri="http://schemas.openxmlformats.org/drawingml/2006/table">
-            <a:tbl>
-              <a:tblPr/>
-              <a:tblGrid>
-                <a:gridCol w="2123517">
-                  <a:extLst>
-                    <a:ext uri="{9D8B030D-6E8A-4147-A177-3AD203B41FA5}">
-                      <a16:colId xmlns:a16="http://schemas.microsoft.com/office/drawing/2014/main" val="660374795"/>
-                    </a:ext>
-                  </a:extLst>
-                </a:gridCol>
-                <a:gridCol w="3303248">
-                  <a:extLst>
-                    <a:ext uri="{9D8B030D-6E8A-4147-A177-3AD203B41FA5}">
-                      <a16:colId xmlns:a16="http://schemas.microsoft.com/office/drawing/2014/main" val="2499190507"/>
-                    </a:ext>
-                  </a:extLst>
-                </a:gridCol>
-                <a:gridCol w="2713383">
-                  <a:extLst>
-                    <a:ext uri="{9D8B030D-6E8A-4147-A177-3AD203B41FA5}">
-                      <a16:colId xmlns:a16="http://schemas.microsoft.com/office/drawing/2014/main" val="654812552"/>
-                    </a:ext>
-                  </a:extLst>
-                </a:gridCol>
-              </a:tblGrid>
-              <a:tr h="188134">
-                <a:tc>
-                  <a:txBody>
-                    <a:bodyPr/>
-                    <a:lstStyle/>
-                    <a:p>
-                      <a:pPr rtl="0">
-                        <a:buNone/>
-                      </a:pPr>
-                      <a:r>
-                        <a:rPr lang="en-GB" sz="1000" b="1">
-                          <a:solidFill>
-                            <a:srgbClr val="1F1F1F"/>
-                          </a:solidFill>
-                          <a:effectLst/>
-                          <a:latin typeface="Times New Roman" panose="02020603050405020304" pitchFamily="18" charset="0"/>
-                          <a:cs typeface="Times New Roman" panose="02020603050405020304" pitchFamily="18" charset="0"/>
-                        </a:rPr>
-                        <a:t>Research Paper</a:t>
-                      </a:r>
-                      <a:endParaRPr lang="en-GB" sz="1000">
-                        <a:solidFill>
-                          <a:srgbClr val="1F1F1F"/>
-                        </a:solidFill>
-                        <a:effectLst/>
-                        <a:latin typeface="Times New Roman" panose="02020603050405020304" pitchFamily="18" charset="0"/>
-                        <a:cs typeface="Times New Roman" panose="02020603050405020304" pitchFamily="18" charset="0"/>
-                      </a:endParaRPr>
-                    </a:p>
-                  </a:txBody>
-                  <a:tcPr marL="22047" marR="22047" marT="14698" marB="14698" anchor="ctr">
-                    <a:lnL w="12700" cap="flat" cmpd="sng" algn="ctr">
-                      <a:solidFill>
-                        <a:schemeClr val="tx1"/>
-                      </a:solidFill>
-                      <a:prstDash val="solid"/>
-                      <a:round/>
-                      <a:headEnd type="none" w="med" len="med"/>
-                      <a:tailEnd type="none" w="med" len="med"/>
-                    </a:lnL>
-                    <a:lnR w="12700" cap="flat" cmpd="sng" algn="ctr">
-                      <a:solidFill>
-                        <a:schemeClr val="tx1"/>
-                      </a:solidFill>
-                      <a:prstDash val="solid"/>
-                      <a:round/>
-                      <a:headEnd type="none" w="med" len="med"/>
-                      <a:tailEnd type="none" w="med" len="med"/>
-                    </a:lnR>
-                    <a:lnT w="12700" cap="flat" cmpd="sng" algn="ctr">
-                      <a:solidFill>
-                        <a:schemeClr val="tx1"/>
-                      </a:solidFill>
-                      <a:prstDash val="solid"/>
-                      <a:round/>
-                      <a:headEnd type="none" w="med" len="med"/>
-                      <a:tailEnd type="none" w="med" len="med"/>
-                    </a:lnT>
-                    <a:lnB w="12700" cap="flat" cmpd="sng" algn="ctr">
-                      <a:solidFill>
-                        <a:schemeClr val="tx1"/>
-                      </a:solidFill>
-                      <a:prstDash val="solid"/>
-                      <a:round/>
-                      <a:headEnd type="none" w="med" len="med"/>
-                      <a:tailEnd type="none" w="med" len="med"/>
-                    </a:lnB>
-                    <a:noFill/>
-                  </a:tcPr>
-                </a:tc>
-                <a:tc>
-                  <a:txBody>
-                    <a:bodyPr/>
-                    <a:lstStyle/>
-                    <a:p>
-                      <a:pPr rtl="0">
-                        <a:buNone/>
-                      </a:pPr>
-                      <a:r>
-                        <a:rPr lang="en-GB" sz="1000" b="1" dirty="0">
-                          <a:solidFill>
-                            <a:srgbClr val="1F1F1F"/>
-                          </a:solidFill>
-                          <a:effectLst/>
-                          <a:latin typeface="Times New Roman" panose="02020603050405020304" pitchFamily="18" charset="0"/>
-                          <a:cs typeface="Times New Roman" panose="02020603050405020304" pitchFamily="18" charset="0"/>
-                        </a:rPr>
-                        <a:t>Identified Gap</a:t>
-                      </a:r>
-                      <a:endParaRPr lang="en-GB" sz="1000" dirty="0">
-                        <a:solidFill>
-                          <a:srgbClr val="1F1F1F"/>
-                        </a:solidFill>
-                        <a:effectLst/>
-                        <a:latin typeface="Times New Roman" panose="02020603050405020304" pitchFamily="18" charset="0"/>
-                        <a:cs typeface="Times New Roman" panose="02020603050405020304" pitchFamily="18" charset="0"/>
-                      </a:endParaRPr>
-                    </a:p>
-                  </a:txBody>
-                  <a:tcPr marL="22047" marR="22047" marT="14698" marB="14698" anchor="ctr">
-                    <a:lnL w="12700" cap="flat" cmpd="sng" algn="ctr">
-                      <a:solidFill>
-                        <a:schemeClr val="tx1"/>
-                      </a:solidFill>
-                      <a:prstDash val="solid"/>
-                      <a:round/>
-                      <a:headEnd type="none" w="med" len="med"/>
-                      <a:tailEnd type="none" w="med" len="med"/>
-                    </a:lnL>
-                    <a:lnR w="12700" cap="flat" cmpd="sng" algn="ctr">
-                      <a:solidFill>
-                        <a:schemeClr val="tx1"/>
-                      </a:solidFill>
-                      <a:prstDash val="solid"/>
-                      <a:round/>
-                      <a:headEnd type="none" w="med" len="med"/>
-                      <a:tailEnd type="none" w="med" len="med"/>
-                    </a:lnR>
-                    <a:lnT w="12700" cap="flat" cmpd="sng" algn="ctr">
-                      <a:solidFill>
-                        <a:schemeClr val="tx1"/>
-                      </a:solidFill>
-                      <a:prstDash val="solid"/>
-                      <a:round/>
-                      <a:headEnd type="none" w="med" len="med"/>
-                      <a:tailEnd type="none" w="med" len="med"/>
-                    </a:lnT>
-                    <a:lnB w="12700" cap="flat" cmpd="sng" algn="ctr">
-                      <a:solidFill>
-                        <a:schemeClr val="tx1"/>
-                      </a:solidFill>
-                      <a:prstDash val="solid"/>
-                      <a:round/>
-                      <a:headEnd type="none" w="med" len="med"/>
-                      <a:tailEnd type="none" w="med" len="med"/>
-                    </a:lnB>
-                    <a:noFill/>
-                  </a:tcPr>
-                </a:tc>
-                <a:tc>
-                  <a:txBody>
-                    <a:bodyPr/>
-                    <a:lstStyle/>
-                    <a:p>
-                      <a:pPr rtl="0">
-                        <a:buNone/>
-                      </a:pPr>
-                      <a:r>
-                        <a:rPr lang="en-GB" sz="1000" b="1">
-                          <a:solidFill>
-                            <a:srgbClr val="1F1F1F"/>
-                          </a:solidFill>
-                          <a:effectLst/>
-                          <a:latin typeface="Times New Roman" panose="02020603050405020304" pitchFamily="18" charset="0"/>
-                          <a:cs typeface="Times New Roman" panose="02020603050405020304" pitchFamily="18" charset="0"/>
-                        </a:rPr>
-                        <a:t>How Your Project Overcomes It</a:t>
-                      </a:r>
-                      <a:endParaRPr lang="en-GB" sz="1000">
-                        <a:solidFill>
-                          <a:srgbClr val="1F1F1F"/>
-                        </a:solidFill>
-                        <a:effectLst/>
-                        <a:latin typeface="Times New Roman" panose="02020603050405020304" pitchFamily="18" charset="0"/>
-                        <a:cs typeface="Times New Roman" panose="02020603050405020304" pitchFamily="18" charset="0"/>
-                      </a:endParaRPr>
-                    </a:p>
-                  </a:txBody>
-                  <a:tcPr marL="22047" marR="22047" marT="14698" marB="14698" anchor="ctr">
-                    <a:lnL w="12700" cap="flat" cmpd="sng" algn="ctr">
-                      <a:solidFill>
-                        <a:schemeClr val="tx1"/>
-                      </a:solidFill>
-                      <a:prstDash val="solid"/>
-                      <a:round/>
-                      <a:headEnd type="none" w="med" len="med"/>
-                      <a:tailEnd type="none" w="med" len="med"/>
-                    </a:lnL>
-                    <a:lnR w="12700" cap="flat" cmpd="sng" algn="ctr">
-                      <a:solidFill>
-                        <a:schemeClr val="tx1"/>
-                      </a:solidFill>
-                      <a:prstDash val="solid"/>
-                      <a:round/>
-                      <a:headEnd type="none" w="med" len="med"/>
-                      <a:tailEnd type="none" w="med" len="med"/>
-                    </a:lnR>
-                    <a:lnT w="12700" cap="flat" cmpd="sng" algn="ctr">
-                      <a:solidFill>
-                        <a:schemeClr val="tx1"/>
-                      </a:solidFill>
-                      <a:prstDash val="solid"/>
-                      <a:round/>
-                      <a:headEnd type="none" w="med" len="med"/>
-                      <a:tailEnd type="none" w="med" len="med"/>
-                    </a:lnT>
-                    <a:lnB w="12700" cap="flat" cmpd="sng" algn="ctr">
-                      <a:solidFill>
-                        <a:schemeClr val="tx1"/>
-                      </a:solidFill>
-                      <a:prstDash val="solid"/>
-                      <a:round/>
-                      <a:headEnd type="none" w="med" len="med"/>
-                      <a:tailEnd type="none" w="med" len="med"/>
-                    </a:lnB>
-                    <a:noFill/>
-                  </a:tcPr>
-                </a:tc>
-                <a:extLst>
-                  <a:ext uri="{0D108BD9-81ED-4DB2-BD59-A6C34878D82A}">
-                    <a16:rowId xmlns:a16="http://schemas.microsoft.com/office/drawing/2014/main" val="2958437566"/>
-                  </a:ext>
-                </a:extLst>
-              </a:tr>
-              <a:tr h="426242">
-                <a:tc>
-                  <a:txBody>
-                    <a:bodyPr/>
-                    <a:lstStyle/>
-                    <a:p>
-                      <a:pPr rtl="0">
-                        <a:buNone/>
-                      </a:pPr>
-                      <a:r>
-                        <a:rPr lang="fr-FR" sz="1000" b="1" dirty="0">
-                          <a:solidFill>
-                            <a:srgbClr val="1F1F1F"/>
-                          </a:solidFill>
-                          <a:effectLst/>
-                          <a:latin typeface="Times New Roman" panose="02020603050405020304" pitchFamily="18" charset="0"/>
-                          <a:cs typeface="Times New Roman" panose="02020603050405020304" pitchFamily="18" charset="0"/>
-                        </a:rPr>
-                        <a:t>Paper 1 &amp; 4 (QR Attendance)</a:t>
-                      </a:r>
-                      <a:endParaRPr lang="fr-FR" sz="1000" dirty="0">
-                        <a:solidFill>
-                          <a:srgbClr val="1F1F1F"/>
-                        </a:solidFill>
-                        <a:effectLst/>
-                        <a:latin typeface="Times New Roman" panose="02020603050405020304" pitchFamily="18" charset="0"/>
-                        <a:cs typeface="Times New Roman" panose="02020603050405020304" pitchFamily="18" charset="0"/>
-                      </a:endParaRPr>
-                    </a:p>
-                  </a:txBody>
-                  <a:tcPr marL="22047" marR="22047" marT="14698" marB="14698" anchor="ctr">
-                    <a:lnL w="12700" cap="flat" cmpd="sng" algn="ctr">
-                      <a:solidFill>
-                        <a:schemeClr val="tx1"/>
-                      </a:solidFill>
-                      <a:prstDash val="solid"/>
-                      <a:round/>
-                      <a:headEnd type="none" w="med" len="med"/>
-                      <a:tailEnd type="none" w="med" len="med"/>
-                    </a:lnL>
-                    <a:lnR w="12700" cap="flat" cmpd="sng" algn="ctr">
-                      <a:solidFill>
-                        <a:schemeClr val="tx1"/>
-                      </a:solidFill>
-                      <a:prstDash val="solid"/>
-                      <a:round/>
-                      <a:headEnd type="none" w="med" len="med"/>
-                      <a:tailEnd type="none" w="med" len="med"/>
-                    </a:lnR>
-                    <a:lnT w="12700" cap="flat" cmpd="sng" algn="ctr">
-                      <a:solidFill>
-                        <a:schemeClr val="tx1"/>
-                      </a:solidFill>
-                      <a:prstDash val="solid"/>
-                      <a:round/>
-                      <a:headEnd type="none" w="med" len="med"/>
-                      <a:tailEnd type="none" w="med" len="med"/>
-                    </a:lnT>
-                    <a:lnB w="12700" cap="flat" cmpd="sng" algn="ctr">
-                      <a:solidFill>
-                        <a:schemeClr val="tx1"/>
-                      </a:solidFill>
-                      <a:prstDash val="solid"/>
-                      <a:round/>
-                      <a:headEnd type="none" w="med" len="med"/>
-                      <a:tailEnd type="none" w="med" len="med"/>
-                    </a:lnB>
-                    <a:noFill/>
-                  </a:tcPr>
-                </a:tc>
-                <a:tc>
-                  <a:txBody>
-                    <a:bodyPr/>
-                    <a:lstStyle/>
-                    <a:p>
-                      <a:pPr rtl="0">
-                        <a:buNone/>
-                      </a:pPr>
-                      <a:r>
-                        <a:rPr lang="en-GB" sz="1000" b="1" dirty="0">
-                          <a:solidFill>
-                            <a:srgbClr val="1F1F1F"/>
-                          </a:solidFill>
-                          <a:effectLst/>
-                          <a:latin typeface="Times New Roman" panose="02020603050405020304" pitchFamily="18" charset="0"/>
-                          <a:cs typeface="Times New Roman" panose="02020603050405020304" pitchFamily="18" charset="0"/>
-                        </a:rPr>
-                        <a:t>Single-Mode Reliance:</a:t>
-                      </a:r>
-                      <a:r>
-                        <a:rPr lang="en-GB" sz="1000" dirty="0">
-                          <a:solidFill>
-                            <a:srgbClr val="1F1F1F"/>
-                          </a:solidFill>
-                          <a:effectLst/>
-                          <a:latin typeface="Times New Roman" panose="02020603050405020304" pitchFamily="18" charset="0"/>
-                          <a:cs typeface="Times New Roman" panose="02020603050405020304" pitchFamily="18" charset="0"/>
-                        </a:rPr>
-                        <a:t> Systems fail if a student’s camera breaks or QR fails to load.</a:t>
-                      </a:r>
-                    </a:p>
-                  </a:txBody>
-                  <a:tcPr marL="22047" marR="22047" marT="14698" marB="14698" anchor="ctr">
-                    <a:lnL w="12700" cap="flat" cmpd="sng" algn="ctr">
-                      <a:solidFill>
-                        <a:schemeClr val="tx1"/>
-                      </a:solidFill>
-                      <a:prstDash val="solid"/>
-                      <a:round/>
-                      <a:headEnd type="none" w="med" len="med"/>
-                      <a:tailEnd type="none" w="med" len="med"/>
-                    </a:lnL>
-                    <a:lnR w="12700" cap="flat" cmpd="sng" algn="ctr">
-                      <a:solidFill>
-                        <a:schemeClr val="tx1"/>
-                      </a:solidFill>
-                      <a:prstDash val="solid"/>
-                      <a:round/>
-                      <a:headEnd type="none" w="med" len="med"/>
-                      <a:tailEnd type="none" w="med" len="med"/>
-                    </a:lnR>
-                    <a:lnT w="12700" cap="flat" cmpd="sng" algn="ctr">
-                      <a:solidFill>
-                        <a:schemeClr val="tx1"/>
-                      </a:solidFill>
-                      <a:prstDash val="solid"/>
-                      <a:round/>
-                      <a:headEnd type="none" w="med" len="med"/>
-                      <a:tailEnd type="none" w="med" len="med"/>
-                    </a:lnT>
-                    <a:lnB w="12700" cap="flat" cmpd="sng" algn="ctr">
-                      <a:solidFill>
-                        <a:schemeClr val="tx1"/>
-                      </a:solidFill>
-                      <a:prstDash val="solid"/>
-                      <a:round/>
-                      <a:headEnd type="none" w="med" len="med"/>
-                      <a:tailEnd type="none" w="med" len="med"/>
-                    </a:lnB>
-                    <a:noFill/>
-                  </a:tcPr>
-                </a:tc>
-                <a:tc>
-                  <a:txBody>
-                    <a:bodyPr/>
-                    <a:lstStyle/>
-                    <a:p>
-                      <a:pPr rtl="0">
-                        <a:buNone/>
-                      </a:pPr>
-                      <a:r>
-                        <a:rPr lang="en-GB" sz="1000" b="1">
-                          <a:solidFill>
-                            <a:srgbClr val="1F1F1F"/>
-                          </a:solidFill>
-                          <a:effectLst/>
-                          <a:latin typeface="Times New Roman" panose="02020603050405020304" pitchFamily="18" charset="0"/>
-                          <a:cs typeface="Times New Roman" panose="02020603050405020304" pitchFamily="18" charset="0"/>
-                        </a:rPr>
-                        <a:t>Dual-Mode System:</a:t>
-                      </a:r>
-                      <a:r>
-                        <a:rPr lang="en-GB" sz="1000">
-                          <a:solidFill>
-                            <a:srgbClr val="1F1F1F"/>
-                          </a:solidFill>
-                          <a:effectLst/>
-                          <a:latin typeface="Times New Roman" panose="02020603050405020304" pitchFamily="18" charset="0"/>
-                          <a:cs typeface="Times New Roman" panose="02020603050405020304" pitchFamily="18" charset="0"/>
-                        </a:rPr>
-                        <a:t> You provide QR scanning AND manual roll-call backup for Faculty.</a:t>
-                      </a:r>
-                    </a:p>
-                  </a:txBody>
-                  <a:tcPr marL="22047" marR="22047" marT="14698" marB="14698" anchor="ctr">
-                    <a:lnL w="12700" cap="flat" cmpd="sng" algn="ctr">
-                      <a:solidFill>
-                        <a:schemeClr val="tx1"/>
-                      </a:solidFill>
-                      <a:prstDash val="solid"/>
-                      <a:round/>
-                      <a:headEnd type="none" w="med" len="med"/>
-                      <a:tailEnd type="none" w="med" len="med"/>
-                    </a:lnL>
-                    <a:lnR w="12700" cap="flat" cmpd="sng" algn="ctr">
-                      <a:solidFill>
-                        <a:schemeClr val="tx1"/>
-                      </a:solidFill>
-                      <a:prstDash val="solid"/>
-                      <a:round/>
-                      <a:headEnd type="none" w="med" len="med"/>
-                      <a:tailEnd type="none" w="med" len="med"/>
-                    </a:lnR>
-                    <a:lnT w="12700" cap="flat" cmpd="sng" algn="ctr">
-                      <a:solidFill>
-                        <a:schemeClr val="tx1"/>
-                      </a:solidFill>
-                      <a:prstDash val="solid"/>
-                      <a:round/>
-                      <a:headEnd type="none" w="med" len="med"/>
-                      <a:tailEnd type="none" w="med" len="med"/>
-                    </a:lnT>
-                    <a:lnB w="12700" cap="flat" cmpd="sng" algn="ctr">
-                      <a:solidFill>
-                        <a:schemeClr val="tx1"/>
-                      </a:solidFill>
-                      <a:prstDash val="solid"/>
-                      <a:round/>
-                      <a:headEnd type="none" w="med" len="med"/>
-                      <a:tailEnd type="none" w="med" len="med"/>
-                    </a:lnB>
-                    <a:noFill/>
-                  </a:tcPr>
-                </a:tc>
-                <a:extLst>
-                  <a:ext uri="{0D108BD9-81ED-4DB2-BD59-A6C34878D82A}">
-                    <a16:rowId xmlns:a16="http://schemas.microsoft.com/office/drawing/2014/main" val="4230164439"/>
-                  </a:ext>
-                </a:extLst>
-              </a:tr>
-              <a:tr h="426242">
-                <a:tc>
-                  <a:txBody>
-                    <a:bodyPr/>
-                    <a:lstStyle/>
-                    <a:p>
-                      <a:pPr rtl="0">
-                        <a:buNone/>
-                      </a:pPr>
-                      <a:r>
-                        <a:rPr lang="en-GB" sz="1000" b="1">
-                          <a:solidFill>
-                            <a:srgbClr val="1F1F1F"/>
-                          </a:solidFill>
-                          <a:effectLst/>
-                          <a:latin typeface="Times New Roman" panose="02020603050405020304" pitchFamily="18" charset="0"/>
-                          <a:cs typeface="Times New Roman" panose="02020603050405020304" pitchFamily="18" charset="0"/>
-                        </a:rPr>
-                        <a:t>Paper 2 (User Roles)</a:t>
-                      </a:r>
-                      <a:endParaRPr lang="en-GB" sz="1000">
-                        <a:solidFill>
-                          <a:srgbClr val="1F1F1F"/>
-                        </a:solidFill>
-                        <a:effectLst/>
-                        <a:latin typeface="Times New Roman" panose="02020603050405020304" pitchFamily="18" charset="0"/>
-                        <a:cs typeface="Times New Roman" panose="02020603050405020304" pitchFamily="18" charset="0"/>
-                      </a:endParaRPr>
-                    </a:p>
-                  </a:txBody>
-                  <a:tcPr marL="22047" marR="22047" marT="14698" marB="14698" anchor="ctr">
-                    <a:lnL w="12700" cap="flat" cmpd="sng" algn="ctr">
-                      <a:solidFill>
-                        <a:schemeClr val="tx1"/>
-                      </a:solidFill>
-                      <a:prstDash val="solid"/>
-                      <a:round/>
-                      <a:headEnd type="none" w="med" len="med"/>
-                      <a:tailEnd type="none" w="med" len="med"/>
-                    </a:lnL>
-                    <a:lnR w="12700" cap="flat" cmpd="sng" algn="ctr">
-                      <a:solidFill>
-                        <a:schemeClr val="tx1"/>
-                      </a:solidFill>
-                      <a:prstDash val="solid"/>
-                      <a:round/>
-                      <a:headEnd type="none" w="med" len="med"/>
-                      <a:tailEnd type="none" w="med" len="med"/>
-                    </a:lnR>
-                    <a:lnT w="12700" cap="flat" cmpd="sng" algn="ctr">
-                      <a:solidFill>
-                        <a:schemeClr val="tx1"/>
-                      </a:solidFill>
-                      <a:prstDash val="solid"/>
-                      <a:round/>
-                      <a:headEnd type="none" w="med" len="med"/>
-                      <a:tailEnd type="none" w="med" len="med"/>
-                    </a:lnT>
-                    <a:lnB w="12700" cap="flat" cmpd="sng" algn="ctr">
-                      <a:solidFill>
-                        <a:schemeClr val="tx1"/>
-                      </a:solidFill>
-                      <a:prstDash val="solid"/>
-                      <a:round/>
-                      <a:headEnd type="none" w="med" len="med"/>
-                      <a:tailEnd type="none" w="med" len="med"/>
-                    </a:lnB>
-                    <a:noFill/>
-                  </a:tcPr>
-                </a:tc>
-                <a:tc>
-                  <a:txBody>
-                    <a:bodyPr/>
-                    <a:lstStyle/>
-                    <a:p>
-                      <a:pPr rtl="0">
-                        <a:buNone/>
-                      </a:pPr>
-                      <a:r>
-                        <a:rPr lang="en-GB" sz="1000" b="1">
-                          <a:solidFill>
-                            <a:srgbClr val="1F1F1F"/>
-                          </a:solidFill>
-                          <a:effectLst/>
-                          <a:latin typeface="Times New Roman" panose="02020603050405020304" pitchFamily="18" charset="0"/>
-                          <a:cs typeface="Times New Roman" panose="02020603050405020304" pitchFamily="18" charset="0"/>
-                        </a:rPr>
-                        <a:t>Passive Management:</a:t>
-                      </a:r>
-                      <a:r>
-                        <a:rPr lang="en-GB" sz="1000">
-                          <a:solidFill>
-                            <a:srgbClr val="1F1F1F"/>
-                          </a:solidFill>
-                          <a:effectLst/>
-                          <a:latin typeface="Times New Roman" panose="02020603050405020304" pitchFamily="18" charset="0"/>
-                          <a:cs typeface="Times New Roman" panose="02020603050405020304" pitchFamily="18" charset="0"/>
-                        </a:rPr>
-                        <a:t> Systems store data but don't provide tools for active support.</a:t>
-                      </a:r>
-                    </a:p>
-                  </a:txBody>
-                  <a:tcPr marL="22047" marR="22047" marT="14698" marB="14698" anchor="ctr">
-                    <a:lnL w="12700" cap="flat" cmpd="sng" algn="ctr">
-                      <a:solidFill>
-                        <a:schemeClr val="tx1"/>
-                      </a:solidFill>
-                      <a:prstDash val="solid"/>
-                      <a:round/>
-                      <a:headEnd type="none" w="med" len="med"/>
-                      <a:tailEnd type="none" w="med" len="med"/>
-                    </a:lnL>
-                    <a:lnR w="12700" cap="flat" cmpd="sng" algn="ctr">
-                      <a:solidFill>
-                        <a:schemeClr val="tx1"/>
-                      </a:solidFill>
-                      <a:prstDash val="solid"/>
-                      <a:round/>
-                      <a:headEnd type="none" w="med" len="med"/>
-                      <a:tailEnd type="none" w="med" len="med"/>
-                    </a:lnR>
-                    <a:lnT w="12700" cap="flat" cmpd="sng" algn="ctr">
-                      <a:solidFill>
-                        <a:schemeClr val="tx1"/>
-                      </a:solidFill>
-                      <a:prstDash val="solid"/>
-                      <a:round/>
-                      <a:headEnd type="none" w="med" len="med"/>
-                      <a:tailEnd type="none" w="med" len="med"/>
-                    </a:lnT>
-                    <a:lnB w="12700" cap="flat" cmpd="sng" algn="ctr">
-                      <a:solidFill>
-                        <a:schemeClr val="tx1"/>
-                      </a:solidFill>
-                      <a:prstDash val="solid"/>
-                      <a:round/>
-                      <a:headEnd type="none" w="med" len="med"/>
-                      <a:tailEnd type="none" w="med" len="med"/>
-                    </a:lnB>
-                    <a:noFill/>
-                  </a:tcPr>
-                </a:tc>
-                <a:tc>
-                  <a:txBody>
-                    <a:bodyPr/>
-                    <a:lstStyle/>
-                    <a:p>
-                      <a:pPr rtl="0">
-                        <a:buNone/>
-                      </a:pPr>
-                      <a:r>
-                        <a:rPr lang="en-GB" sz="1000" b="1">
-                          <a:solidFill>
-                            <a:srgbClr val="1F1F1F"/>
-                          </a:solidFill>
-                          <a:effectLst/>
-                          <a:latin typeface="Times New Roman" panose="02020603050405020304" pitchFamily="18" charset="0"/>
-                          <a:cs typeface="Times New Roman" panose="02020603050405020304" pitchFamily="18" charset="0"/>
-                        </a:rPr>
-                        <a:t>Active Support:</a:t>
-                      </a:r>
-                      <a:r>
-                        <a:rPr lang="en-GB" sz="1000">
-                          <a:solidFill>
-                            <a:srgbClr val="1F1F1F"/>
-                          </a:solidFill>
-                          <a:effectLst/>
-                          <a:latin typeface="Times New Roman" panose="02020603050405020304" pitchFamily="18" charset="0"/>
-                          <a:cs typeface="Times New Roman" panose="02020603050405020304" pitchFamily="18" charset="0"/>
-                        </a:rPr>
-                        <a:t> Faculty can directly </a:t>
-                      </a:r>
-                      <a:r>
-                        <a:rPr lang="en-GB" sz="1000" b="1">
-                          <a:solidFill>
-                            <a:srgbClr val="1F1F1F"/>
-                          </a:solidFill>
-                          <a:effectLst/>
-                          <a:latin typeface="Times New Roman" panose="02020603050405020304" pitchFamily="18" charset="0"/>
-                          <a:cs typeface="Times New Roman" panose="02020603050405020304" pitchFamily="18" charset="0"/>
-                        </a:rPr>
-                        <a:t>reset student credentials</a:t>
-                      </a:r>
-                      <a:r>
-                        <a:rPr lang="en-GB" sz="1000">
-                          <a:solidFill>
-                            <a:srgbClr val="1F1F1F"/>
-                          </a:solidFill>
-                          <a:effectLst/>
-                          <a:latin typeface="Times New Roman" panose="02020603050405020304" pitchFamily="18" charset="0"/>
-                          <a:cs typeface="Times New Roman" panose="02020603050405020304" pitchFamily="18" charset="0"/>
-                        </a:rPr>
-                        <a:t> and Admin can </a:t>
-                      </a:r>
-                      <a:r>
-                        <a:rPr lang="en-GB" sz="1000" b="1">
-                          <a:solidFill>
-                            <a:srgbClr val="1F1F1F"/>
-                          </a:solidFill>
-                          <a:effectLst/>
-                          <a:latin typeface="Times New Roman" panose="02020603050405020304" pitchFamily="18" charset="0"/>
-                          <a:cs typeface="Times New Roman" panose="02020603050405020304" pitchFamily="18" charset="0"/>
-                        </a:rPr>
-                        <a:t>modify records</a:t>
-                      </a:r>
-                      <a:r>
-                        <a:rPr lang="en-GB" sz="1000">
-                          <a:solidFill>
-                            <a:srgbClr val="1F1F1F"/>
-                          </a:solidFill>
-                          <a:effectLst/>
-                          <a:latin typeface="Times New Roman" panose="02020603050405020304" pitchFamily="18" charset="0"/>
-                          <a:cs typeface="Times New Roman" panose="02020603050405020304" pitchFamily="18" charset="0"/>
-                        </a:rPr>
-                        <a:t>.</a:t>
-                      </a:r>
-                    </a:p>
-                  </a:txBody>
-                  <a:tcPr marL="22047" marR="22047" marT="14698" marB="14698" anchor="ctr">
-                    <a:lnL w="12700" cap="flat" cmpd="sng" algn="ctr">
-                      <a:solidFill>
-                        <a:schemeClr val="tx1"/>
-                      </a:solidFill>
-                      <a:prstDash val="solid"/>
-                      <a:round/>
-                      <a:headEnd type="none" w="med" len="med"/>
-                      <a:tailEnd type="none" w="med" len="med"/>
-                    </a:lnL>
-                    <a:lnR w="12700" cap="flat" cmpd="sng" algn="ctr">
-                      <a:solidFill>
-                        <a:schemeClr val="tx1"/>
-                      </a:solidFill>
-                      <a:prstDash val="solid"/>
-                      <a:round/>
-                      <a:headEnd type="none" w="med" len="med"/>
-                      <a:tailEnd type="none" w="med" len="med"/>
-                    </a:lnR>
-                    <a:lnT w="12700" cap="flat" cmpd="sng" algn="ctr">
-                      <a:solidFill>
-                        <a:schemeClr val="tx1"/>
-                      </a:solidFill>
-                      <a:prstDash val="solid"/>
-                      <a:round/>
-                      <a:headEnd type="none" w="med" len="med"/>
-                      <a:tailEnd type="none" w="med" len="med"/>
-                    </a:lnT>
-                    <a:lnB w="12700" cap="flat" cmpd="sng" algn="ctr">
-                      <a:solidFill>
-                        <a:schemeClr val="tx1"/>
-                      </a:solidFill>
-                      <a:prstDash val="solid"/>
-                      <a:round/>
-                      <a:headEnd type="none" w="med" len="med"/>
-                      <a:tailEnd type="none" w="med" len="med"/>
-                    </a:lnB>
-                    <a:noFill/>
-                  </a:tcPr>
-                </a:tc>
-                <a:extLst>
-                  <a:ext uri="{0D108BD9-81ED-4DB2-BD59-A6C34878D82A}">
-                    <a16:rowId xmlns:a16="http://schemas.microsoft.com/office/drawing/2014/main" val="3639273390"/>
-                  </a:ext>
-                </a:extLst>
-              </a:tr>
-              <a:tr h="426242">
-                <a:tc>
-                  <a:txBody>
-                    <a:bodyPr/>
-                    <a:lstStyle/>
-                    <a:p>
-                      <a:pPr rtl="0">
-                        <a:buNone/>
-                      </a:pPr>
-                      <a:r>
-                        <a:rPr lang="en-GB" sz="1000" b="1">
-                          <a:solidFill>
-                            <a:srgbClr val="1F1F1F"/>
-                          </a:solidFill>
-                          <a:effectLst/>
-                          <a:latin typeface="Times New Roman" panose="02020603050405020304" pitchFamily="18" charset="0"/>
-                          <a:cs typeface="Times New Roman" panose="02020603050405020304" pitchFamily="18" charset="0"/>
-                        </a:rPr>
-                        <a:t>Paper 3 (Gamification)</a:t>
-                      </a:r>
-                      <a:endParaRPr lang="en-GB" sz="1000">
-                        <a:solidFill>
-                          <a:srgbClr val="1F1F1F"/>
-                        </a:solidFill>
-                        <a:effectLst/>
-                        <a:latin typeface="Times New Roman" panose="02020603050405020304" pitchFamily="18" charset="0"/>
-                        <a:cs typeface="Times New Roman" panose="02020603050405020304" pitchFamily="18" charset="0"/>
-                      </a:endParaRPr>
-                    </a:p>
-                  </a:txBody>
-                  <a:tcPr marL="22047" marR="22047" marT="14698" marB="14698" anchor="ctr">
-                    <a:lnL w="12700" cap="flat" cmpd="sng" algn="ctr">
-                      <a:solidFill>
-                        <a:schemeClr val="tx1"/>
-                      </a:solidFill>
-                      <a:prstDash val="solid"/>
-                      <a:round/>
-                      <a:headEnd type="none" w="med" len="med"/>
-                      <a:tailEnd type="none" w="med" len="med"/>
-                    </a:lnL>
-                    <a:lnR w="12700" cap="flat" cmpd="sng" algn="ctr">
-                      <a:solidFill>
-                        <a:schemeClr val="tx1"/>
-                      </a:solidFill>
-                      <a:prstDash val="solid"/>
-                      <a:round/>
-                      <a:headEnd type="none" w="med" len="med"/>
-                      <a:tailEnd type="none" w="med" len="med"/>
-                    </a:lnR>
-                    <a:lnT w="12700" cap="flat" cmpd="sng" algn="ctr">
-                      <a:solidFill>
-                        <a:schemeClr val="tx1"/>
-                      </a:solidFill>
-                      <a:prstDash val="solid"/>
-                      <a:round/>
-                      <a:headEnd type="none" w="med" len="med"/>
-                      <a:tailEnd type="none" w="med" len="med"/>
-                    </a:lnT>
-                    <a:lnB w="12700" cap="flat" cmpd="sng" algn="ctr">
-                      <a:solidFill>
-                        <a:schemeClr val="tx1"/>
-                      </a:solidFill>
-                      <a:prstDash val="solid"/>
-                      <a:round/>
-                      <a:headEnd type="none" w="med" len="med"/>
-                      <a:tailEnd type="none" w="med" len="med"/>
-                    </a:lnB>
-                    <a:noFill/>
-                  </a:tcPr>
-                </a:tc>
-                <a:tc>
-                  <a:txBody>
-                    <a:bodyPr/>
-                    <a:lstStyle/>
-                    <a:p>
-                      <a:pPr rtl="0">
-                        <a:buNone/>
-                      </a:pPr>
-                      <a:r>
-                        <a:rPr lang="en-GB" sz="1000" b="1" dirty="0">
-                          <a:solidFill>
-                            <a:srgbClr val="1F1F1F"/>
-                          </a:solidFill>
-                          <a:effectLst/>
-                          <a:latin typeface="Times New Roman" panose="02020603050405020304" pitchFamily="18" charset="0"/>
-                          <a:cs typeface="Times New Roman" panose="02020603050405020304" pitchFamily="18" charset="0"/>
-                        </a:rPr>
-                        <a:t>Disconnected Engagement:</a:t>
-                      </a:r>
-                      <a:r>
-                        <a:rPr lang="en-GB" sz="1000" dirty="0">
-                          <a:solidFill>
-                            <a:srgbClr val="1F1F1F"/>
-                          </a:solidFill>
-                          <a:effectLst/>
-                          <a:latin typeface="Times New Roman" panose="02020603050405020304" pitchFamily="18" charset="0"/>
-                          <a:cs typeface="Times New Roman" panose="02020603050405020304" pitchFamily="18" charset="0"/>
-                        </a:rPr>
-                        <a:t> Leaderboards are separate from daily admin tasks.</a:t>
-                      </a:r>
-                    </a:p>
-                  </a:txBody>
-                  <a:tcPr marL="22047" marR="22047" marT="14698" marB="14698" anchor="ctr">
-                    <a:lnL w="12700" cap="flat" cmpd="sng" algn="ctr">
-                      <a:solidFill>
-                        <a:schemeClr val="tx1"/>
-                      </a:solidFill>
-                      <a:prstDash val="solid"/>
-                      <a:round/>
-                      <a:headEnd type="none" w="med" len="med"/>
-                      <a:tailEnd type="none" w="med" len="med"/>
-                    </a:lnL>
-                    <a:lnR w="12700" cap="flat" cmpd="sng" algn="ctr">
-                      <a:solidFill>
-                        <a:schemeClr val="tx1"/>
-                      </a:solidFill>
-                      <a:prstDash val="solid"/>
-                      <a:round/>
-                      <a:headEnd type="none" w="med" len="med"/>
-                      <a:tailEnd type="none" w="med" len="med"/>
-                    </a:lnR>
-                    <a:lnT w="12700" cap="flat" cmpd="sng" algn="ctr">
-                      <a:solidFill>
-                        <a:schemeClr val="tx1"/>
-                      </a:solidFill>
-                      <a:prstDash val="solid"/>
-                      <a:round/>
-                      <a:headEnd type="none" w="med" len="med"/>
-                      <a:tailEnd type="none" w="med" len="med"/>
-                    </a:lnT>
-                    <a:lnB w="12700" cap="flat" cmpd="sng" algn="ctr">
-                      <a:solidFill>
-                        <a:schemeClr val="tx1"/>
-                      </a:solidFill>
-                      <a:prstDash val="solid"/>
-                      <a:round/>
-                      <a:headEnd type="none" w="med" len="med"/>
-                      <a:tailEnd type="none" w="med" len="med"/>
-                    </a:lnB>
-                    <a:noFill/>
-                  </a:tcPr>
-                </a:tc>
-                <a:tc>
-                  <a:txBody>
-                    <a:bodyPr/>
-                    <a:lstStyle/>
-                    <a:p>
-                      <a:pPr rtl="0">
-                        <a:buNone/>
-                      </a:pPr>
-                      <a:r>
-                        <a:rPr lang="en-GB" sz="1000" b="1">
-                          <a:solidFill>
-                            <a:srgbClr val="1F1F1F"/>
-                          </a:solidFill>
-                          <a:effectLst/>
-                          <a:latin typeface="Times New Roman" panose="02020603050405020304" pitchFamily="18" charset="0"/>
-                          <a:cs typeface="Times New Roman" panose="02020603050405020304" pitchFamily="18" charset="0"/>
-                        </a:rPr>
-                        <a:t>Integrated Dashboard:</a:t>
-                      </a:r>
-                      <a:r>
-                        <a:rPr lang="en-GB" sz="1000">
-                          <a:solidFill>
-                            <a:srgbClr val="1F1F1F"/>
-                          </a:solidFill>
-                          <a:effectLst/>
-                          <a:latin typeface="Times New Roman" panose="02020603050405020304" pitchFamily="18" charset="0"/>
-                          <a:cs typeface="Times New Roman" panose="02020603050405020304" pitchFamily="18" charset="0"/>
-                        </a:rPr>
-                        <a:t> Coding scores and leaderboards are part of the daily Student/Faculty view.</a:t>
-                      </a:r>
-                    </a:p>
-                  </a:txBody>
-                  <a:tcPr marL="22047" marR="22047" marT="14698" marB="14698" anchor="ctr">
-                    <a:lnL w="12700" cap="flat" cmpd="sng" algn="ctr">
-                      <a:solidFill>
-                        <a:schemeClr val="tx1"/>
-                      </a:solidFill>
-                      <a:prstDash val="solid"/>
-                      <a:round/>
-                      <a:headEnd type="none" w="med" len="med"/>
-                      <a:tailEnd type="none" w="med" len="med"/>
-                    </a:lnL>
-                    <a:lnR w="12700" cap="flat" cmpd="sng" algn="ctr">
-                      <a:solidFill>
-                        <a:schemeClr val="tx1"/>
-                      </a:solidFill>
-                      <a:prstDash val="solid"/>
-                      <a:round/>
-                      <a:headEnd type="none" w="med" len="med"/>
-                      <a:tailEnd type="none" w="med" len="med"/>
-                    </a:lnR>
-                    <a:lnT w="12700" cap="flat" cmpd="sng" algn="ctr">
-                      <a:solidFill>
-                        <a:schemeClr val="tx1"/>
-                      </a:solidFill>
-                      <a:prstDash val="solid"/>
-                      <a:round/>
-                      <a:headEnd type="none" w="med" len="med"/>
-                      <a:tailEnd type="none" w="med" len="med"/>
-                    </a:lnT>
-                    <a:lnB w="12700" cap="flat" cmpd="sng" algn="ctr">
-                      <a:solidFill>
-                        <a:schemeClr val="tx1"/>
-                      </a:solidFill>
-                      <a:prstDash val="solid"/>
-                      <a:round/>
-                      <a:headEnd type="none" w="med" len="med"/>
-                      <a:tailEnd type="none" w="med" len="med"/>
-                    </a:lnB>
-                    <a:noFill/>
-                  </a:tcPr>
-                </a:tc>
-                <a:extLst>
-                  <a:ext uri="{0D108BD9-81ED-4DB2-BD59-A6C34878D82A}">
-                    <a16:rowId xmlns:a16="http://schemas.microsoft.com/office/drawing/2014/main" val="2148458217"/>
-                  </a:ext>
-                </a:extLst>
-              </a:tr>
-              <a:tr h="426242">
-                <a:tc>
-                  <a:txBody>
-                    <a:bodyPr/>
-                    <a:lstStyle/>
-                    <a:p>
-                      <a:pPr rtl="0">
-                        <a:buNone/>
-                      </a:pPr>
-                      <a:r>
-                        <a:rPr lang="en-GB" sz="1000" b="1">
-                          <a:solidFill>
-                            <a:srgbClr val="1F1F1F"/>
-                          </a:solidFill>
-                          <a:effectLst/>
-                          <a:latin typeface="Times New Roman" panose="02020603050405020304" pitchFamily="18" charset="0"/>
-                          <a:cs typeface="Times New Roman" panose="02020603050405020304" pitchFamily="18" charset="0"/>
-                        </a:rPr>
-                        <a:t>Paper 5 (Timetabling)</a:t>
-                      </a:r>
-                      <a:endParaRPr lang="en-GB" sz="1000">
-                        <a:solidFill>
-                          <a:srgbClr val="1F1F1F"/>
-                        </a:solidFill>
-                        <a:effectLst/>
-                        <a:latin typeface="Times New Roman" panose="02020603050405020304" pitchFamily="18" charset="0"/>
-                        <a:cs typeface="Times New Roman" panose="02020603050405020304" pitchFamily="18" charset="0"/>
-                      </a:endParaRPr>
-                    </a:p>
-                  </a:txBody>
-                  <a:tcPr marL="22047" marR="22047" marT="14698" marB="14698" anchor="ctr">
-                    <a:lnL w="12700" cap="flat" cmpd="sng" algn="ctr">
-                      <a:solidFill>
-                        <a:schemeClr val="tx1"/>
-                      </a:solidFill>
-                      <a:prstDash val="solid"/>
-                      <a:round/>
-                      <a:headEnd type="none" w="med" len="med"/>
-                      <a:tailEnd type="none" w="med" len="med"/>
-                    </a:lnL>
-                    <a:lnR w="12700" cap="flat" cmpd="sng" algn="ctr">
-                      <a:solidFill>
-                        <a:schemeClr val="tx1"/>
-                      </a:solidFill>
-                      <a:prstDash val="solid"/>
-                      <a:round/>
-                      <a:headEnd type="none" w="med" len="med"/>
-                      <a:tailEnd type="none" w="med" len="med"/>
-                    </a:lnR>
-                    <a:lnT w="12700" cap="flat" cmpd="sng" algn="ctr">
-                      <a:solidFill>
-                        <a:schemeClr val="tx1"/>
-                      </a:solidFill>
-                      <a:prstDash val="solid"/>
-                      <a:round/>
-                      <a:headEnd type="none" w="med" len="med"/>
-                      <a:tailEnd type="none" w="med" len="med"/>
-                    </a:lnT>
-                    <a:lnB w="12700" cap="flat" cmpd="sng" algn="ctr">
-                      <a:solidFill>
-                        <a:schemeClr val="tx1"/>
-                      </a:solidFill>
-                      <a:prstDash val="solid"/>
-                      <a:round/>
-                      <a:headEnd type="none" w="med" len="med"/>
-                      <a:tailEnd type="none" w="med" len="med"/>
-                    </a:lnB>
-                    <a:noFill/>
-                  </a:tcPr>
-                </a:tc>
-                <a:tc>
-                  <a:txBody>
-                    <a:bodyPr/>
-                    <a:lstStyle/>
-                    <a:p>
-                      <a:pPr rtl="0">
-                        <a:buNone/>
-                      </a:pPr>
-                      <a:r>
-                        <a:rPr lang="en-GB" sz="1000" b="1">
-                          <a:solidFill>
-                            <a:srgbClr val="1F1F1F"/>
-                          </a:solidFill>
-                          <a:effectLst/>
-                          <a:latin typeface="Times New Roman" panose="02020603050405020304" pitchFamily="18" charset="0"/>
-                          <a:cs typeface="Times New Roman" panose="02020603050405020304" pitchFamily="18" charset="0"/>
-                        </a:rPr>
-                        <a:t>Fragmented Schedules:</a:t>
-                      </a:r>
-                      <a:r>
-                        <a:rPr lang="en-GB" sz="1000">
-                          <a:solidFill>
-                            <a:srgbClr val="1F1F1F"/>
-                          </a:solidFill>
-                          <a:effectLst/>
-                          <a:latin typeface="Times New Roman" panose="02020603050405020304" pitchFamily="18" charset="0"/>
-                          <a:cs typeface="Times New Roman" panose="02020603050405020304" pitchFamily="18" charset="0"/>
-                        </a:rPr>
-                        <a:t> No centralized "Master View" for the institution.</a:t>
-                      </a:r>
-                    </a:p>
-                  </a:txBody>
-                  <a:tcPr marL="22047" marR="22047" marT="14698" marB="14698" anchor="ctr">
-                    <a:lnL w="12700" cap="flat" cmpd="sng" algn="ctr">
-                      <a:solidFill>
-                        <a:schemeClr val="tx1"/>
-                      </a:solidFill>
-                      <a:prstDash val="solid"/>
-                      <a:round/>
-                      <a:headEnd type="none" w="med" len="med"/>
-                      <a:tailEnd type="none" w="med" len="med"/>
-                    </a:lnL>
-                    <a:lnR w="12700" cap="flat" cmpd="sng" algn="ctr">
-                      <a:solidFill>
-                        <a:schemeClr val="tx1"/>
-                      </a:solidFill>
-                      <a:prstDash val="solid"/>
-                      <a:round/>
-                      <a:headEnd type="none" w="med" len="med"/>
-                      <a:tailEnd type="none" w="med" len="med"/>
-                    </a:lnR>
-                    <a:lnT w="12700" cap="flat" cmpd="sng" algn="ctr">
-                      <a:solidFill>
-                        <a:schemeClr val="tx1"/>
-                      </a:solidFill>
-                      <a:prstDash val="solid"/>
-                      <a:round/>
-                      <a:headEnd type="none" w="med" len="med"/>
-                      <a:tailEnd type="none" w="med" len="med"/>
-                    </a:lnT>
-                    <a:lnB w="12700" cap="flat" cmpd="sng" algn="ctr">
-                      <a:solidFill>
-                        <a:schemeClr val="tx1"/>
-                      </a:solidFill>
-                      <a:prstDash val="solid"/>
-                      <a:round/>
-                      <a:headEnd type="none" w="med" len="med"/>
-                      <a:tailEnd type="none" w="med" len="med"/>
-                    </a:lnB>
-                    <a:noFill/>
-                  </a:tcPr>
-                </a:tc>
-                <a:tc>
-                  <a:txBody>
-                    <a:bodyPr/>
-                    <a:lstStyle/>
-                    <a:p>
-                      <a:pPr rtl="0">
-                        <a:buNone/>
-                      </a:pPr>
-                      <a:r>
-                        <a:rPr lang="en-GB" sz="1000" b="1">
-                          <a:solidFill>
-                            <a:srgbClr val="1F1F1F"/>
-                          </a:solidFill>
-                          <a:effectLst/>
-                          <a:latin typeface="Times New Roman" panose="02020603050405020304" pitchFamily="18" charset="0"/>
-                          <a:cs typeface="Times New Roman" panose="02020603050405020304" pitchFamily="18" charset="0"/>
-                        </a:rPr>
-                        <a:t>Master Timetable:</a:t>
-                      </a:r>
-                      <a:r>
-                        <a:rPr lang="en-GB" sz="1000">
-                          <a:solidFill>
-                            <a:srgbClr val="1F1F1F"/>
-                          </a:solidFill>
-                          <a:effectLst/>
-                          <a:latin typeface="Times New Roman" panose="02020603050405020304" pitchFamily="18" charset="0"/>
-                          <a:cs typeface="Times New Roman" panose="02020603050405020304" pitchFamily="18" charset="0"/>
-                        </a:rPr>
-                        <a:t> Admin has a global view of all classes, while users see personalized schedules.</a:t>
-                      </a:r>
-                    </a:p>
-                  </a:txBody>
-                  <a:tcPr marL="22047" marR="22047" marT="14698" marB="14698" anchor="ctr">
-                    <a:lnL w="12700" cap="flat" cmpd="sng" algn="ctr">
-                      <a:solidFill>
-                        <a:schemeClr val="tx1"/>
-                      </a:solidFill>
-                      <a:prstDash val="solid"/>
-                      <a:round/>
-                      <a:headEnd type="none" w="med" len="med"/>
-                      <a:tailEnd type="none" w="med" len="med"/>
-                    </a:lnL>
-                    <a:lnR w="12700" cap="flat" cmpd="sng" algn="ctr">
-                      <a:solidFill>
-                        <a:schemeClr val="tx1"/>
-                      </a:solidFill>
-                      <a:prstDash val="solid"/>
-                      <a:round/>
-                      <a:headEnd type="none" w="med" len="med"/>
-                      <a:tailEnd type="none" w="med" len="med"/>
-                    </a:lnR>
-                    <a:lnT w="12700" cap="flat" cmpd="sng" algn="ctr">
-                      <a:solidFill>
-                        <a:schemeClr val="tx1"/>
-                      </a:solidFill>
-                      <a:prstDash val="solid"/>
-                      <a:round/>
-                      <a:headEnd type="none" w="med" len="med"/>
-                      <a:tailEnd type="none" w="med" len="med"/>
-                    </a:lnT>
-                    <a:lnB w="12700" cap="flat" cmpd="sng" algn="ctr">
-                      <a:solidFill>
-                        <a:schemeClr val="tx1"/>
-                      </a:solidFill>
-                      <a:prstDash val="solid"/>
-                      <a:round/>
-                      <a:headEnd type="none" w="med" len="med"/>
-                      <a:tailEnd type="none" w="med" len="med"/>
-                    </a:lnB>
-                    <a:noFill/>
-                  </a:tcPr>
-                </a:tc>
-                <a:extLst>
-                  <a:ext uri="{0D108BD9-81ED-4DB2-BD59-A6C34878D82A}">
-                    <a16:rowId xmlns:a16="http://schemas.microsoft.com/office/drawing/2014/main" val="1708199307"/>
-                  </a:ext>
-                </a:extLst>
-              </a:tr>
-              <a:tr h="426242">
-                <a:tc>
-                  <a:txBody>
-                    <a:bodyPr/>
-                    <a:lstStyle/>
-                    <a:p>
-                      <a:pPr rtl="0">
-                        <a:buNone/>
-                      </a:pPr>
-                      <a:r>
-                        <a:rPr lang="en-GB" sz="1000" b="1">
-                          <a:solidFill>
-                            <a:srgbClr val="1F1F1F"/>
-                          </a:solidFill>
-                          <a:effectLst/>
-                          <a:latin typeface="Times New Roman" panose="02020603050405020304" pitchFamily="18" charset="0"/>
-                          <a:cs typeface="Times New Roman" panose="02020603050405020304" pitchFamily="18" charset="0"/>
-                        </a:rPr>
-                        <a:t>Paper 6 (Coding Analytics)</a:t>
-                      </a:r>
-                      <a:endParaRPr lang="en-GB" sz="1000">
-                        <a:solidFill>
-                          <a:srgbClr val="1F1F1F"/>
-                        </a:solidFill>
-                        <a:effectLst/>
-                        <a:latin typeface="Times New Roman" panose="02020603050405020304" pitchFamily="18" charset="0"/>
-                        <a:cs typeface="Times New Roman" panose="02020603050405020304" pitchFamily="18" charset="0"/>
-                      </a:endParaRPr>
-                    </a:p>
-                  </a:txBody>
-                  <a:tcPr marL="22047" marR="22047" marT="14698" marB="14698" anchor="ctr">
-                    <a:lnL w="12700" cap="flat" cmpd="sng" algn="ctr">
-                      <a:solidFill>
-                        <a:schemeClr val="tx1"/>
-                      </a:solidFill>
-                      <a:prstDash val="solid"/>
-                      <a:round/>
-                      <a:headEnd type="none" w="med" len="med"/>
-                      <a:tailEnd type="none" w="med" len="med"/>
-                    </a:lnL>
-                    <a:lnR w="12700" cap="flat" cmpd="sng" algn="ctr">
-                      <a:solidFill>
-                        <a:schemeClr val="tx1"/>
-                      </a:solidFill>
-                      <a:prstDash val="solid"/>
-                      <a:round/>
-                      <a:headEnd type="none" w="med" len="med"/>
-                      <a:tailEnd type="none" w="med" len="med"/>
-                    </a:lnR>
-                    <a:lnT w="12700" cap="flat" cmpd="sng" algn="ctr">
-                      <a:solidFill>
-                        <a:schemeClr val="tx1"/>
-                      </a:solidFill>
-                      <a:prstDash val="solid"/>
-                      <a:round/>
-                      <a:headEnd type="none" w="med" len="med"/>
-                      <a:tailEnd type="none" w="med" len="med"/>
-                    </a:lnT>
-                    <a:lnB w="12700" cap="flat" cmpd="sng" algn="ctr">
-                      <a:solidFill>
-                        <a:schemeClr val="tx1"/>
-                      </a:solidFill>
-                      <a:prstDash val="solid"/>
-                      <a:round/>
-                      <a:headEnd type="none" w="med" len="med"/>
-                      <a:tailEnd type="none" w="med" len="med"/>
-                    </a:lnB>
-                    <a:noFill/>
-                  </a:tcPr>
-                </a:tc>
-                <a:tc>
-                  <a:txBody>
-                    <a:bodyPr/>
-                    <a:lstStyle/>
-                    <a:p>
-                      <a:pPr rtl="0">
-                        <a:buNone/>
-                      </a:pPr>
-                      <a:r>
-                        <a:rPr lang="en-GB" sz="1000" b="1">
-                          <a:solidFill>
-                            <a:srgbClr val="1F1F1F"/>
-                          </a:solidFill>
-                          <a:effectLst/>
-                          <a:latin typeface="Times New Roman" panose="02020603050405020304" pitchFamily="18" charset="0"/>
-                          <a:cs typeface="Times New Roman" panose="02020603050405020304" pitchFamily="18" charset="0"/>
-                        </a:rPr>
-                        <a:t>Data Silos:</a:t>
-                      </a:r>
-                      <a:r>
-                        <a:rPr lang="en-GB" sz="1000">
-                          <a:solidFill>
-                            <a:srgbClr val="1F1F1F"/>
-                          </a:solidFill>
-                          <a:effectLst/>
-                          <a:latin typeface="Times New Roman" panose="02020603050405020304" pitchFamily="18" charset="0"/>
-                          <a:cs typeface="Times New Roman" panose="02020603050405020304" pitchFamily="18" charset="0"/>
-                        </a:rPr>
-                        <a:t> Attendance and coding performance are not analyzed together.</a:t>
-                      </a:r>
-                    </a:p>
-                  </a:txBody>
-                  <a:tcPr marL="22047" marR="22047" marT="14698" marB="14698" anchor="ctr">
-                    <a:lnL w="12700" cap="flat" cmpd="sng" algn="ctr">
-                      <a:solidFill>
-                        <a:schemeClr val="tx1"/>
-                      </a:solidFill>
-                      <a:prstDash val="solid"/>
-                      <a:round/>
-                      <a:headEnd type="none" w="med" len="med"/>
-                      <a:tailEnd type="none" w="med" len="med"/>
-                    </a:lnL>
-                    <a:lnR w="12700" cap="flat" cmpd="sng" algn="ctr">
-                      <a:solidFill>
-                        <a:schemeClr val="tx1"/>
-                      </a:solidFill>
-                      <a:prstDash val="solid"/>
-                      <a:round/>
-                      <a:headEnd type="none" w="med" len="med"/>
-                      <a:tailEnd type="none" w="med" len="med"/>
-                    </a:lnR>
-                    <a:lnT w="12700" cap="flat" cmpd="sng" algn="ctr">
-                      <a:solidFill>
-                        <a:schemeClr val="tx1"/>
-                      </a:solidFill>
-                      <a:prstDash val="solid"/>
-                      <a:round/>
-                      <a:headEnd type="none" w="med" len="med"/>
-                      <a:tailEnd type="none" w="med" len="med"/>
-                    </a:lnT>
-                    <a:lnB w="12700" cap="flat" cmpd="sng" algn="ctr">
-                      <a:solidFill>
-                        <a:schemeClr val="tx1"/>
-                      </a:solidFill>
-                      <a:prstDash val="solid"/>
-                      <a:round/>
-                      <a:headEnd type="none" w="med" len="med"/>
-                      <a:tailEnd type="none" w="med" len="med"/>
-                    </a:lnB>
-                    <a:noFill/>
-                  </a:tcPr>
-                </a:tc>
-                <a:tc>
-                  <a:txBody>
-                    <a:bodyPr/>
-                    <a:lstStyle/>
-                    <a:p>
-                      <a:pPr rtl="0">
-                        <a:buNone/>
-                      </a:pPr>
-                      <a:r>
-                        <a:rPr lang="en-GB" sz="1000" b="1">
-                          <a:solidFill>
-                            <a:srgbClr val="1F1F1F"/>
-                          </a:solidFill>
-                          <a:effectLst/>
-                          <a:latin typeface="Times New Roman" panose="02020603050405020304" pitchFamily="18" charset="0"/>
-                          <a:cs typeface="Times New Roman" panose="02020603050405020304" pitchFamily="18" charset="0"/>
-                        </a:rPr>
-                        <a:t>Unified Analytics:</a:t>
-                      </a:r>
-                      <a:r>
-                        <a:rPr lang="en-GB" sz="1000">
-                          <a:solidFill>
-                            <a:srgbClr val="1F1F1F"/>
-                          </a:solidFill>
-                          <a:effectLst/>
-                          <a:latin typeface="Times New Roman" panose="02020603050405020304" pitchFamily="18" charset="0"/>
-                          <a:cs typeface="Times New Roman" panose="02020603050405020304" pitchFamily="18" charset="0"/>
-                        </a:rPr>
-                        <a:t> Faculty/Admin can see "Complete Attendance Analysis" alongside "Coding Scores."</a:t>
-                      </a:r>
-                    </a:p>
-                  </a:txBody>
-                  <a:tcPr marL="22047" marR="22047" marT="14698" marB="14698" anchor="ctr">
-                    <a:lnL w="12700" cap="flat" cmpd="sng" algn="ctr">
-                      <a:solidFill>
-                        <a:schemeClr val="tx1"/>
-                      </a:solidFill>
-                      <a:prstDash val="solid"/>
-                      <a:round/>
-                      <a:headEnd type="none" w="med" len="med"/>
-                      <a:tailEnd type="none" w="med" len="med"/>
-                    </a:lnL>
-                    <a:lnR w="12700" cap="flat" cmpd="sng" algn="ctr">
-                      <a:solidFill>
-                        <a:schemeClr val="tx1"/>
-                      </a:solidFill>
-                      <a:prstDash val="solid"/>
-                      <a:round/>
-                      <a:headEnd type="none" w="med" len="med"/>
-                      <a:tailEnd type="none" w="med" len="med"/>
-                    </a:lnR>
-                    <a:lnT w="12700" cap="flat" cmpd="sng" algn="ctr">
-                      <a:solidFill>
-                        <a:schemeClr val="tx1"/>
-                      </a:solidFill>
-                      <a:prstDash val="solid"/>
-                      <a:round/>
-                      <a:headEnd type="none" w="med" len="med"/>
-                      <a:tailEnd type="none" w="med" len="med"/>
-                    </a:lnT>
-                    <a:lnB w="12700" cap="flat" cmpd="sng" algn="ctr">
-                      <a:solidFill>
-                        <a:schemeClr val="tx1"/>
-                      </a:solidFill>
-                      <a:prstDash val="solid"/>
-                      <a:round/>
-                      <a:headEnd type="none" w="med" len="med"/>
-                      <a:tailEnd type="none" w="med" len="med"/>
-                    </a:lnB>
-                    <a:noFill/>
-                  </a:tcPr>
-                </a:tc>
-                <a:extLst>
-                  <a:ext uri="{0D108BD9-81ED-4DB2-BD59-A6C34878D82A}">
-                    <a16:rowId xmlns:a16="http://schemas.microsoft.com/office/drawing/2014/main" val="3884932407"/>
-                  </a:ext>
-                </a:extLst>
-              </a:tr>
-              <a:tr h="426242">
-                <a:tc>
-                  <a:txBody>
-                    <a:bodyPr/>
-                    <a:lstStyle/>
-                    <a:p>
-                      <a:pPr rtl="0">
-                        <a:buNone/>
-                      </a:pPr>
-                      <a:r>
-                        <a:rPr lang="en-GB" sz="1000" b="1" dirty="0">
-                          <a:solidFill>
-                            <a:srgbClr val="1F1F1F"/>
-                          </a:solidFill>
-                          <a:effectLst/>
-                          <a:latin typeface="Times New Roman" panose="02020603050405020304" pitchFamily="18" charset="0"/>
-                          <a:cs typeface="Times New Roman" panose="02020603050405020304" pitchFamily="18" charset="0"/>
-                        </a:rPr>
-                        <a:t>Paper 7 (NLP Attendance)</a:t>
-                      </a:r>
-                      <a:endParaRPr lang="en-GB" sz="1000" dirty="0">
-                        <a:solidFill>
-                          <a:srgbClr val="1F1F1F"/>
-                        </a:solidFill>
-                        <a:effectLst/>
-                        <a:latin typeface="Times New Roman" panose="02020603050405020304" pitchFamily="18" charset="0"/>
-                        <a:cs typeface="Times New Roman" panose="02020603050405020304" pitchFamily="18" charset="0"/>
-                      </a:endParaRPr>
-                    </a:p>
-                  </a:txBody>
-                  <a:tcPr marL="22047" marR="22047" marT="14698" marB="14698" anchor="ctr">
-                    <a:lnL w="12700" cap="flat" cmpd="sng" algn="ctr">
-                      <a:solidFill>
-                        <a:schemeClr val="tx1"/>
-                      </a:solidFill>
-                      <a:prstDash val="solid"/>
-                      <a:round/>
-                      <a:headEnd type="none" w="med" len="med"/>
-                      <a:tailEnd type="none" w="med" len="med"/>
-                    </a:lnL>
-                    <a:lnR w="12700" cap="flat" cmpd="sng" algn="ctr">
-                      <a:solidFill>
-                        <a:schemeClr val="tx1"/>
-                      </a:solidFill>
-                      <a:prstDash val="solid"/>
-                      <a:round/>
-                      <a:headEnd type="none" w="med" len="med"/>
-                      <a:tailEnd type="none" w="med" len="med"/>
-                    </a:lnR>
-                    <a:lnT w="12700" cap="flat" cmpd="sng" algn="ctr">
-                      <a:solidFill>
-                        <a:schemeClr val="tx1"/>
-                      </a:solidFill>
-                      <a:prstDash val="solid"/>
-                      <a:round/>
-                      <a:headEnd type="none" w="med" len="med"/>
-                      <a:tailEnd type="none" w="med" len="med"/>
-                    </a:lnT>
-                    <a:lnB w="12700" cap="flat" cmpd="sng" algn="ctr">
-                      <a:solidFill>
-                        <a:schemeClr val="tx1"/>
-                      </a:solidFill>
-                      <a:prstDash val="solid"/>
-                      <a:round/>
-                      <a:headEnd type="none" w="med" len="med"/>
-                      <a:tailEnd type="none" w="med" len="med"/>
-                    </a:lnB>
-                    <a:noFill/>
-                  </a:tcPr>
-                </a:tc>
-                <a:tc>
-                  <a:txBody>
-                    <a:bodyPr/>
-                    <a:lstStyle/>
-                    <a:p>
-                      <a:pPr rtl="0">
-                        <a:buNone/>
-                      </a:pPr>
-                      <a:r>
-                        <a:rPr lang="en-GB" sz="1000" b="1" dirty="0">
-                          <a:solidFill>
-                            <a:srgbClr val="1F1F1F"/>
-                          </a:solidFill>
-                          <a:effectLst/>
-                          <a:latin typeface="Times New Roman" panose="02020603050405020304" pitchFamily="18" charset="0"/>
-                          <a:cs typeface="Times New Roman" panose="02020603050405020304" pitchFamily="18" charset="0"/>
-                        </a:rPr>
-                        <a:t>High Interaction Effort:</a:t>
-                      </a:r>
-                      <a:r>
-                        <a:rPr lang="en-GB" sz="1000" dirty="0">
-                          <a:solidFill>
-                            <a:srgbClr val="1F1F1F"/>
-                          </a:solidFill>
-                          <a:effectLst/>
-                          <a:latin typeface="Times New Roman" panose="02020603050405020304" pitchFamily="18" charset="0"/>
-                          <a:cs typeface="Times New Roman" panose="02020603050405020304" pitchFamily="18" charset="0"/>
-                        </a:rPr>
-                        <a:t> Traditional apps require too many clicks for bulk attendance posting.</a:t>
-                      </a:r>
-                    </a:p>
-                  </a:txBody>
-                  <a:tcPr marL="22047" marR="22047" marT="14698" marB="14698" anchor="ctr">
-                    <a:lnL w="12700" cap="flat" cmpd="sng" algn="ctr">
-                      <a:solidFill>
-                        <a:schemeClr val="tx1"/>
-                      </a:solidFill>
-                      <a:prstDash val="solid"/>
-                      <a:round/>
-                      <a:headEnd type="none" w="med" len="med"/>
-                      <a:tailEnd type="none" w="med" len="med"/>
-                    </a:lnL>
-                    <a:lnR w="12700" cap="flat" cmpd="sng" algn="ctr">
-                      <a:solidFill>
-                        <a:schemeClr val="tx1"/>
-                      </a:solidFill>
-                      <a:prstDash val="solid"/>
-                      <a:round/>
-                      <a:headEnd type="none" w="med" len="med"/>
-                      <a:tailEnd type="none" w="med" len="med"/>
-                    </a:lnR>
-                    <a:lnT w="12700" cap="flat" cmpd="sng" algn="ctr">
-                      <a:solidFill>
-                        <a:schemeClr val="tx1"/>
-                      </a:solidFill>
-                      <a:prstDash val="solid"/>
-                      <a:round/>
-                      <a:headEnd type="none" w="med" len="med"/>
-                      <a:tailEnd type="none" w="med" len="med"/>
-                    </a:lnT>
-                    <a:lnB w="12700" cap="flat" cmpd="sng" algn="ctr">
-                      <a:solidFill>
-                        <a:schemeClr val="tx1"/>
-                      </a:solidFill>
-                      <a:prstDash val="solid"/>
-                      <a:round/>
-                      <a:headEnd type="none" w="med" len="med"/>
-                      <a:tailEnd type="none" w="med" len="med"/>
-                    </a:lnB>
-                    <a:noFill/>
-                  </a:tcPr>
-                </a:tc>
-                <a:tc>
-                  <a:txBody>
-                    <a:bodyPr/>
-                    <a:lstStyle/>
-                    <a:p>
-                      <a:pPr rtl="0">
-                        <a:buNone/>
-                      </a:pPr>
-                      <a:r>
-                        <a:rPr lang="en-GB" sz="1000" b="1" dirty="0">
-                          <a:solidFill>
-                            <a:srgbClr val="1F1F1F"/>
-                          </a:solidFill>
-                          <a:effectLst/>
-                          <a:latin typeface="Times New Roman" panose="02020603050405020304" pitchFamily="18" charset="0"/>
-                          <a:cs typeface="Times New Roman" panose="02020603050405020304" pitchFamily="18" charset="0"/>
-                        </a:rPr>
-                        <a:t>Transactional NLP:</a:t>
-                      </a:r>
-                      <a:r>
-                        <a:rPr lang="en-GB" sz="1000" dirty="0">
-                          <a:solidFill>
-                            <a:srgbClr val="1F1F1F"/>
-                          </a:solidFill>
-                          <a:effectLst/>
-                          <a:latin typeface="Times New Roman" panose="02020603050405020304" pitchFamily="18" charset="0"/>
-                          <a:cs typeface="Times New Roman" panose="02020603050405020304" pitchFamily="18" charset="0"/>
-                        </a:rPr>
-                        <a:t> Faculty can post bulk attendance via text (e.g., "Roll X absent, others present").</a:t>
-                      </a:r>
-                    </a:p>
-                  </a:txBody>
-                  <a:tcPr marL="22047" marR="22047" marT="14698" marB="14698" anchor="ctr">
-                    <a:lnL w="12700" cap="flat" cmpd="sng" algn="ctr">
-                      <a:solidFill>
-                        <a:schemeClr val="tx1"/>
-                      </a:solidFill>
-                      <a:prstDash val="solid"/>
-                      <a:round/>
-                      <a:headEnd type="none" w="med" len="med"/>
-                      <a:tailEnd type="none" w="med" len="med"/>
-                    </a:lnL>
-                    <a:lnR w="12700" cap="flat" cmpd="sng" algn="ctr">
-                      <a:solidFill>
-                        <a:schemeClr val="tx1"/>
-                      </a:solidFill>
-                      <a:prstDash val="solid"/>
-                      <a:round/>
-                      <a:headEnd type="none" w="med" len="med"/>
-                      <a:tailEnd type="none" w="med" len="med"/>
-                    </a:lnR>
-                    <a:lnT w="12700" cap="flat" cmpd="sng" algn="ctr">
-                      <a:solidFill>
-                        <a:schemeClr val="tx1"/>
-                      </a:solidFill>
-                      <a:prstDash val="solid"/>
-                      <a:round/>
-                      <a:headEnd type="none" w="med" len="med"/>
-                      <a:tailEnd type="none" w="med" len="med"/>
-                    </a:lnT>
-                    <a:lnB w="12700" cap="flat" cmpd="sng" algn="ctr">
-                      <a:solidFill>
-                        <a:schemeClr val="tx1"/>
-                      </a:solidFill>
-                      <a:prstDash val="solid"/>
-                      <a:round/>
-                      <a:headEnd type="none" w="med" len="med"/>
-                      <a:tailEnd type="none" w="med" len="med"/>
-                    </a:lnB>
-                    <a:noFill/>
-                  </a:tcPr>
-                </a:tc>
-                <a:extLst>
-                  <a:ext uri="{0D108BD9-81ED-4DB2-BD59-A6C34878D82A}">
-                    <a16:rowId xmlns:a16="http://schemas.microsoft.com/office/drawing/2014/main" val="3629967437"/>
-                  </a:ext>
-                </a:extLst>
-              </a:tr>
-              <a:tr h="426242">
-                <a:tc>
-                  <a:txBody>
-                    <a:bodyPr/>
-                    <a:lstStyle/>
-                    <a:p>
-                      <a:pPr rtl="0">
-                        <a:buNone/>
-                      </a:pPr>
-                      <a:r>
-                        <a:rPr lang="en-GB" sz="1000" b="1" dirty="0">
-                          <a:solidFill>
-                            <a:srgbClr val="1F1F1F"/>
-                          </a:solidFill>
-                          <a:effectLst/>
-                          <a:latin typeface="Times New Roman" panose="02020603050405020304" pitchFamily="18" charset="0"/>
-                          <a:cs typeface="Times New Roman" panose="02020603050405020304" pitchFamily="18" charset="0"/>
-                        </a:rPr>
-                        <a:t>Paper 8 (NLP Assistance)</a:t>
-                      </a:r>
-                      <a:endParaRPr lang="en-GB" sz="1000" dirty="0">
-                        <a:solidFill>
-                          <a:srgbClr val="1F1F1F"/>
-                        </a:solidFill>
-                        <a:effectLst/>
-                        <a:latin typeface="Times New Roman" panose="02020603050405020304" pitchFamily="18" charset="0"/>
-                        <a:cs typeface="Times New Roman" panose="02020603050405020304" pitchFamily="18" charset="0"/>
-                      </a:endParaRPr>
-                    </a:p>
-                  </a:txBody>
-                  <a:tcPr marL="22047" marR="22047" marT="14698" marB="14698" anchor="ctr">
-                    <a:lnL w="12700" cap="flat" cmpd="sng" algn="ctr">
-                      <a:solidFill>
-                        <a:schemeClr val="tx1"/>
-                      </a:solidFill>
-                      <a:prstDash val="solid"/>
-                      <a:round/>
-                      <a:headEnd type="none" w="med" len="med"/>
-                      <a:tailEnd type="none" w="med" len="med"/>
-                    </a:lnL>
-                    <a:lnR w="12700" cap="flat" cmpd="sng" algn="ctr">
-                      <a:solidFill>
-                        <a:schemeClr val="tx1"/>
-                      </a:solidFill>
-                      <a:prstDash val="solid"/>
-                      <a:round/>
-                      <a:headEnd type="none" w="med" len="med"/>
-                      <a:tailEnd type="none" w="med" len="med"/>
-                    </a:lnR>
-                    <a:lnT w="12700" cap="flat" cmpd="sng" algn="ctr">
-                      <a:solidFill>
-                        <a:schemeClr val="tx1"/>
-                      </a:solidFill>
-                      <a:prstDash val="solid"/>
-                      <a:round/>
-                      <a:headEnd type="none" w="med" len="med"/>
-                      <a:tailEnd type="none" w="med" len="med"/>
-                    </a:lnT>
-                    <a:lnB w="12700" cap="flat" cmpd="sng" algn="ctr">
-                      <a:solidFill>
-                        <a:schemeClr val="tx1"/>
-                      </a:solidFill>
-                      <a:prstDash val="solid"/>
-                      <a:round/>
-                      <a:headEnd type="none" w="med" len="med"/>
-                      <a:tailEnd type="none" w="med" len="med"/>
-                    </a:lnB>
-                    <a:noFill/>
-                  </a:tcPr>
-                </a:tc>
-                <a:tc>
-                  <a:txBody>
-                    <a:bodyPr/>
-                    <a:lstStyle/>
-                    <a:p>
-                      <a:pPr rtl="0">
-                        <a:buNone/>
-                      </a:pPr>
-                      <a:r>
-                        <a:rPr lang="en-GB" sz="1000" b="1">
-                          <a:solidFill>
-                            <a:srgbClr val="1F1F1F"/>
-                          </a:solidFill>
-                          <a:effectLst/>
-                          <a:latin typeface="Times New Roman" panose="02020603050405020304" pitchFamily="18" charset="0"/>
-                          <a:cs typeface="Times New Roman" panose="02020603050405020304" pitchFamily="18" charset="0"/>
-                        </a:rPr>
-                        <a:t>Static Assistance:</a:t>
-                      </a:r>
-                      <a:r>
-                        <a:rPr lang="en-GB" sz="1000">
-                          <a:solidFill>
-                            <a:srgbClr val="1F1F1F"/>
-                          </a:solidFill>
-                          <a:effectLst/>
-                          <a:latin typeface="Times New Roman" panose="02020603050405020304" pitchFamily="18" charset="0"/>
-                          <a:cs typeface="Times New Roman" panose="02020603050405020304" pitchFamily="18" charset="0"/>
-                        </a:rPr>
-                        <a:t> Basic bots answer FAQs but don't support performance growth.</a:t>
-                      </a:r>
-                    </a:p>
-                  </a:txBody>
-                  <a:tcPr marL="22047" marR="22047" marT="14698" marB="14698" anchor="ctr">
-                    <a:lnL w="12700" cap="flat" cmpd="sng" algn="ctr">
-                      <a:solidFill>
-                        <a:schemeClr val="tx1"/>
-                      </a:solidFill>
-                      <a:prstDash val="solid"/>
-                      <a:round/>
-                      <a:headEnd type="none" w="med" len="med"/>
-                      <a:tailEnd type="none" w="med" len="med"/>
-                    </a:lnL>
-                    <a:lnR w="12700" cap="flat" cmpd="sng" algn="ctr">
-                      <a:solidFill>
-                        <a:schemeClr val="tx1"/>
-                      </a:solidFill>
-                      <a:prstDash val="solid"/>
-                      <a:round/>
-                      <a:headEnd type="none" w="med" len="med"/>
-                      <a:tailEnd type="none" w="med" len="med"/>
-                    </a:lnR>
-                    <a:lnT w="12700" cap="flat" cmpd="sng" algn="ctr">
-                      <a:solidFill>
-                        <a:schemeClr val="tx1"/>
-                      </a:solidFill>
-                      <a:prstDash val="solid"/>
-                      <a:round/>
-                      <a:headEnd type="none" w="med" len="med"/>
-                      <a:tailEnd type="none" w="med" len="med"/>
-                    </a:lnT>
-                    <a:lnB w="12700" cap="flat" cmpd="sng" algn="ctr">
-                      <a:solidFill>
-                        <a:schemeClr val="tx1"/>
-                      </a:solidFill>
-                      <a:prstDash val="solid"/>
-                      <a:round/>
-                      <a:headEnd type="none" w="med" len="med"/>
-                      <a:tailEnd type="none" w="med" len="med"/>
-                    </a:lnB>
-                    <a:noFill/>
-                  </a:tcPr>
-                </a:tc>
-                <a:tc>
-                  <a:txBody>
-                    <a:bodyPr/>
-                    <a:lstStyle/>
-                    <a:p>
-                      <a:pPr rtl="0">
-                        <a:buNone/>
-                      </a:pPr>
-                      <a:r>
-                        <a:rPr lang="en-GB" sz="1000" b="1" dirty="0">
-                          <a:solidFill>
-                            <a:srgbClr val="1F1F1F"/>
-                          </a:solidFill>
-                          <a:effectLst/>
-                          <a:latin typeface="Times New Roman" panose="02020603050405020304" pitchFamily="18" charset="0"/>
-                          <a:cs typeface="Times New Roman" panose="02020603050405020304" pitchFamily="18" charset="0"/>
-                        </a:rPr>
-                        <a:t>Smart Assistance:</a:t>
-                      </a:r>
-                      <a:r>
-                        <a:rPr lang="en-GB" sz="1000" dirty="0">
-                          <a:solidFill>
-                            <a:srgbClr val="1F1F1F"/>
-                          </a:solidFill>
-                          <a:effectLst/>
-                          <a:latin typeface="Times New Roman" panose="02020603050405020304" pitchFamily="18" charset="0"/>
-                          <a:cs typeface="Times New Roman" panose="02020603050405020304" pitchFamily="18" charset="0"/>
-                        </a:rPr>
-                        <a:t> Chatbot helps students with mock exams while tracking their "Coding Score" progress.</a:t>
-                      </a:r>
-                    </a:p>
-                  </a:txBody>
-                  <a:tcPr marL="22047" marR="22047" marT="14698" marB="14698" anchor="ctr">
-                    <a:lnL w="12700" cap="flat" cmpd="sng" algn="ctr">
-                      <a:solidFill>
-                        <a:schemeClr val="tx1"/>
-                      </a:solidFill>
-                      <a:prstDash val="solid"/>
-                      <a:round/>
-                      <a:headEnd type="none" w="med" len="med"/>
-                      <a:tailEnd type="none" w="med" len="med"/>
-                    </a:lnL>
-                    <a:lnR w="12700" cap="flat" cmpd="sng" algn="ctr">
-                      <a:solidFill>
-                        <a:schemeClr val="tx1"/>
-                      </a:solidFill>
-                      <a:prstDash val="solid"/>
-                      <a:round/>
-                      <a:headEnd type="none" w="med" len="med"/>
-                      <a:tailEnd type="none" w="med" len="med"/>
-                    </a:lnR>
-                    <a:lnT w="12700" cap="flat" cmpd="sng" algn="ctr">
-                      <a:solidFill>
-                        <a:schemeClr val="tx1"/>
-                      </a:solidFill>
-                      <a:prstDash val="solid"/>
-                      <a:round/>
-                      <a:headEnd type="none" w="med" len="med"/>
-                      <a:tailEnd type="none" w="med" len="med"/>
-                    </a:lnT>
-                    <a:lnB w="12700" cap="flat" cmpd="sng" algn="ctr">
-                      <a:solidFill>
-                        <a:schemeClr val="tx1"/>
-                      </a:solidFill>
-                      <a:prstDash val="solid"/>
-                      <a:round/>
-                      <a:headEnd type="none" w="med" len="med"/>
-                      <a:tailEnd type="none" w="med" len="med"/>
-                    </a:lnB>
-                    <a:noFill/>
-                  </a:tcPr>
-                </a:tc>
-                <a:extLst>
-                  <a:ext uri="{0D108BD9-81ED-4DB2-BD59-A6C34878D82A}">
-                    <a16:rowId xmlns:a16="http://schemas.microsoft.com/office/drawing/2014/main" val="2409476306"/>
-                  </a:ext>
-                </a:extLst>
-              </a:tr>
-            </a:tbl>
-          </a:graphicData>
-        </a:graphic>
-      </p:graphicFrame>
-    </p:spTree>
-    <p:extLst>
-      <p:ext uri="{BB962C8B-B14F-4D97-AF65-F5344CB8AC3E}">
-        <p14:creationId xmlns:p14="http://schemas.microsoft.com/office/powerpoint/2010/main" val="3032003584"/>
-      </p:ext>
-    </p:extLst>
-  </p:cSld>
-  <p:clrMapOvr>
-    <a:masterClrMapping/>
-  </p:clrMapOvr>
-  <p:transition>
-    <p:fade/>
-  </p:transition>
-</p:sld>
-</file>
-
-<file path=ppt/slides/slide13.xml><?xml version="1.0" encoding="utf-8"?>
-<p:sld xmlns:a="http://schemas.openxmlformats.org/drawingml/2006/main" xmlns:r="http://schemas.openxmlformats.org/officeDocument/2006/relationships" xmlns:p="http://schemas.openxmlformats.org/presentationml/2006/main">
-  <p:cSld>
-    <p:spTree>
-      <p:nvGrpSpPr>
-        <p:cNvPr id="1" name=""/>
-        <p:cNvGrpSpPr/>
-        <p:nvPr/>
-      </p:nvGrpSpPr>
-      <p:grpSpPr>
-        <a:xfrm>
-          <a:off x="0" y="0"/>
-          <a:ext cx="0" cy="0"/>
-          <a:chOff x="0" y="0"/>
-          <a:chExt cx="0" cy="0"/>
-        </a:xfrm>
-      </p:grpSpPr>
-      <p:sp>
-        <p:nvSpPr>
-          <p:cNvPr id="2" name="Slide Number Placeholder 1">
-            <a:extLst>
-              <a:ext uri="{FF2B5EF4-FFF2-40B4-BE49-F238E27FC236}">
-                <a16:creationId xmlns:a16="http://schemas.microsoft.com/office/drawing/2014/main" id="{CD925B32-5762-0AB2-E08A-461E4C8B7014}"/>
-              </a:ext>
-            </a:extLst>
-          </p:cNvPr>
-          <p:cNvSpPr>
-            <a:spLocks noGrp="1"/>
-          </p:cNvSpPr>
-          <p:nvPr>
-            <p:ph type="sldNum" sz="quarter" idx="4"/>
-          </p:nvPr>
-        </p:nvSpPr>
-        <p:spPr>
-          <a:xfrm>
-            <a:off x="8629650" y="4817444"/>
-            <a:ext cx="514350" cy="326056"/>
-          </a:xfrm>
-        </p:spPr>
-        <p:txBody>
-          <a:bodyPr/>
-          <a:lstStyle/>
-          <a:p>
-            <a:fld id="{4B327F5A-7D8F-4012-9A1A-2197D74A174F}" type="slidenum">
-              <a:rPr lang="en-IN" smtClean="0"/>
-              <a:pPr/>
-              <a:t>13</a:t>
+              <a:t>11</a:t>
             </a:fld>
             <a:endParaRPr lang="en-IN" dirty="0"/>
           </a:p>
@@ -11143,7 +8283,7 @@
 </p:sld>
 </file>
 
-<file path=ppt/slides/slide14.xml><?xml version="1.0" encoding="utf-8"?>
+<file path=ppt/slides/slide12.xml><?xml version="1.0" encoding="utf-8"?>
 <p:sld xmlns:a="http://schemas.openxmlformats.org/drawingml/2006/main" xmlns:r="http://schemas.openxmlformats.org/officeDocument/2006/relationships" xmlns:p="http://schemas.openxmlformats.org/presentationml/2006/main">
   <p:cSld>
     <p:spTree>
@@ -11189,7 +8329,7 @@
             <a:fld id="{4B327F5A-7D8F-4012-9A1A-2197D74A174F}" type="slidenum">
               <a:rPr lang="en-IN" smtClean="0"/>
               <a:pPr/>
-              <a:t>14</a:t>
+              <a:t>12</a:t>
             </a:fld>
             <a:endParaRPr lang="en-IN" dirty="0"/>
           </a:p>
@@ -11888,7 +9028,7 @@
 </p:sld>
 </file>
 
-<file path=ppt/slides/slide15.xml><?xml version="1.0" encoding="utf-8"?>
+<file path=ppt/slides/slide13.xml><?xml version="1.0" encoding="utf-8"?>
 <p:sld xmlns:a="http://schemas.openxmlformats.org/drawingml/2006/main" xmlns:r="http://schemas.openxmlformats.org/officeDocument/2006/relationships" xmlns:p="http://schemas.openxmlformats.org/presentationml/2006/main">
   <p:cSld>
     <p:spTree>
@@ -11929,7 +9069,7 @@
             <a:fld id="{4B327F5A-7D8F-4012-9A1A-2197D74A174F}" type="slidenum">
               <a:rPr lang="en-IN" smtClean="0"/>
               <a:pPr/>
-              <a:t>15</a:t>
+              <a:t>13</a:t>
             </a:fld>
             <a:endParaRPr lang="en-IN" dirty="0"/>
           </a:p>
@@ -12016,8 +9156,8 @@
         </p:nvSpPr>
         <p:spPr bwMode="auto">
           <a:xfrm rot="10800000" flipV="1">
-            <a:off x="109330" y="1258564"/>
-            <a:ext cx="8925339" cy="2308324"/>
+            <a:off x="66039" y="1279088"/>
+            <a:ext cx="8925339" cy="2585323"/>
           </a:xfrm>
           <a:prstGeom prst="rect">
             <a:avLst/>
@@ -12111,7 +9251,23 @@
                 <a:latin typeface="Times New Roman" panose="02020603050405020304" pitchFamily="18" charset="0"/>
                 <a:cs typeface="Times New Roman" panose="02020603050405020304" pitchFamily="18" charset="0"/>
               </a:rPr>
-              <a:t> 80% reduction in attendance time via QR and NLP text commands.</a:t>
+              <a:t> </a:t>
+            </a:r>
+            <a:r>
+              <a:rPr kumimoji="0" lang="en-GB" altLang="en-US" sz="1800" b="0" i="0" u="none" strike="noStrike" cap="none" normalizeH="0" baseline="0" dirty="0">
+                <a:ln>
+                  <a:noFill/>
+                </a:ln>
+                <a:solidFill>
+                  <a:schemeClr val="accent2">
+                    <a:lumMod val="50000"/>
+                  </a:schemeClr>
+                </a:solidFill>
+                <a:effectLst/>
+                <a:latin typeface="Times New Roman" panose="02020603050405020304" pitchFamily="18" charset="0"/>
+                <a:cs typeface="Times New Roman" panose="02020603050405020304" pitchFamily="18" charset="0"/>
+              </a:rPr>
+              <a:t>80% reduction in attendance marking time through optimized QR scanning workflows compared to traditional manual roll-calls.</a:t>
             </a:r>
           </a:p>
           <a:p>
@@ -12375,7 +9531,7 @@
 </p:sld>
 </file>
 
-<file path=ppt/slides/slide16.xml><?xml version="1.0" encoding="utf-8"?>
+<file path=ppt/slides/slide14.xml><?xml version="1.0" encoding="utf-8"?>
 <p:sld xmlns:a="http://schemas.openxmlformats.org/drawingml/2006/main" xmlns:r="http://schemas.openxmlformats.org/officeDocument/2006/relationships" xmlns:p="http://schemas.openxmlformats.org/presentationml/2006/main">
   <p:cSld>
     <p:spTree>
@@ -12421,7 +9577,7 @@
             <a:fld id="{4B327F5A-7D8F-4012-9A1A-2197D74A174F}" type="slidenum">
               <a:rPr lang="en-IN" smtClean="0"/>
               <a:pPr/>
-              <a:t>16</a:t>
+              <a:t>14</a:t>
             </a:fld>
             <a:endParaRPr lang="en-IN" dirty="0"/>
           </a:p>
